--- a/slides/sources/J1-fondamentaux.pptx
+++ b/slides/sources/J1-fondamentaux.pptx
@@ -1569,7 +1569,7 @@
     <p:bg>
       <p:bgPr>
         <a:solidFill>
-          <a:srgbClr val="0D3325"/>
+          <a:srgbClr val="0A2E1A"/>
         </a:solidFill>
       </p:bgPr>
     </p:bg>
@@ -1602,7 +1602,7 @@
             <a:avLst/>
           </a:prstGeom>
           <a:solidFill>
-            <a:srgbClr val="14563C"/>
+            <a:srgbClr val="0E7A3D"/>
           </a:solidFill>
           <a:ln/>
         </p:spPr>
@@ -1622,8 +1622,8 @@
             <a:avLst/>
           </a:prstGeom>
           <a:solidFill>
-            <a:srgbClr val="C9A227">
-              <a:alpha val="45000"/>
+            <a:srgbClr val="FCD116">
+              <a:alpha val="55000"/>
             </a:srgbClr>
           </a:solidFill>
           <a:ln/>
@@ -1644,8 +1644,8 @@
             <a:avLst/>
           </a:prstGeom>
           <a:solidFill>
-            <a:srgbClr val="1E7A50">
-              <a:alpha val="60000"/>
+            <a:srgbClr val="CE1126">
+              <a:alpha val="65000"/>
             </a:srgbClr>
           </a:solidFill>
           <a:ln/>
@@ -1653,7 +1653,53 @@
       </p:sp>
       <p:sp>
         <p:nvSpPr>
-          <p:cNvPr id="5" name="Text 3"/>
+          <p:cNvPr id="5" name="Shape 3"/>
+          <p:cNvSpPr/>
+          <p:nvPr/>
+        </p:nvSpPr>
+        <p:spPr>
+          <a:xfrm>
+            <a:off x="9464040" y="502920"/>
+            <a:ext cx="2148840" cy="1828800"/>
+          </a:xfrm>
+          <a:prstGeom prst="roundRect">
+            <a:avLst>
+              <a:gd name="adj" fmla="val 6000"/>
+            </a:avLst>
+          </a:prstGeom>
+          <a:solidFill>
+            <a:srgbClr val="FFFFFF"/>
+          </a:solidFill>
+          <a:ln/>
+        </p:spPr>
+      </p:sp>
+      <p:pic>
+        <p:nvPicPr>
+          <p:cNvPr id="6" name="Image 0" descr="logo-dgi.png">    </p:cNvPr>
+          <p:cNvPicPr>
+            <a:picLocks noChangeAspect="1"/>
+          </p:cNvPicPr>
+          <p:nvPr/>
+        </p:nvPicPr>
+        <p:blipFill>
+          <a:blip r:embed="rId1"/>
+          <a:stretch>
+            <a:fillRect/>
+          </a:stretch>
+        </p:blipFill>
+        <p:spPr>
+          <a:xfrm>
+            <a:off x="9646920" y="740664"/>
+            <a:ext cx="1783080" cy="1353312"/>
+          </a:xfrm>
+          <a:prstGeom prst="rect">
+            <a:avLst/>
+          </a:prstGeom>
+        </p:spPr>
+      </p:pic>
+      <p:sp>
+        <p:nvSpPr>
+          <p:cNvPr id="7" name="Text 4"/>
           <p:cNvSpPr/>
           <p:nvPr/>
         </p:nvSpPr>
@@ -1678,7 +1724,7 @@
             <a:r>
               <a:rPr lang="en-US" sz="1500" b="1" spc="300" kern="0" dirty="0">
                 <a:solidFill>
-                  <a:srgbClr val="C9A227"/>
+                  <a:srgbClr val="FCD116"/>
                 </a:solidFill>
                 <a:latin typeface="Calibri" pitchFamily="34" charset="0"/>
                 <a:ea typeface="Calibri" pitchFamily="34" charset="-122"/>
@@ -1692,7 +1738,7 @@
       </p:sp>
       <p:sp>
         <p:nvSpPr>
-          <p:cNvPr id="6" name="Text 4"/>
+          <p:cNvPr id="8" name="Text 5"/>
           <p:cNvSpPr/>
           <p:nvPr/>
         </p:nvSpPr>
@@ -1731,7 +1777,7 @@
       </p:sp>
       <p:sp>
         <p:nvSpPr>
-          <p:cNvPr id="7" name="Text 5"/>
+          <p:cNvPr id="9" name="Text 6"/>
           <p:cNvSpPr/>
           <p:nvPr/>
         </p:nvSpPr>
@@ -1756,7 +1802,7 @@
             <a:r>
               <a:rPr lang="en-US" sz="3500" b="1" dirty="0">
                 <a:solidFill>
-                  <a:srgbClr val="E8D48A"/>
+                  <a:srgbClr val="FCD116"/>
                 </a:solidFill>
                 <a:latin typeface="Cambria" pitchFamily="34" charset="0"/>
                 <a:ea typeface="Cambria" pitchFamily="34" charset="-122"/>
@@ -1770,7 +1816,7 @@
       </p:sp>
       <p:sp>
         <p:nvSpPr>
-          <p:cNvPr id="8" name="Text 6"/>
+          <p:cNvPr id="10" name="Text 7"/>
           <p:cNvSpPr/>
           <p:nvPr/>
         </p:nvSpPr>
@@ -1832,7 +1878,7 @@
       </p:sp>
       <p:sp>
         <p:nvSpPr>
-          <p:cNvPr id="9" name="Shape 7"/>
+          <p:cNvPr id="11" name="Shape 8"/>
           <p:cNvSpPr/>
           <p:nvPr/>
         </p:nvSpPr>
@@ -1847,14 +1893,14 @@
             </a:avLst>
           </a:prstGeom>
           <a:solidFill>
-            <a:srgbClr val="14563C"/>
+            <a:srgbClr val="0E7A3D"/>
           </a:solidFill>
           <a:ln/>
         </p:spPr>
       </p:sp>
       <p:sp>
         <p:nvSpPr>
-          <p:cNvPr id="10" name="Text 8"/>
+          <p:cNvPr id="12" name="Text 9"/>
           <p:cNvSpPr/>
           <p:nvPr/>
         </p:nvSpPr>
@@ -1893,7 +1939,7 @@
       </p:sp>
       <p:sp>
         <p:nvSpPr>
-          <p:cNvPr id="11" name="Shape 9"/>
+          <p:cNvPr id="13" name="Shape 10"/>
           <p:cNvSpPr/>
           <p:nvPr/>
         </p:nvSpPr>
@@ -1908,14 +1954,14 @@
             </a:avLst>
           </a:prstGeom>
           <a:solidFill>
-            <a:srgbClr val="14563C"/>
+            <a:srgbClr val="0E7A3D"/>
           </a:solidFill>
           <a:ln/>
         </p:spPr>
       </p:sp>
       <p:sp>
         <p:nvSpPr>
-          <p:cNvPr id="12" name="Text 10"/>
+          <p:cNvPr id="14" name="Text 11"/>
           <p:cNvSpPr/>
           <p:nvPr/>
         </p:nvSpPr>
@@ -1954,7 +2000,7 @@
       </p:sp>
       <p:sp>
         <p:nvSpPr>
-          <p:cNvPr id="13" name="Text 11"/>
+          <p:cNvPr id="15" name="Text 12"/>
           <p:cNvSpPr/>
           <p:nvPr/>
         </p:nvSpPr>
@@ -1985,7 +2031,7 @@
                 <a:ea typeface="Calibri" pitchFamily="34" charset="-122"/>
                 <a:cs typeface="Calibri" pitchFamily="34" charset="-120"/>
               </a:rPr>
-              <a:t>Python, Fondamentaux et Analyse de Données  ·  contexte administration fiscale</a:t>
+              <a:t>DGI — Direction Générale des Impôts · Guinée-Bissau · données pédagogiques fictives</a:t>
             </a:r>
             <a:endParaRPr lang="en-US" sz="1200" dirty="0"/>
           </a:p>
@@ -2032,7 +2078,7 @@
         <p:spPr>
           <a:xfrm>
             <a:off x="548640" y="384048"/>
-            <a:ext cx="10972800" cy="320040"/>
+            <a:ext cx="9601200" cy="320040"/>
           </a:xfrm>
           <a:prstGeom prst="rect">
             <a:avLst/>
@@ -2050,7 +2096,7 @@
             <a:r>
               <a:rPr lang="en-US" sz="1300" b="1" spc="200" kern="0" dirty="0">
                 <a:solidFill>
-                  <a:srgbClr val="C9A227"/>
+                  <a:srgbClr val="C79100"/>
                 </a:solidFill>
                 <a:latin typeface="Calibri" pitchFamily="34" charset="0"/>
                 <a:ea typeface="Calibri" pitchFamily="34" charset="-122"/>
@@ -2071,7 +2117,7 @@
         <p:spPr>
           <a:xfrm>
             <a:off x="548640" y="658368"/>
-            <a:ext cx="11064240" cy="731520"/>
+            <a:ext cx="9966960" cy="731520"/>
           </a:xfrm>
           <a:prstGeom prst="rect">
             <a:avLst/>
@@ -2089,7 +2135,7 @@
             <a:r>
               <a:rPr lang="en-US" sz="3400" b="1" dirty="0">
                 <a:solidFill>
-                  <a:srgbClr val="14563C"/>
+                  <a:srgbClr val="0E7A3D"/>
                 </a:solidFill>
                 <a:latin typeface="Cambria" pitchFamily="34" charset="0"/>
                 <a:ea typeface="Cambria" pitchFamily="34" charset="-122"/>
@@ -2101,29 +2147,9 @@
           </a:p>
         </p:txBody>
       </p:sp>
-      <p:sp>
-        <p:nvSpPr>
-          <p:cNvPr id="4" name="Shape 2"/>
-          <p:cNvSpPr/>
-          <p:nvPr/>
-        </p:nvSpPr>
-        <p:spPr>
-          <a:xfrm>
-            <a:off x="640080" y="1783080"/>
-            <a:ext cx="566928" cy="566928"/>
-          </a:xfrm>
-          <a:prstGeom prst="ellipse">
-            <a:avLst/>
-          </a:prstGeom>
-          <a:solidFill>
-            <a:srgbClr val="14563C"/>
-          </a:solidFill>
-          <a:ln/>
-        </p:spPr>
-      </p:sp>
       <p:pic>
         <p:nvPicPr>
-          <p:cNvPr id="5" name="Image 0" descr="icons/terminal.png">    </p:cNvPr>
+          <p:cNvPr id="4" name="Image 0" descr="logo-dgi.png">    </p:cNvPr>
           <p:cNvPicPr>
             <a:picLocks noChangeAspect="1"/>
           </p:cNvPicPr>
@@ -2137,8 +2163,8 @@
         </p:blipFill>
         <p:spPr>
           <a:xfrm>
-            <a:off x="787481" y="1930481"/>
-            <a:ext cx="272125" cy="272125"/>
+            <a:off x="10744200" y="384048"/>
+            <a:ext cx="1051560" cy="795528"/>
           </a:xfrm>
           <a:prstGeom prst="rect">
             <a:avLst/>
@@ -2147,105 +2173,27 @@
       </p:pic>
       <p:sp>
         <p:nvSpPr>
-          <p:cNvPr id="6" name="Text 3"/>
-          <p:cNvSpPr/>
-          <p:nvPr/>
-        </p:nvSpPr>
-        <p:spPr>
-          <a:xfrm>
-            <a:off x="1417320" y="1728216"/>
-            <a:ext cx="5852160" cy="365760"/>
-          </a:xfrm>
-          <a:prstGeom prst="rect">
-            <a:avLst/>
-          </a:prstGeom>
-          <a:noFill/>
-          <a:ln/>
-        </p:spPr>
-        <p:txBody>
-          <a:bodyPr wrap="square" lIns="0" tIns="0" rIns="0" bIns="0" rtlCol="0" anchor="ctr"/>
-          <a:lstStyle/>
-          <a:p>
-            <a:pPr indent="0" marL="0">
-              <a:buNone/>
-            </a:pPr>
-            <a:r>
-              <a:rPr lang="en-US" sz="1650" b="1" dirty="0">
-                <a:solidFill>
-                  <a:srgbClr val="1C2A24"/>
-                </a:solidFill>
-                <a:latin typeface="Calibri" pitchFamily="34" charset="0"/>
-                <a:ea typeface="Calibri" pitchFamily="34" charset="-122"/>
-                <a:cs typeface="Calibri" pitchFamily="34" charset="-120"/>
-              </a:rPr>
-              <a:t>Un environnement qui marche</a:t>
-            </a:r>
-            <a:endParaRPr lang="en-US" sz="1650" dirty="0"/>
-          </a:p>
-        </p:txBody>
-      </p:sp>
-      <p:sp>
-        <p:nvSpPr>
-          <p:cNvPr id="7" name="Text 4"/>
-          <p:cNvSpPr/>
-          <p:nvPr/>
-        </p:nvSpPr>
-        <p:spPr>
-          <a:xfrm>
-            <a:off x="1417320" y="2057400"/>
-            <a:ext cx="5852160" cy="502920"/>
-          </a:xfrm>
-          <a:prstGeom prst="rect">
-            <a:avLst/>
-          </a:prstGeom>
-          <a:noFill/>
-          <a:ln/>
-        </p:spPr>
-        <p:txBody>
-          <a:bodyPr wrap="square" lIns="0" tIns="0" rIns="0" bIns="0" rtlCol="0" anchor="ctr"/>
-          <a:lstStyle/>
-          <a:p>
-            <a:pPr indent="0" marL="0">
-              <a:buNone/>
-            </a:pPr>
-            <a:r>
-              <a:rPr lang="en-US" sz="1300" dirty="0">
-                <a:solidFill>
-                  <a:srgbClr val="5C6B63"/>
-                </a:solidFill>
-                <a:latin typeface="Calibri" pitchFamily="34" charset="0"/>
-                <a:ea typeface="Calibri" pitchFamily="34" charset="-122"/>
-                <a:cs typeface="Calibri" pitchFamily="34" charset="-120"/>
-              </a:rPr>
-              <a:t>VS Code + uv : le même Python pour tout le monde, en une commande.</a:t>
-            </a:r>
-            <a:endParaRPr lang="en-US" sz="1300" dirty="0"/>
-          </a:p>
-        </p:txBody>
-      </p:sp>
-      <p:sp>
-        <p:nvSpPr>
-          <p:cNvPr id="8" name="Shape 5"/>
-          <p:cNvSpPr/>
-          <p:nvPr/>
-        </p:nvSpPr>
-        <p:spPr>
-          <a:xfrm>
-            <a:off x="640080" y="2807208"/>
+          <p:cNvPr id="5" name="Shape 2"/>
+          <p:cNvSpPr/>
+          <p:nvPr/>
+        </p:nvSpPr>
+        <p:spPr>
+          <a:xfrm>
+            <a:off x="640080" y="1783080"/>
             <a:ext cx="566928" cy="566928"/>
           </a:xfrm>
           <a:prstGeom prst="ellipse">
             <a:avLst/>
           </a:prstGeom>
           <a:solidFill>
-            <a:srgbClr val="1E7A50"/>
+            <a:srgbClr val="0E7A3D"/>
           </a:solidFill>
           <a:ln/>
         </p:spPr>
       </p:sp>
       <p:pic>
         <p:nvPicPr>
-          <p:cNvPr id="9" name="Image 1" descr="icons/code.png">    </p:cNvPr>
+          <p:cNvPr id="6" name="Image 1" descr="icons/terminal.png">    </p:cNvPr>
           <p:cNvPicPr>
             <a:picLocks noChangeAspect="1"/>
           </p:cNvPicPr>
@@ -2259,7 +2207,7 @@
         </p:blipFill>
         <p:spPr>
           <a:xfrm>
-            <a:off x="787481" y="2954609"/>
+            <a:off x="787481" y="1930481"/>
             <a:ext cx="272125" cy="272125"/>
           </a:xfrm>
           <a:prstGeom prst="rect">
@@ -2269,13 +2217,13 @@
       </p:pic>
       <p:sp>
         <p:nvSpPr>
-          <p:cNvPr id="10" name="Text 6"/>
-          <p:cNvSpPr/>
-          <p:nvPr/>
-        </p:nvSpPr>
-        <p:spPr>
-          <a:xfrm>
-            <a:off x="1417320" y="2752344"/>
+          <p:cNvPr id="7" name="Text 3"/>
+          <p:cNvSpPr/>
+          <p:nvPr/>
+        </p:nvSpPr>
+        <p:spPr>
+          <a:xfrm>
+            <a:off x="1417320" y="1728216"/>
             <a:ext cx="5852160" cy="365760"/>
           </a:xfrm>
           <a:prstGeom prst="rect">
@@ -2300,7 +2248,7 @@
                 <a:ea typeface="Calibri" pitchFamily="34" charset="-122"/>
                 <a:cs typeface="Calibri" pitchFamily="34" charset="-120"/>
               </a:rPr>
-              <a:t>Variables, types, f-strings</a:t>
+              <a:t>Un environnement qui marche</a:t>
             </a:r>
             <a:endParaRPr lang="en-US" sz="1650" dirty="0"/>
           </a:p>
@@ -2308,13 +2256,13 @@
       </p:sp>
       <p:sp>
         <p:nvSpPr>
-          <p:cNvPr id="11" name="Text 7"/>
-          <p:cNvSpPr/>
-          <p:nvPr/>
-        </p:nvSpPr>
-        <p:spPr>
-          <a:xfrm>
-            <a:off x="1417320" y="3081528"/>
+          <p:cNvPr id="8" name="Text 4"/>
+          <p:cNvSpPr/>
+          <p:nvPr/>
+        </p:nvSpPr>
+        <p:spPr>
+          <a:xfrm>
+            <a:off x="1417320" y="2057400"/>
             <a:ext cx="5852160" cy="502920"/>
           </a:xfrm>
           <a:prstGeom prst="rect">
@@ -2339,7 +2287,7 @@
                 <a:ea typeface="Calibri" pitchFamily="34" charset="-122"/>
                 <a:cs typeface="Calibri" pitchFamily="34" charset="-120"/>
               </a:rPr>
-              <a:t>int, float, str, bool — et des affichages propres.</a:t>
+              <a:t>VS Code + uv : le même Python pour tout le monde, en une commande.</a:t>
             </a:r>
             <a:endParaRPr lang="en-US" sz="1300" dirty="0"/>
           </a:p>
@@ -2347,27 +2295,27 @@
       </p:sp>
       <p:sp>
         <p:nvSpPr>
-          <p:cNvPr id="12" name="Shape 8"/>
-          <p:cNvSpPr/>
-          <p:nvPr/>
-        </p:nvSpPr>
-        <p:spPr>
-          <a:xfrm>
-            <a:off x="640080" y="3831336"/>
+          <p:cNvPr id="9" name="Shape 5"/>
+          <p:cNvSpPr/>
+          <p:nvPr/>
+        </p:nvSpPr>
+        <p:spPr>
+          <a:xfrm>
+            <a:off x="640080" y="2807208"/>
             <a:ext cx="566928" cy="566928"/>
           </a:xfrm>
           <a:prstGeom prst="ellipse">
             <a:avLst/>
           </a:prstGeom>
           <a:solidFill>
-            <a:srgbClr val="C9A227"/>
+            <a:srgbClr val="2E9E4F"/>
           </a:solidFill>
           <a:ln/>
         </p:spPr>
       </p:sp>
       <p:pic>
         <p:nvPicPr>
-          <p:cNvPr id="13" name="Image 2" descr="icons/flow.png">    </p:cNvPr>
+          <p:cNvPr id="10" name="Image 2" descr="icons/code.png">    </p:cNvPr>
           <p:cNvPicPr>
             <a:picLocks noChangeAspect="1"/>
           </p:cNvPicPr>
@@ -2381,7 +2329,7 @@
         </p:blipFill>
         <p:spPr>
           <a:xfrm>
-            <a:off x="787481" y="3978737"/>
+            <a:off x="787481" y="2954609"/>
             <a:ext cx="272125" cy="272125"/>
           </a:xfrm>
           <a:prstGeom prst="rect">
@@ -2391,13 +2339,13 @@
       </p:pic>
       <p:sp>
         <p:nvSpPr>
-          <p:cNvPr id="14" name="Text 9"/>
-          <p:cNvSpPr/>
-          <p:nvPr/>
-        </p:nvSpPr>
-        <p:spPr>
-          <a:xfrm>
-            <a:off x="1417320" y="3776472"/>
+          <p:cNvPr id="11" name="Text 6"/>
+          <p:cNvSpPr/>
+          <p:nvPr/>
+        </p:nvSpPr>
+        <p:spPr>
+          <a:xfrm>
+            <a:off x="1417320" y="2752344"/>
             <a:ext cx="5852160" cy="365760"/>
           </a:xfrm>
           <a:prstGeom prst="rect">
@@ -2422,7 +2370,7 @@
                 <a:ea typeface="Calibri" pitchFamily="34" charset="-122"/>
                 <a:cs typeface="Calibri" pitchFamily="34" charset="-120"/>
               </a:rPr>
-              <a:t>Conditions et boucles</a:t>
+              <a:t>Variables, types, f-strings</a:t>
             </a:r>
             <a:endParaRPr lang="en-US" sz="1650" dirty="0"/>
           </a:p>
@@ -2430,13 +2378,13 @@
       </p:sp>
       <p:sp>
         <p:nvSpPr>
-          <p:cNvPr id="15" name="Text 10"/>
-          <p:cNvSpPr/>
-          <p:nvPr/>
-        </p:nvSpPr>
-        <p:spPr>
-          <a:xfrm>
-            <a:off x="1417320" y="4105656"/>
+          <p:cNvPr id="12" name="Text 7"/>
+          <p:cNvSpPr/>
+          <p:nvPr/>
+        </p:nvSpPr>
+        <p:spPr>
+          <a:xfrm>
+            <a:off x="1417320" y="3081528"/>
             <a:ext cx="5852160" cy="502920"/>
           </a:xfrm>
           <a:prstGeom prst="rect">
@@ -2461,7 +2409,7 @@
                 <a:ea typeface="Calibri" pitchFamily="34" charset="-122"/>
                 <a:cs typeface="Calibri" pitchFamily="34" charset="-120"/>
               </a:rPr>
-              <a:t>if / elif / else, for, while : le barème d’imposition en code.</a:t>
+              <a:t>int, float, str, bool — et des affichages propres.</a:t>
             </a:r>
             <a:endParaRPr lang="en-US" sz="1300" dirty="0"/>
           </a:p>
@@ -2469,27 +2417,27 @@
       </p:sp>
       <p:sp>
         <p:nvSpPr>
-          <p:cNvPr id="16" name="Shape 11"/>
-          <p:cNvSpPr/>
-          <p:nvPr/>
-        </p:nvSpPr>
-        <p:spPr>
-          <a:xfrm>
-            <a:off x="640080" y="4855464"/>
+          <p:cNvPr id="13" name="Shape 8"/>
+          <p:cNvSpPr/>
+          <p:nvPr/>
+        </p:nvSpPr>
+        <p:spPr>
+          <a:xfrm>
+            <a:off x="640080" y="3831336"/>
             <a:ext cx="566928" cy="566928"/>
           </a:xfrm>
           <a:prstGeom prst="ellipse">
             <a:avLst/>
           </a:prstGeom>
           <a:solidFill>
-            <a:srgbClr val="14563C"/>
+            <a:srgbClr val="C79100"/>
           </a:solidFill>
           <a:ln/>
         </p:spPr>
       </p:sp>
       <p:pic>
         <p:nvPicPr>
-          <p:cNvPr id="17" name="Image 3" descr="icons/db.png">    </p:cNvPr>
+          <p:cNvPr id="14" name="Image 3" descr="icons/flow.png">    </p:cNvPr>
           <p:cNvPicPr>
             <a:picLocks noChangeAspect="1"/>
           </p:cNvPicPr>
@@ -2503,7 +2451,7 @@
         </p:blipFill>
         <p:spPr>
           <a:xfrm>
-            <a:off x="787481" y="5002865"/>
+            <a:off x="787481" y="3978737"/>
             <a:ext cx="272125" cy="272125"/>
           </a:xfrm>
           <a:prstGeom prst="rect">
@@ -2513,13 +2461,13 @@
       </p:pic>
       <p:sp>
         <p:nvSpPr>
-          <p:cNvPr id="18" name="Text 12"/>
-          <p:cNvSpPr/>
-          <p:nvPr/>
-        </p:nvSpPr>
-        <p:spPr>
-          <a:xfrm>
-            <a:off x="1417320" y="4800600"/>
+          <p:cNvPr id="15" name="Text 9"/>
+          <p:cNvSpPr/>
+          <p:nvPr/>
+        </p:nvSpPr>
+        <p:spPr>
+          <a:xfrm>
+            <a:off x="1417320" y="3776472"/>
             <a:ext cx="5852160" cy="365760"/>
           </a:xfrm>
           <a:prstGeom prst="rect">
@@ -2544,7 +2492,7 @@
                 <a:ea typeface="Calibri" pitchFamily="34" charset="-122"/>
                 <a:cs typeface="Calibri" pitchFamily="34" charset="-120"/>
               </a:rPr>
-              <a:t>Les données de la formation</a:t>
+              <a:t>Conditions et boucles</a:t>
             </a:r>
             <a:endParaRPr lang="en-US" sz="1650" dirty="0"/>
           </a:p>
@@ -2552,13 +2500,13 @@
       </p:sp>
       <p:sp>
         <p:nvSpPr>
-          <p:cNvPr id="19" name="Text 13"/>
-          <p:cNvSpPr/>
-          <p:nvPr/>
-        </p:nvSpPr>
-        <p:spPr>
-          <a:xfrm>
-            <a:off x="1417320" y="5129784"/>
+          <p:cNvPr id="16" name="Text 10"/>
+          <p:cNvSpPr/>
+          <p:nvPr/>
+        </p:nvSpPr>
+        <p:spPr>
+          <a:xfrm>
+            <a:off x="1417320" y="4105656"/>
             <a:ext cx="5852160" cy="502920"/>
           </a:xfrm>
           <a:prstGeom prst="rect">
@@ -2583,6 +2531,128 @@
                 <a:ea typeface="Calibri" pitchFamily="34" charset="-122"/>
                 <a:cs typeface="Calibri" pitchFamily="34" charset="-120"/>
               </a:rPr>
+              <a:t>if / elif / else, for, while : le barème d’imposition en code.</a:t>
+            </a:r>
+            <a:endParaRPr lang="en-US" sz="1300" dirty="0"/>
+          </a:p>
+        </p:txBody>
+      </p:sp>
+      <p:sp>
+        <p:nvSpPr>
+          <p:cNvPr id="17" name="Shape 11"/>
+          <p:cNvSpPr/>
+          <p:nvPr/>
+        </p:nvSpPr>
+        <p:spPr>
+          <a:xfrm>
+            <a:off x="640080" y="4855464"/>
+            <a:ext cx="566928" cy="566928"/>
+          </a:xfrm>
+          <a:prstGeom prst="ellipse">
+            <a:avLst/>
+          </a:prstGeom>
+          <a:solidFill>
+            <a:srgbClr val="0E7A3D"/>
+          </a:solidFill>
+          <a:ln/>
+        </p:spPr>
+      </p:sp>
+      <p:pic>
+        <p:nvPicPr>
+          <p:cNvPr id="18" name="Image 4" descr="icons/db.png">    </p:cNvPr>
+          <p:cNvPicPr>
+            <a:picLocks noChangeAspect="1"/>
+          </p:cNvPicPr>
+          <p:nvPr/>
+        </p:nvPicPr>
+        <p:blipFill>
+          <a:blip r:embed="rId5"/>
+          <a:stretch>
+            <a:fillRect/>
+          </a:stretch>
+        </p:blipFill>
+        <p:spPr>
+          <a:xfrm>
+            <a:off x="787481" y="5002865"/>
+            <a:ext cx="272125" cy="272125"/>
+          </a:xfrm>
+          <a:prstGeom prst="rect">
+            <a:avLst/>
+          </a:prstGeom>
+        </p:spPr>
+      </p:pic>
+      <p:sp>
+        <p:nvSpPr>
+          <p:cNvPr id="19" name="Text 12"/>
+          <p:cNvSpPr/>
+          <p:nvPr/>
+        </p:nvSpPr>
+        <p:spPr>
+          <a:xfrm>
+            <a:off x="1417320" y="4800600"/>
+            <a:ext cx="5852160" cy="365760"/>
+          </a:xfrm>
+          <a:prstGeom prst="rect">
+            <a:avLst/>
+          </a:prstGeom>
+          <a:noFill/>
+          <a:ln/>
+        </p:spPr>
+        <p:txBody>
+          <a:bodyPr wrap="square" lIns="0" tIns="0" rIns="0" bIns="0" rtlCol="0" anchor="ctr"/>
+          <a:lstStyle/>
+          <a:p>
+            <a:pPr indent="0" marL="0">
+              <a:buNone/>
+            </a:pPr>
+            <a:r>
+              <a:rPr lang="en-US" sz="1650" b="1" dirty="0">
+                <a:solidFill>
+                  <a:srgbClr val="1C2A24"/>
+                </a:solidFill>
+                <a:latin typeface="Calibri" pitchFamily="34" charset="0"/>
+                <a:ea typeface="Calibri" pitchFamily="34" charset="-122"/>
+                <a:cs typeface="Calibri" pitchFamily="34" charset="-120"/>
+              </a:rPr>
+              <a:t>Les données de la formation</a:t>
+            </a:r>
+            <a:endParaRPr lang="en-US" sz="1650" dirty="0"/>
+          </a:p>
+        </p:txBody>
+      </p:sp>
+      <p:sp>
+        <p:nvSpPr>
+          <p:cNvPr id="20" name="Text 13"/>
+          <p:cNvSpPr/>
+          <p:nvPr/>
+        </p:nvSpPr>
+        <p:spPr>
+          <a:xfrm>
+            <a:off x="1417320" y="5129784"/>
+            <a:ext cx="5852160" cy="502920"/>
+          </a:xfrm>
+          <a:prstGeom prst="rect">
+            <a:avLst/>
+          </a:prstGeom>
+          <a:noFill/>
+          <a:ln/>
+        </p:spPr>
+        <p:txBody>
+          <a:bodyPr wrap="square" lIns="0" tIns="0" rIns="0" bIns="0" rtlCol="0" anchor="ctr"/>
+          <a:lstStyle/>
+          <a:p>
+            <a:pPr indent="0" marL="0">
+              <a:buNone/>
+            </a:pPr>
+            <a:r>
+              <a:rPr lang="en-US" sz="1300" dirty="0">
+                <a:solidFill>
+                  <a:srgbClr val="5C6B63"/>
+                </a:solidFill>
+                <a:latin typeface="Calibri" pitchFamily="34" charset="0"/>
+                <a:ea typeface="Calibri" pitchFamily="34" charset="-122"/>
+                <a:cs typeface="Calibri" pitchFamily="34" charset="-120"/>
+              </a:rPr>
               <a:t>Engendrer les jeux fiscaux fictifs qui serviront toute la semaine.</a:t>
             </a:r>
             <a:endParaRPr lang="en-US" sz="1300" dirty="0"/>
@@ -2591,7 +2661,7 @@
       </p:sp>
       <p:sp>
         <p:nvSpPr>
-          <p:cNvPr id="20" name="Shape 14"/>
+          <p:cNvPr id="21" name="Shape 14"/>
           <p:cNvSpPr/>
           <p:nvPr/>
         </p:nvSpPr>
@@ -2606,14 +2676,14 @@
             </a:avLst>
           </a:prstGeom>
           <a:solidFill>
-            <a:srgbClr val="0D3325"/>
+            <a:srgbClr val="0A2E1A"/>
           </a:solidFill>
           <a:ln/>
         </p:spPr>
       </p:sp>
       <p:sp>
         <p:nvSpPr>
-          <p:cNvPr id="21" name="Text 15"/>
+          <p:cNvPr id="22" name="Text 15"/>
           <p:cNvSpPr/>
           <p:nvPr/>
         </p:nvSpPr>
@@ -2638,7 +2708,7 @@
             <a:r>
               <a:rPr lang="en-US" sz="1150" b="1" spc="200" kern="0" dirty="0">
                 <a:solidFill>
-                  <a:srgbClr val="C9A227"/>
+                  <a:srgbClr val="C79100"/>
                 </a:solidFill>
                 <a:latin typeface="Calibri" pitchFamily="34" charset="0"/>
                 <a:ea typeface="Calibri" pitchFamily="34" charset="-122"/>
@@ -2652,7 +2722,7 @@
       </p:sp>
       <p:sp>
         <p:nvSpPr>
-          <p:cNvPr id="22" name="Shape 16"/>
+          <p:cNvPr id="23" name="Shape 16"/>
           <p:cNvSpPr/>
           <p:nvPr/>
         </p:nvSpPr>
@@ -2665,14 +2735,14 @@
             <a:avLst/>
           </a:prstGeom>
           <a:solidFill>
-            <a:srgbClr val="C9A227"/>
+            <a:srgbClr val="C79100"/>
           </a:solidFill>
           <a:ln/>
         </p:spPr>
       </p:sp>
       <p:sp>
         <p:nvSpPr>
-          <p:cNvPr id="23" name="Text 17"/>
+          <p:cNvPr id="24" name="Text 17"/>
           <p:cNvSpPr/>
           <p:nvPr/>
         </p:nvSpPr>
@@ -2697,7 +2767,7 @@
             <a:r>
               <a:rPr lang="en-US" sz="1250" b="1" dirty="0">
                 <a:solidFill>
-                  <a:srgbClr val="0D3325"/>
+                  <a:srgbClr val="0A2E1A"/>
                 </a:solidFill>
                 <a:latin typeface="Calibri" pitchFamily="34" charset="0"/>
                 <a:ea typeface="Calibri" pitchFamily="34" charset="-122"/>
@@ -2711,7 +2781,7 @@
       </p:sp>
       <p:sp>
         <p:nvSpPr>
-          <p:cNvPr id="24" name="Text 18"/>
+          <p:cNvPr id="25" name="Text 18"/>
           <p:cNvSpPr/>
           <p:nvPr/>
         </p:nvSpPr>
@@ -2750,7 +2820,7 @@
       </p:sp>
       <p:sp>
         <p:nvSpPr>
-          <p:cNvPr id="25" name="Shape 19"/>
+          <p:cNvPr id="26" name="Shape 19"/>
           <p:cNvSpPr/>
           <p:nvPr/>
         </p:nvSpPr>
@@ -2763,14 +2833,14 @@
             <a:avLst/>
           </a:prstGeom>
           <a:solidFill>
-            <a:srgbClr val="14563C"/>
+            <a:srgbClr val="0E7A3D"/>
           </a:solidFill>
           <a:ln/>
         </p:spPr>
       </p:sp>
       <p:sp>
         <p:nvSpPr>
-          <p:cNvPr id="26" name="Text 20"/>
+          <p:cNvPr id="27" name="Text 20"/>
           <p:cNvSpPr/>
           <p:nvPr/>
         </p:nvSpPr>
@@ -2809,7 +2879,7 @@
       </p:sp>
       <p:sp>
         <p:nvSpPr>
-          <p:cNvPr id="27" name="Text 21"/>
+          <p:cNvPr id="28" name="Text 21"/>
           <p:cNvSpPr/>
           <p:nvPr/>
         </p:nvSpPr>
@@ -2848,7 +2918,7 @@
       </p:sp>
       <p:sp>
         <p:nvSpPr>
-          <p:cNvPr id="28" name="Shape 22"/>
+          <p:cNvPr id="29" name="Shape 22"/>
           <p:cNvSpPr/>
           <p:nvPr/>
         </p:nvSpPr>
@@ -2861,14 +2931,14 @@
             <a:avLst/>
           </a:prstGeom>
           <a:solidFill>
-            <a:srgbClr val="14563C"/>
+            <a:srgbClr val="0E7A3D"/>
           </a:solidFill>
           <a:ln/>
         </p:spPr>
       </p:sp>
       <p:sp>
         <p:nvSpPr>
-          <p:cNvPr id="29" name="Text 23"/>
+          <p:cNvPr id="30" name="Text 23"/>
           <p:cNvSpPr/>
           <p:nvPr/>
         </p:nvSpPr>
@@ -2907,7 +2977,7 @@
       </p:sp>
       <p:sp>
         <p:nvSpPr>
-          <p:cNvPr id="30" name="Text 24"/>
+          <p:cNvPr id="31" name="Text 24"/>
           <p:cNvSpPr/>
           <p:nvPr/>
         </p:nvSpPr>
@@ -2946,7 +3016,7 @@
       </p:sp>
       <p:sp>
         <p:nvSpPr>
-          <p:cNvPr id="31" name="Shape 25"/>
+          <p:cNvPr id="32" name="Shape 25"/>
           <p:cNvSpPr/>
           <p:nvPr/>
         </p:nvSpPr>
@@ -2959,14 +3029,14 @@
             <a:avLst/>
           </a:prstGeom>
           <a:solidFill>
-            <a:srgbClr val="14563C"/>
+            <a:srgbClr val="0E7A3D"/>
           </a:solidFill>
           <a:ln/>
         </p:spPr>
       </p:sp>
       <p:sp>
         <p:nvSpPr>
-          <p:cNvPr id="32" name="Text 26"/>
+          <p:cNvPr id="33" name="Text 26"/>
           <p:cNvSpPr/>
           <p:nvPr/>
         </p:nvSpPr>
@@ -3005,7 +3075,7 @@
       </p:sp>
       <p:sp>
         <p:nvSpPr>
-          <p:cNvPr id="33" name="Text 27"/>
+          <p:cNvPr id="34" name="Text 27"/>
           <p:cNvSpPr/>
           <p:nvPr/>
         </p:nvSpPr>
@@ -3044,7 +3114,7 @@
       </p:sp>
       <p:sp>
         <p:nvSpPr>
-          <p:cNvPr id="34" name="Shape 28"/>
+          <p:cNvPr id="35" name="Shape 28"/>
           <p:cNvSpPr/>
           <p:nvPr/>
         </p:nvSpPr>
@@ -3057,14 +3127,14 @@
             <a:avLst/>
           </a:prstGeom>
           <a:solidFill>
-            <a:srgbClr val="14563C"/>
+            <a:srgbClr val="0E7A3D"/>
           </a:solidFill>
           <a:ln/>
         </p:spPr>
       </p:sp>
       <p:sp>
         <p:nvSpPr>
-          <p:cNvPr id="35" name="Text 29"/>
+          <p:cNvPr id="36" name="Text 29"/>
           <p:cNvSpPr/>
           <p:nvPr/>
         </p:nvSpPr>
@@ -3103,7 +3173,7 @@
       </p:sp>
       <p:sp>
         <p:nvSpPr>
-          <p:cNvPr id="36" name="Text 30"/>
+          <p:cNvPr id="37" name="Text 30"/>
           <p:cNvSpPr/>
           <p:nvPr/>
         </p:nvSpPr>
@@ -3142,7 +3212,7 @@
       </p:sp>
       <p:sp>
         <p:nvSpPr>
-          <p:cNvPr id="37" name="Text 31"/>
+          <p:cNvPr id="38" name="Text 31"/>
           <p:cNvSpPr/>
           <p:nvPr/>
         </p:nvSpPr>
@@ -3167,7 +3237,7 @@
             <a:r>
               <a:rPr lang="en-US" sz="1050" i="1" dirty="0">
                 <a:solidFill>
-                  <a:srgbClr val="E8D48A"/>
+                  <a:srgbClr val="FCD116"/>
                 </a:solidFill>
                 <a:latin typeface="Calibri" pitchFamily="34" charset="0"/>
                 <a:ea typeface="Calibri" pitchFamily="34" charset="-122"/>
@@ -3220,7 +3290,7 @@
         <p:spPr>
           <a:xfrm>
             <a:off x="548640" y="384048"/>
-            <a:ext cx="10972800" cy="320040"/>
+            <a:ext cx="9601200" cy="320040"/>
           </a:xfrm>
           <a:prstGeom prst="rect">
             <a:avLst/>
@@ -3238,7 +3308,7 @@
             <a:r>
               <a:rPr lang="en-US" sz="1300" b="1" spc="200" kern="0" dirty="0">
                 <a:solidFill>
-                  <a:srgbClr val="C9A227"/>
+                  <a:srgbClr val="C79100"/>
                 </a:solidFill>
                 <a:latin typeface="Calibri" pitchFamily="34" charset="0"/>
                 <a:ea typeface="Calibri" pitchFamily="34" charset="-122"/>
@@ -3259,7 +3329,7 @@
         <p:spPr>
           <a:xfrm>
             <a:off x="548640" y="658368"/>
-            <a:ext cx="11064240" cy="731520"/>
+            <a:ext cx="9966960" cy="731520"/>
           </a:xfrm>
           <a:prstGeom prst="rect">
             <a:avLst/>
@@ -3277,7 +3347,7 @@
             <a:r>
               <a:rPr lang="en-US" sz="3400" b="1" dirty="0">
                 <a:solidFill>
-                  <a:srgbClr val="14563C"/>
+                  <a:srgbClr val="0E7A3D"/>
                 </a:solidFill>
                 <a:latin typeface="Cambria" pitchFamily="34" charset="0"/>
                 <a:ea typeface="Cambria" pitchFamily="34" charset="-122"/>
@@ -3289,51 +3359,9 @@
           </a:p>
         </p:txBody>
       </p:sp>
-      <p:sp>
-        <p:nvSpPr>
-          <p:cNvPr id="4" name="Shape 2"/>
-          <p:cNvSpPr/>
-          <p:nvPr/>
-        </p:nvSpPr>
-        <p:spPr>
-          <a:xfrm>
-            <a:off x="640080" y="1737360"/>
-            <a:ext cx="3520440" cy="2880360"/>
-          </a:xfrm>
-          <a:prstGeom prst="roundRect">
-            <a:avLst>
-              <a:gd name="adj" fmla="val 2857"/>
-            </a:avLst>
-          </a:prstGeom>
-          <a:solidFill>
-            <a:srgbClr val="EEF4F0"/>
-          </a:solidFill>
-          <a:ln/>
-        </p:spPr>
-      </p:sp>
-      <p:sp>
-        <p:nvSpPr>
-          <p:cNvPr id="5" name="Shape 3"/>
-          <p:cNvSpPr/>
-          <p:nvPr/>
-        </p:nvSpPr>
-        <p:spPr>
-          <a:xfrm>
-            <a:off x="896112" y="1993392"/>
-            <a:ext cx="512064" cy="512064"/>
-          </a:xfrm>
-          <a:prstGeom prst="ellipse">
-            <a:avLst/>
-          </a:prstGeom>
-          <a:solidFill>
-            <a:srgbClr val="14563C"/>
-          </a:solidFill>
-          <a:ln/>
-        </p:spPr>
-      </p:sp>
       <p:pic>
         <p:nvPicPr>
-          <p:cNvPr id="6" name="Image 0" descr="icons/git.png">    </p:cNvPr>
+          <p:cNvPr id="4" name="Image 0" descr="logo-dgi.png">    </p:cNvPr>
           <p:cNvPicPr>
             <a:picLocks noChangeAspect="1"/>
           </p:cNvPicPr>
@@ -3347,8 +3375,8 @@
         </p:blipFill>
         <p:spPr>
           <a:xfrm>
-            <a:off x="1029249" y="2126529"/>
-            <a:ext cx="245791" cy="245791"/>
+            <a:off x="10744200" y="384048"/>
+            <a:ext cx="1051560" cy="795528"/>
           </a:xfrm>
           <a:prstGeom prst="rect">
             <a:avLst/>
@@ -3357,114 +3385,13 @@
       </p:pic>
       <p:sp>
         <p:nvSpPr>
-          <p:cNvPr id="7" name="Text 4"/>
-          <p:cNvSpPr/>
-          <p:nvPr/>
-        </p:nvSpPr>
-        <p:spPr>
-          <a:xfrm>
-            <a:off x="896112" y="2651760"/>
-            <a:ext cx="3008376" cy="365760"/>
-          </a:xfrm>
-          <a:prstGeom prst="rect">
-            <a:avLst/>
-          </a:prstGeom>
-          <a:noFill/>
-          <a:ln/>
-        </p:spPr>
-        <p:txBody>
-          <a:bodyPr wrap="square" lIns="0" tIns="0" rIns="0" bIns="0" rtlCol="0" anchor="ctr"/>
-          <a:lstStyle/>
-          <a:p>
-            <a:pPr indent="0" marL="0">
-              <a:buNone/>
-            </a:pPr>
-            <a:r>
-              <a:rPr lang="en-US" sz="1550" b="1" dirty="0">
-                <a:solidFill>
-                  <a:srgbClr val="14563C"/>
-                </a:solidFill>
-                <a:latin typeface="Calibri" pitchFamily="34" charset="0"/>
-                <a:ea typeface="Calibri" pitchFamily="34" charset="-122"/>
-                <a:cs typeface="Calibri" pitchFamily="34" charset="-120"/>
-              </a:rPr>
-              <a:t>Le dépôt</a:t>
-            </a:r>
-            <a:endParaRPr lang="en-US" sz="1550" dirty="0"/>
-          </a:p>
-        </p:txBody>
-      </p:sp>
-      <p:sp>
-        <p:nvSpPr>
-          <p:cNvPr id="8" name="Text 5"/>
-          <p:cNvSpPr/>
-          <p:nvPr/>
-        </p:nvSpPr>
-        <p:spPr>
-          <a:xfrm>
-            <a:off x="896112" y="3017520"/>
-            <a:ext cx="3008376" cy="1417320"/>
-          </a:xfrm>
-          <a:prstGeom prst="rect">
-            <a:avLst/>
-          </a:prstGeom>
-          <a:noFill/>
-          <a:ln/>
-        </p:spPr>
-        <p:txBody>
-          <a:bodyPr wrap="square" lIns="0" tIns="0" rIns="0" bIns="0" rtlCol="0" anchor="t"/>
-          <a:lstStyle/>
-          <a:p>
-            <a:pPr indent="0" marL="0">
-              <a:lnSpc>
-                <a:spcPct val="110000"/>
-              </a:lnSpc>
-              <a:buNone/>
-            </a:pPr>
-            <a:r>
-              <a:rPr lang="en-US" sz="1250" dirty="0">
-                <a:solidFill>
-                  <a:srgbClr val="5C6B63"/>
-                </a:solidFill>
-                <a:latin typeface="Calibri" pitchFamily="34" charset="0"/>
-                <a:ea typeface="Calibri" pitchFamily="34" charset="-122"/>
-                <a:cs typeface="Calibri" pitchFamily="34" charset="-120"/>
-              </a:rPr>
-              <a:t>Modules numérotés, TP à compléter, projet final — tout est versionné.</a:t>
-            </a:r>
-            <a:endParaRPr lang="en-US" sz="1250" dirty="0"/>
-          </a:p>
-          <a:p>
-            <a:pPr indent="0" marL="0">
-              <a:lnSpc>
-                <a:spcPct val="110000"/>
-              </a:lnSpc>
-              <a:buNone/>
-            </a:pPr>
-            <a:r>
-              <a:rPr lang="en-US" sz="1250" dirty="0">
-                <a:solidFill>
-                  <a:srgbClr val="5C6B63"/>
-                </a:solidFill>
-                <a:latin typeface="Calibri" pitchFamily="34" charset="0"/>
-                <a:ea typeface="Calibri" pitchFamily="34" charset="-122"/>
-                <a:cs typeface="Calibri" pitchFamily="34" charset="-120"/>
-              </a:rPr>
-              <a:t>Chaque matin : git pull.</a:t>
-            </a:r>
-            <a:endParaRPr lang="en-US" sz="1250" dirty="0"/>
-          </a:p>
-        </p:txBody>
-      </p:sp>
-      <p:sp>
-        <p:nvSpPr>
-          <p:cNvPr id="9" name="Shape 6"/>
-          <p:cNvSpPr/>
-          <p:nvPr/>
-        </p:nvSpPr>
-        <p:spPr>
-          <a:xfrm>
-            <a:off x="4343400" y="1737360"/>
+          <p:cNvPr id="5" name="Shape 2"/>
+          <p:cNvSpPr/>
+          <p:nvPr/>
+        </p:nvSpPr>
+        <p:spPr>
+          <a:xfrm>
+            <a:off x="640080" y="1737360"/>
             <a:ext cx="3520440" cy="2880360"/>
           </a:xfrm>
           <a:prstGeom prst="roundRect">
@@ -3473,34 +3400,34 @@
             </a:avLst>
           </a:prstGeom>
           <a:solidFill>
-            <a:srgbClr val="EEF4F0"/>
+            <a:srgbClr val="EEF5EF"/>
           </a:solidFill>
           <a:ln/>
         </p:spPr>
       </p:sp>
       <p:sp>
         <p:nvSpPr>
-          <p:cNvPr id="10" name="Shape 7"/>
-          <p:cNvSpPr/>
-          <p:nvPr/>
-        </p:nvSpPr>
-        <p:spPr>
-          <a:xfrm>
-            <a:off x="4599432" y="1993392"/>
+          <p:cNvPr id="6" name="Shape 3"/>
+          <p:cNvSpPr/>
+          <p:nvPr/>
+        </p:nvSpPr>
+        <p:spPr>
+          <a:xfrm>
+            <a:off x="896112" y="1993392"/>
             <a:ext cx="512064" cy="512064"/>
           </a:xfrm>
           <a:prstGeom prst="ellipse">
             <a:avLst/>
           </a:prstGeom>
           <a:solidFill>
-            <a:srgbClr val="1E7A50"/>
+            <a:srgbClr val="0E7A3D"/>
           </a:solidFill>
           <a:ln/>
         </p:spPr>
       </p:sp>
       <p:pic>
         <p:nvPicPr>
-          <p:cNvPr id="11" name="Image 1" descr="icons/box.png">    </p:cNvPr>
+          <p:cNvPr id="7" name="Image 1" descr="icons/git.png">    </p:cNvPr>
           <p:cNvPicPr>
             <a:picLocks noChangeAspect="1"/>
           </p:cNvPicPr>
@@ -3514,7 +3441,7 @@
         </p:blipFill>
         <p:spPr>
           <a:xfrm>
-            <a:off x="4732569" y="2126529"/>
+            <a:off x="1029249" y="2126529"/>
             <a:ext cx="245791" cy="245791"/>
           </a:xfrm>
           <a:prstGeom prst="rect">
@@ -3524,13 +3451,13 @@
       </p:pic>
       <p:sp>
         <p:nvSpPr>
-          <p:cNvPr id="12" name="Text 8"/>
-          <p:cNvSpPr/>
-          <p:nvPr/>
-        </p:nvSpPr>
-        <p:spPr>
-          <a:xfrm>
-            <a:off x="4599432" y="2651760"/>
+          <p:cNvPr id="8" name="Text 4"/>
+          <p:cNvSpPr/>
+          <p:nvPr/>
+        </p:nvSpPr>
+        <p:spPr>
+          <a:xfrm>
+            <a:off x="896112" y="2651760"/>
             <a:ext cx="3008376" cy="365760"/>
           </a:xfrm>
           <a:prstGeom prst="rect">
@@ -3549,13 +3476,13 @@
             <a:r>
               <a:rPr lang="en-US" sz="1550" b="1" dirty="0">
                 <a:solidFill>
-                  <a:srgbClr val="14563C"/>
+                  <a:srgbClr val="0E7A3D"/>
                 </a:solidFill>
                 <a:latin typeface="Calibri" pitchFamily="34" charset="0"/>
                 <a:ea typeface="Calibri" pitchFamily="34" charset="-122"/>
                 <a:cs typeface="Calibri" pitchFamily="34" charset="-120"/>
               </a:rPr>
-              <a:t>L’environnement</a:t>
+              <a:t>Le dépôt</a:t>
             </a:r>
             <a:endParaRPr lang="en-US" sz="1550" dirty="0"/>
           </a:p>
@@ -3563,13 +3490,13 @@
       </p:sp>
       <p:sp>
         <p:nvSpPr>
-          <p:cNvPr id="13" name="Text 9"/>
-          <p:cNvSpPr/>
-          <p:nvPr/>
-        </p:nvSpPr>
-        <p:spPr>
-          <a:xfrm>
-            <a:off x="4599432" y="3017520"/>
+          <p:cNvPr id="9" name="Text 5"/>
+          <p:cNvSpPr/>
+          <p:nvPr/>
+        </p:nvSpPr>
+        <p:spPr>
+          <a:xfrm>
+            <a:off x="896112" y="3017520"/>
             <a:ext cx="3008376" cy="1417320"/>
           </a:xfrm>
           <a:prstGeom prst="rect">
@@ -3597,21 +3524,41 @@
                 <a:ea typeface="Calibri" pitchFamily="34" charset="-122"/>
                 <a:cs typeface="Calibri" pitchFamily="34" charset="-120"/>
               </a:rPr>
-              <a:t>uv sync lit pyproject.toml et installe Python 3.12 + les bibliothèques, aux versions exactes.</a:t>
+              <a:t>Modules numérotés, TP à compléter, projet final — tout est versionné.</a:t>
             </a:r>
             <a:endParaRPr lang="en-US" sz="1250" dirty="0"/>
           </a:p>
-        </p:txBody>
-      </p:sp>
-      <p:sp>
-        <p:nvSpPr>
-          <p:cNvPr id="14" name="Shape 10"/>
-          <p:cNvSpPr/>
-          <p:nvPr/>
-        </p:nvSpPr>
-        <p:spPr>
-          <a:xfrm>
-            <a:off x="8046720" y="1737360"/>
+          <a:p>
+            <a:pPr indent="0" marL="0">
+              <a:lnSpc>
+                <a:spcPct val="110000"/>
+              </a:lnSpc>
+              <a:buNone/>
+            </a:pPr>
+            <a:r>
+              <a:rPr lang="en-US" sz="1250" dirty="0">
+                <a:solidFill>
+                  <a:srgbClr val="5C6B63"/>
+                </a:solidFill>
+                <a:latin typeface="Calibri" pitchFamily="34" charset="0"/>
+                <a:ea typeface="Calibri" pitchFamily="34" charset="-122"/>
+                <a:cs typeface="Calibri" pitchFamily="34" charset="-120"/>
+              </a:rPr>
+              <a:t>Chaque matin : git pull.</a:t>
+            </a:r>
+            <a:endParaRPr lang="en-US" sz="1250" dirty="0"/>
+          </a:p>
+        </p:txBody>
+      </p:sp>
+      <p:sp>
+        <p:nvSpPr>
+          <p:cNvPr id="10" name="Shape 6"/>
+          <p:cNvSpPr/>
+          <p:nvPr/>
+        </p:nvSpPr>
+        <p:spPr>
+          <a:xfrm>
+            <a:off x="4343400" y="1737360"/>
             <a:ext cx="3520440" cy="2880360"/>
           </a:xfrm>
           <a:prstGeom prst="roundRect">
@@ -3620,34 +3567,34 @@
             </a:avLst>
           </a:prstGeom>
           <a:solidFill>
-            <a:srgbClr val="EEF4F0"/>
+            <a:srgbClr val="EEF5EF"/>
           </a:solidFill>
           <a:ln/>
         </p:spPr>
       </p:sp>
       <p:sp>
         <p:nvSpPr>
-          <p:cNvPr id="15" name="Shape 11"/>
-          <p:cNvSpPr/>
-          <p:nvPr/>
-        </p:nvSpPr>
-        <p:spPr>
-          <a:xfrm>
-            <a:off x="8302752" y="1993392"/>
+          <p:cNvPr id="11" name="Shape 7"/>
+          <p:cNvSpPr/>
+          <p:nvPr/>
+        </p:nvSpPr>
+        <p:spPr>
+          <a:xfrm>
+            <a:off x="4599432" y="1993392"/>
             <a:ext cx="512064" cy="512064"/>
           </a:xfrm>
           <a:prstGeom prst="ellipse">
             <a:avLst/>
           </a:prstGeom>
           <a:solidFill>
-            <a:srgbClr val="C9A227"/>
+            <a:srgbClr val="2E9E4F"/>
           </a:solidFill>
           <a:ln/>
         </p:spPr>
       </p:sp>
       <p:pic>
         <p:nvPicPr>
-          <p:cNvPr id="16" name="Image 2" descr="icons/db.png">    </p:cNvPr>
+          <p:cNvPr id="12" name="Image 2" descr="icons/box.png">    </p:cNvPr>
           <p:cNvPicPr>
             <a:picLocks noChangeAspect="1"/>
           </p:cNvPicPr>
@@ -3661,7 +3608,7 @@
         </p:blipFill>
         <p:spPr>
           <a:xfrm>
-            <a:off x="8435889" y="2126529"/>
+            <a:off x="4732569" y="2126529"/>
             <a:ext cx="245791" cy="245791"/>
           </a:xfrm>
           <a:prstGeom prst="rect">
@@ -3671,13 +3618,13 @@
       </p:pic>
       <p:sp>
         <p:nvSpPr>
-          <p:cNvPr id="17" name="Text 12"/>
-          <p:cNvSpPr/>
-          <p:nvPr/>
-        </p:nvSpPr>
-        <p:spPr>
-          <a:xfrm>
-            <a:off x="8302752" y="2651760"/>
+          <p:cNvPr id="13" name="Text 8"/>
+          <p:cNvSpPr/>
+          <p:nvPr/>
+        </p:nvSpPr>
+        <p:spPr>
+          <a:xfrm>
+            <a:off x="4599432" y="2651760"/>
             <a:ext cx="3008376" cy="365760"/>
           </a:xfrm>
           <a:prstGeom prst="rect">
@@ -3696,13 +3643,13 @@
             <a:r>
               <a:rPr lang="en-US" sz="1550" b="1" dirty="0">
                 <a:solidFill>
-                  <a:srgbClr val="14563C"/>
+                  <a:srgbClr val="0E7A3D"/>
                 </a:solidFill>
                 <a:latin typeface="Calibri" pitchFamily="34" charset="0"/>
                 <a:ea typeface="Calibri" pitchFamily="34" charset="-122"/>
                 <a:cs typeface="Calibri" pitchFamily="34" charset="-120"/>
               </a:rPr>
-              <a:t>Les données</a:t>
+              <a:t>L’environnement</a:t>
             </a:r>
             <a:endParaRPr lang="en-US" sz="1550" dirty="0"/>
           </a:p>
@@ -3710,13 +3657,13 @@
       </p:sp>
       <p:sp>
         <p:nvSpPr>
-          <p:cNvPr id="18" name="Text 13"/>
-          <p:cNvSpPr/>
-          <p:nvPr/>
-        </p:nvSpPr>
-        <p:spPr>
-          <a:xfrm>
-            <a:off x="8302752" y="3017520"/>
+          <p:cNvPr id="14" name="Text 9"/>
+          <p:cNvSpPr/>
+          <p:nvPr/>
+        </p:nvSpPr>
+        <p:spPr>
+          <a:xfrm>
+            <a:off x="4599432" y="3017520"/>
             <a:ext cx="3008376" cy="1417320"/>
           </a:xfrm>
           <a:prstGeom prst="rect">
@@ -3744,6 +3691,153 @@
                 <a:ea typeface="Calibri" pitchFamily="34" charset="-122"/>
                 <a:cs typeface="Calibri" pitchFamily="34" charset="-120"/>
               </a:rPr>
+              <a:t>uv sync lit pyproject.toml et installe Python 3.12 + les bibliothèques, aux versions exactes.</a:t>
+            </a:r>
+            <a:endParaRPr lang="en-US" sz="1250" dirty="0"/>
+          </a:p>
+        </p:txBody>
+      </p:sp>
+      <p:sp>
+        <p:nvSpPr>
+          <p:cNvPr id="15" name="Shape 10"/>
+          <p:cNvSpPr/>
+          <p:nvPr/>
+        </p:nvSpPr>
+        <p:spPr>
+          <a:xfrm>
+            <a:off x="8046720" y="1737360"/>
+            <a:ext cx="3520440" cy="2880360"/>
+          </a:xfrm>
+          <a:prstGeom prst="roundRect">
+            <a:avLst>
+              <a:gd name="adj" fmla="val 2857"/>
+            </a:avLst>
+          </a:prstGeom>
+          <a:solidFill>
+            <a:srgbClr val="EEF5EF"/>
+          </a:solidFill>
+          <a:ln/>
+        </p:spPr>
+      </p:sp>
+      <p:sp>
+        <p:nvSpPr>
+          <p:cNvPr id="16" name="Shape 11"/>
+          <p:cNvSpPr/>
+          <p:nvPr/>
+        </p:nvSpPr>
+        <p:spPr>
+          <a:xfrm>
+            <a:off x="8302752" y="1993392"/>
+            <a:ext cx="512064" cy="512064"/>
+          </a:xfrm>
+          <a:prstGeom prst="ellipse">
+            <a:avLst/>
+          </a:prstGeom>
+          <a:solidFill>
+            <a:srgbClr val="C79100"/>
+          </a:solidFill>
+          <a:ln/>
+        </p:spPr>
+      </p:sp>
+      <p:pic>
+        <p:nvPicPr>
+          <p:cNvPr id="17" name="Image 3" descr="icons/db.png">    </p:cNvPr>
+          <p:cNvPicPr>
+            <a:picLocks noChangeAspect="1"/>
+          </p:cNvPicPr>
+          <p:nvPr/>
+        </p:nvPicPr>
+        <p:blipFill>
+          <a:blip r:embed="rId4"/>
+          <a:stretch>
+            <a:fillRect/>
+          </a:stretch>
+        </p:blipFill>
+        <p:spPr>
+          <a:xfrm>
+            <a:off x="8435889" y="2126529"/>
+            <a:ext cx="245791" cy="245791"/>
+          </a:xfrm>
+          <a:prstGeom prst="rect">
+            <a:avLst/>
+          </a:prstGeom>
+        </p:spPr>
+      </p:pic>
+      <p:sp>
+        <p:nvSpPr>
+          <p:cNvPr id="18" name="Text 12"/>
+          <p:cNvSpPr/>
+          <p:nvPr/>
+        </p:nvSpPr>
+        <p:spPr>
+          <a:xfrm>
+            <a:off x="8302752" y="2651760"/>
+            <a:ext cx="3008376" cy="365760"/>
+          </a:xfrm>
+          <a:prstGeom prst="rect">
+            <a:avLst/>
+          </a:prstGeom>
+          <a:noFill/>
+          <a:ln/>
+        </p:spPr>
+        <p:txBody>
+          <a:bodyPr wrap="square" lIns="0" tIns="0" rIns="0" bIns="0" rtlCol="0" anchor="ctr"/>
+          <a:lstStyle/>
+          <a:p>
+            <a:pPr indent="0" marL="0">
+              <a:buNone/>
+            </a:pPr>
+            <a:r>
+              <a:rPr lang="en-US" sz="1550" b="1" dirty="0">
+                <a:solidFill>
+                  <a:srgbClr val="0E7A3D"/>
+                </a:solidFill>
+                <a:latin typeface="Calibri" pitchFamily="34" charset="0"/>
+                <a:ea typeface="Calibri" pitchFamily="34" charset="-122"/>
+                <a:cs typeface="Calibri" pitchFamily="34" charset="-120"/>
+              </a:rPr>
+              <a:t>Les données</a:t>
+            </a:r>
+            <a:endParaRPr lang="en-US" sz="1550" dirty="0"/>
+          </a:p>
+        </p:txBody>
+      </p:sp>
+      <p:sp>
+        <p:nvSpPr>
+          <p:cNvPr id="19" name="Text 13"/>
+          <p:cNvSpPr/>
+          <p:nvPr/>
+        </p:nvSpPr>
+        <p:spPr>
+          <a:xfrm>
+            <a:off x="8302752" y="3017520"/>
+            <a:ext cx="3008376" cy="1417320"/>
+          </a:xfrm>
+          <a:prstGeom prst="rect">
+            <a:avLst/>
+          </a:prstGeom>
+          <a:noFill/>
+          <a:ln/>
+        </p:spPr>
+        <p:txBody>
+          <a:bodyPr wrap="square" lIns="0" tIns="0" rIns="0" bIns="0" rtlCol="0" anchor="t"/>
+          <a:lstStyle/>
+          <a:p>
+            <a:pPr indent="0" marL="0">
+              <a:lnSpc>
+                <a:spcPct val="110000"/>
+              </a:lnSpc>
+              <a:buNone/>
+            </a:pPr>
+            <a:r>
+              <a:rPr lang="en-US" sz="1250" dirty="0">
+                <a:solidFill>
+                  <a:srgbClr val="5C6B63"/>
+                </a:solidFill>
+                <a:latin typeface="Calibri" pitchFamily="34" charset="0"/>
+                <a:ea typeface="Calibri" pitchFamily="34" charset="-122"/>
+                <a:cs typeface="Calibri" pitchFamily="34" charset="-120"/>
+              </a:rPr>
               <a:t>Engendrées localement, jamais versionnées : contribuables (NIF), déclarations TVA, paiements.</a:t>
             </a:r>
             <a:endParaRPr lang="en-US" sz="1250" dirty="0"/>
@@ -3752,7 +3846,7 @@
       </p:sp>
       <p:sp>
         <p:nvSpPr>
-          <p:cNvPr id="19" name="Shape 14"/>
+          <p:cNvPr id="20" name="Shape 14"/>
           <p:cNvSpPr/>
           <p:nvPr/>
         </p:nvSpPr>
@@ -3767,14 +3861,14 @@
             </a:avLst>
           </a:prstGeom>
           <a:solidFill>
-            <a:srgbClr val="10241B"/>
+            <a:srgbClr val="0F2418"/>
           </a:solidFill>
           <a:ln/>
         </p:spPr>
       </p:sp>
       <p:sp>
         <p:nvSpPr>
-          <p:cNvPr id="20" name="Shape 15"/>
+          <p:cNvPr id="21" name="Shape 15"/>
           <p:cNvSpPr/>
           <p:nvPr/>
         </p:nvSpPr>
@@ -3794,7 +3888,7 @@
       </p:sp>
       <p:sp>
         <p:nvSpPr>
-          <p:cNvPr id="21" name="Shape 16"/>
+          <p:cNvPr id="22" name="Shape 16"/>
           <p:cNvSpPr/>
           <p:nvPr/>
         </p:nvSpPr>
@@ -3807,14 +3901,14 @@
             <a:avLst/>
           </a:prstGeom>
           <a:solidFill>
-            <a:srgbClr val="C9A227"/>
+            <a:srgbClr val="C79100"/>
           </a:solidFill>
           <a:ln/>
         </p:spPr>
       </p:sp>
       <p:sp>
         <p:nvSpPr>
-          <p:cNvPr id="22" name="Shape 17"/>
+          <p:cNvPr id="23" name="Shape 17"/>
           <p:cNvSpPr/>
           <p:nvPr/>
         </p:nvSpPr>
@@ -3834,7 +3928,7 @@
       </p:sp>
       <p:sp>
         <p:nvSpPr>
-          <p:cNvPr id="23" name="Text 18"/>
+          <p:cNvPr id="24" name="Text 18"/>
           <p:cNvSpPr/>
           <p:nvPr/>
         </p:nvSpPr>
@@ -3873,7 +3967,7 @@
       </p:sp>
       <p:sp>
         <p:nvSpPr>
-          <p:cNvPr id="24" name="Text 19"/>
+          <p:cNvPr id="25" name="Text 19"/>
           <p:cNvSpPr/>
           <p:nvPr/>
         </p:nvSpPr>
@@ -4062,7 +4156,7 @@
         <p:spPr>
           <a:xfrm>
             <a:off x="548640" y="384048"/>
-            <a:ext cx="10972800" cy="320040"/>
+            <a:ext cx="9601200" cy="320040"/>
           </a:xfrm>
           <a:prstGeom prst="rect">
             <a:avLst/>
@@ -4080,7 +4174,7 @@
             <a:r>
               <a:rPr lang="en-US" sz="1300" b="1" spc="200" kern="0" dirty="0">
                 <a:solidFill>
-                  <a:srgbClr val="C9A227"/>
+                  <a:srgbClr val="C79100"/>
                 </a:solidFill>
                 <a:latin typeface="Calibri" pitchFamily="34" charset="0"/>
                 <a:ea typeface="Calibri" pitchFamily="34" charset="-122"/>
@@ -4101,7 +4195,7 @@
         <p:spPr>
           <a:xfrm>
             <a:off x="548640" y="658368"/>
-            <a:ext cx="11064240" cy="731520"/>
+            <a:ext cx="9966960" cy="731520"/>
           </a:xfrm>
           <a:prstGeom prst="rect">
             <a:avLst/>
@@ -4119,7 +4213,7 @@
             <a:r>
               <a:rPr lang="en-US" sz="3400" b="1" dirty="0">
                 <a:solidFill>
-                  <a:srgbClr val="14563C"/>
+                  <a:srgbClr val="0E7A3D"/>
                 </a:solidFill>
                 <a:latin typeface="Cambria" pitchFamily="34" charset="0"/>
                 <a:ea typeface="Cambria" pitchFamily="34" charset="-122"/>
@@ -4131,29 +4225,9 @@
           </a:p>
         </p:txBody>
       </p:sp>
-      <p:sp>
-        <p:nvSpPr>
-          <p:cNvPr id="4" name="Shape 2"/>
-          <p:cNvSpPr/>
-          <p:nvPr/>
-        </p:nvSpPr>
-        <p:spPr>
-          <a:xfrm>
-            <a:off x="640080" y="1874520"/>
-            <a:ext cx="411480" cy="411480"/>
-          </a:xfrm>
-          <a:prstGeom prst="ellipse">
-            <a:avLst/>
-          </a:prstGeom>
-          <a:solidFill>
-            <a:srgbClr val="1E7A50"/>
-          </a:solidFill>
-          <a:ln/>
-        </p:spPr>
-      </p:sp>
       <p:pic>
         <p:nvPicPr>
-          <p:cNvPr id="5" name="Image 0" descr="icons/check.png">    </p:cNvPr>
+          <p:cNvPr id="4" name="Image 0" descr="logo-dgi.png">    </p:cNvPr>
           <p:cNvPicPr>
             <a:picLocks noChangeAspect="1"/>
           </p:cNvPicPr>
@@ -4167,8 +4241,8 @@
         </p:blipFill>
         <p:spPr>
           <a:xfrm>
-            <a:off x="747065" y="1981505"/>
-            <a:ext cx="197510" cy="197510"/>
+            <a:off x="10744200" y="384048"/>
+            <a:ext cx="1051560" cy="795528"/>
           </a:xfrm>
           <a:prstGeom prst="rect">
             <a:avLst/>
@@ -4177,89 +4251,27 @@
       </p:pic>
       <p:sp>
         <p:nvSpPr>
-          <p:cNvPr id="6" name="Text 3"/>
-          <p:cNvSpPr/>
-          <p:nvPr/>
-        </p:nvSpPr>
-        <p:spPr>
-          <a:xfrm>
-            <a:off x="1234440" y="1801368"/>
-            <a:ext cx="4800600" cy="960120"/>
-          </a:xfrm>
-          <a:prstGeom prst="rect">
-            <a:avLst/>
-          </a:prstGeom>
-          <a:noFill/>
-          <a:ln/>
-        </p:spPr>
-        <p:txBody>
-          <a:bodyPr wrap="square" lIns="0" tIns="0" rIns="0" bIns="0" rtlCol="0" anchor="ctr"/>
-          <a:lstStyle/>
-          <a:p>
-            <a:pPr indent="0" marL="0">
-              <a:lnSpc>
-                <a:spcPct val="105000"/>
-              </a:lnSpc>
-              <a:buNone/>
-            </a:pPr>
-            <a:r>
-              <a:rPr lang="en-US" sz="1450" b="1" dirty="0">
-                <a:solidFill>
-                  <a:srgbClr val="1C2A24"/>
-                </a:solidFill>
-                <a:latin typeface="Calibri" pitchFamily="34" charset="0"/>
-                <a:ea typeface="Calibri" pitchFamily="34" charset="-122"/>
-                <a:cs typeface="Calibri" pitchFamily="34" charset="-120"/>
-              </a:rPr>
-              <a:t>Pas de déclaration de type</a:t>
-            </a:r>
-            <a:endParaRPr lang="en-US" sz="1450" dirty="0"/>
-          </a:p>
-          <a:p>
-            <a:pPr indent="0" marL="0">
-              <a:lnSpc>
-                <a:spcPct val="105000"/>
-              </a:lnSpc>
-              <a:buNone/>
-            </a:pPr>
-            <a:r>
-              <a:rPr lang="en-US" sz="1250" dirty="0">
-                <a:solidFill>
-                  <a:srgbClr val="5C6B63"/>
-                </a:solidFill>
-                <a:latin typeface="Calibri" pitchFamily="34" charset="0"/>
-                <a:ea typeface="Calibri" pitchFamily="34" charset="-122"/>
-                <a:cs typeface="Calibri" pitchFamily="34" charset="-120"/>
-              </a:rPr>
-              <a:t>nif = "100004512" suffit — le type vient de la valeur.</a:t>
-            </a:r>
-            <a:endParaRPr lang="en-US" sz="1450" dirty="0"/>
-          </a:p>
-        </p:txBody>
-      </p:sp>
-      <p:sp>
-        <p:nvSpPr>
-          <p:cNvPr id="7" name="Shape 4"/>
-          <p:cNvSpPr/>
-          <p:nvPr/>
-        </p:nvSpPr>
-        <p:spPr>
-          <a:xfrm>
-            <a:off x="640080" y="2926080"/>
+          <p:cNvPr id="5" name="Shape 2"/>
+          <p:cNvSpPr/>
+          <p:nvPr/>
+        </p:nvSpPr>
+        <p:spPr>
+          <a:xfrm>
+            <a:off x="640080" y="1874520"/>
             <a:ext cx="411480" cy="411480"/>
           </a:xfrm>
           <a:prstGeom prst="ellipse">
             <a:avLst/>
           </a:prstGeom>
           <a:solidFill>
-            <a:srgbClr val="1E7A50"/>
+            <a:srgbClr val="2E9E4F"/>
           </a:solidFill>
           <a:ln/>
         </p:spPr>
       </p:sp>
       <p:pic>
         <p:nvPicPr>
-          <p:cNvPr id="8" name="Image 1" descr="icons/check.png">    </p:cNvPr>
+          <p:cNvPr id="6" name="Image 1" descr="icons/check.png">    </p:cNvPr>
           <p:cNvPicPr>
             <a:picLocks noChangeAspect="1"/>
           </p:cNvPicPr>
@@ -4273,7 +4285,7 @@
         </p:blipFill>
         <p:spPr>
           <a:xfrm>
-            <a:off x="747065" y="3033065"/>
+            <a:off x="747065" y="1981505"/>
             <a:ext cx="197510" cy="197510"/>
           </a:xfrm>
           <a:prstGeom prst="rect">
@@ -4283,13 +4295,13 @@
       </p:pic>
       <p:sp>
         <p:nvSpPr>
-          <p:cNvPr id="9" name="Text 5"/>
-          <p:cNvSpPr/>
-          <p:nvPr/>
-        </p:nvSpPr>
-        <p:spPr>
-          <a:xfrm>
-            <a:off x="1234440" y="2852928"/>
+          <p:cNvPr id="7" name="Text 3"/>
+          <p:cNvSpPr/>
+          <p:nvPr/>
+        </p:nvSpPr>
+        <p:spPr>
+          <a:xfrm>
+            <a:off x="1234440" y="1801368"/>
             <a:ext cx="4800600" cy="960120"/>
           </a:xfrm>
           <a:prstGeom prst="rect">
@@ -4317,7 +4329,7 @@
                 <a:ea typeface="Calibri" pitchFamily="34" charset="-122"/>
                 <a:cs typeface="Calibri" pitchFamily="34" charset="-120"/>
               </a:rPr>
-              <a:t>type(x) pour vérifier</a:t>
+              <a:t>Pas de déclaration de type</a:t>
             </a:r>
             <a:endParaRPr lang="en-US" sz="1450" dirty="0"/>
           </a:p>
@@ -4337,7 +4349,7 @@
                 <a:ea typeface="Calibri" pitchFamily="34" charset="-122"/>
                 <a:cs typeface="Calibri" pitchFamily="34" charset="-120"/>
               </a:rPr>
-              <a:t>str, int, float, bool : quatre types couvrent 90 % des cas.</a:t>
+              <a:t>nif = "100004512" suffit — le type vient de la valeur.</a:t>
             </a:r>
             <a:endParaRPr lang="en-US" sz="1450" dirty="0"/>
           </a:p>
@@ -4345,27 +4357,27 @@
       </p:sp>
       <p:sp>
         <p:nvSpPr>
-          <p:cNvPr id="10" name="Shape 6"/>
-          <p:cNvSpPr/>
-          <p:nvPr/>
-        </p:nvSpPr>
-        <p:spPr>
-          <a:xfrm>
-            <a:off x="640080" y="3977640"/>
+          <p:cNvPr id="8" name="Shape 4"/>
+          <p:cNvSpPr/>
+          <p:nvPr/>
+        </p:nvSpPr>
+        <p:spPr>
+          <a:xfrm>
+            <a:off x="640080" y="2926080"/>
             <a:ext cx="411480" cy="411480"/>
           </a:xfrm>
           <a:prstGeom prst="ellipse">
             <a:avLst/>
           </a:prstGeom>
           <a:solidFill>
-            <a:srgbClr val="1E7A50"/>
+            <a:srgbClr val="2E9E4F"/>
           </a:solidFill>
           <a:ln/>
         </p:spPr>
       </p:sp>
       <p:pic>
         <p:nvPicPr>
-          <p:cNvPr id="11" name="Image 2" descr="icons/check.png">    </p:cNvPr>
+          <p:cNvPr id="9" name="Image 2" descr="icons/check.png">    </p:cNvPr>
           <p:cNvPicPr>
             <a:picLocks noChangeAspect="1"/>
           </p:cNvPicPr>
@@ -4379,7 +4391,7 @@
         </p:blipFill>
         <p:spPr>
           <a:xfrm>
-            <a:off x="747065" y="4084625"/>
+            <a:off x="747065" y="3033065"/>
             <a:ext cx="197510" cy="197510"/>
           </a:xfrm>
           <a:prstGeom prst="rect">
@@ -4389,13 +4401,13 @@
       </p:pic>
       <p:sp>
         <p:nvSpPr>
-          <p:cNvPr id="12" name="Text 7"/>
-          <p:cNvSpPr/>
-          <p:nvPr/>
-        </p:nvSpPr>
-        <p:spPr>
-          <a:xfrm>
-            <a:off x="1234440" y="3904488"/>
+          <p:cNvPr id="10" name="Text 5"/>
+          <p:cNvSpPr/>
+          <p:nvPr/>
+        </p:nvSpPr>
+        <p:spPr>
+          <a:xfrm>
+            <a:off x="1234440" y="2852928"/>
             <a:ext cx="4800600" cy="960120"/>
           </a:xfrm>
           <a:prstGeom prst="rect">
@@ -4423,7 +4435,7 @@
                 <a:ea typeface="Calibri" pitchFamily="34" charset="-122"/>
                 <a:cs typeface="Calibri" pitchFamily="34" charset="-120"/>
               </a:rPr>
-              <a:t>Des nombres lisibles</a:t>
+              <a:t>type(x) pour vérifier</a:t>
             </a:r>
             <a:endParaRPr lang="en-US" sz="1450" dirty="0"/>
           </a:p>
@@ -4443,7 +4455,7 @@
                 <a:ea typeface="Calibri" pitchFamily="34" charset="-122"/>
                 <a:cs typeface="Calibri" pitchFamily="34" charset="-120"/>
               </a:rPr>
-              <a:t>45_000_000 — le tiret bas sépare les milliers.</a:t>
+              <a:t>str, int, float, bool : quatre types couvrent 90 % des cas.</a:t>
             </a:r>
             <a:endParaRPr lang="en-US" sz="1450" dirty="0"/>
           </a:p>
@@ -4451,27 +4463,27 @@
       </p:sp>
       <p:sp>
         <p:nvSpPr>
-          <p:cNvPr id="13" name="Shape 8"/>
-          <p:cNvSpPr/>
-          <p:nvPr/>
-        </p:nvSpPr>
-        <p:spPr>
-          <a:xfrm>
-            <a:off x="640080" y="5029200"/>
+          <p:cNvPr id="11" name="Shape 6"/>
+          <p:cNvSpPr/>
+          <p:nvPr/>
+        </p:nvSpPr>
+        <p:spPr>
+          <a:xfrm>
+            <a:off x="640080" y="3977640"/>
             <a:ext cx="411480" cy="411480"/>
           </a:xfrm>
           <a:prstGeom prst="ellipse">
             <a:avLst/>
           </a:prstGeom>
           <a:solidFill>
-            <a:srgbClr val="1E7A50"/>
+            <a:srgbClr val="2E9E4F"/>
           </a:solidFill>
           <a:ln/>
         </p:spPr>
       </p:sp>
       <p:pic>
         <p:nvPicPr>
-          <p:cNvPr id="14" name="Image 3" descr="icons/check.png">    </p:cNvPr>
+          <p:cNvPr id="12" name="Image 3" descr="icons/check.png">    </p:cNvPr>
           <p:cNvPicPr>
             <a:picLocks noChangeAspect="1"/>
           </p:cNvPicPr>
@@ -4485,7 +4497,7 @@
         </p:blipFill>
         <p:spPr>
           <a:xfrm>
-            <a:off x="747065" y="5136185"/>
+            <a:off x="747065" y="4084625"/>
             <a:ext cx="197510" cy="197510"/>
           </a:xfrm>
           <a:prstGeom prst="rect">
@@ -4495,13 +4507,13 @@
       </p:pic>
       <p:sp>
         <p:nvSpPr>
-          <p:cNvPr id="15" name="Text 9"/>
-          <p:cNvSpPr/>
-          <p:nvPr/>
-        </p:nvSpPr>
-        <p:spPr>
-          <a:xfrm>
-            <a:off x="1234440" y="4956048"/>
+          <p:cNvPr id="13" name="Text 7"/>
+          <p:cNvSpPr/>
+          <p:nvPr/>
+        </p:nvSpPr>
+        <p:spPr>
+          <a:xfrm>
+            <a:off x="1234440" y="3904488"/>
             <a:ext cx="4800600" cy="960120"/>
           </a:xfrm>
           <a:prstGeom prst="rect">
@@ -4529,7 +4541,7 @@
                 <a:ea typeface="Calibri" pitchFamily="34" charset="-122"/>
                 <a:cs typeface="Calibri" pitchFamily="34" charset="-120"/>
               </a:rPr>
-              <a:t>"45" + 5 plante — tant mieux</a:t>
+              <a:t>Des nombres lisibles</a:t>
             </a:r>
             <a:endParaRPr lang="en-US" sz="1450" dirty="0"/>
           </a:p>
@@ -4549,6 +4561,112 @@
                 <a:ea typeface="Calibri" pitchFamily="34" charset="-122"/>
                 <a:cs typeface="Calibri" pitchFamily="34" charset="-120"/>
               </a:rPr>
+              <a:t>45_000_000 — le tiret bas sépare les milliers.</a:t>
+            </a:r>
+            <a:endParaRPr lang="en-US" sz="1450" dirty="0"/>
+          </a:p>
+        </p:txBody>
+      </p:sp>
+      <p:sp>
+        <p:nvSpPr>
+          <p:cNvPr id="14" name="Shape 8"/>
+          <p:cNvSpPr/>
+          <p:nvPr/>
+        </p:nvSpPr>
+        <p:spPr>
+          <a:xfrm>
+            <a:off x="640080" y="5029200"/>
+            <a:ext cx="411480" cy="411480"/>
+          </a:xfrm>
+          <a:prstGeom prst="ellipse">
+            <a:avLst/>
+          </a:prstGeom>
+          <a:solidFill>
+            <a:srgbClr val="2E9E4F"/>
+          </a:solidFill>
+          <a:ln/>
+        </p:spPr>
+      </p:sp>
+      <p:pic>
+        <p:nvPicPr>
+          <p:cNvPr id="15" name="Image 4" descr="icons/check.png">    </p:cNvPr>
+          <p:cNvPicPr>
+            <a:picLocks noChangeAspect="1"/>
+          </p:cNvPicPr>
+          <p:nvPr/>
+        </p:nvPicPr>
+        <p:blipFill>
+          <a:blip r:embed="rId5"/>
+          <a:stretch>
+            <a:fillRect/>
+          </a:stretch>
+        </p:blipFill>
+        <p:spPr>
+          <a:xfrm>
+            <a:off x="747065" y="5136185"/>
+            <a:ext cx="197510" cy="197510"/>
+          </a:xfrm>
+          <a:prstGeom prst="rect">
+            <a:avLst/>
+          </a:prstGeom>
+        </p:spPr>
+      </p:pic>
+      <p:sp>
+        <p:nvSpPr>
+          <p:cNvPr id="16" name="Text 9"/>
+          <p:cNvSpPr/>
+          <p:nvPr/>
+        </p:nvSpPr>
+        <p:spPr>
+          <a:xfrm>
+            <a:off x="1234440" y="4956048"/>
+            <a:ext cx="4800600" cy="960120"/>
+          </a:xfrm>
+          <a:prstGeom prst="rect">
+            <a:avLst/>
+          </a:prstGeom>
+          <a:noFill/>
+          <a:ln/>
+        </p:spPr>
+        <p:txBody>
+          <a:bodyPr wrap="square" lIns="0" tIns="0" rIns="0" bIns="0" rtlCol="0" anchor="ctr"/>
+          <a:lstStyle/>
+          <a:p>
+            <a:pPr indent="0" marL="0">
+              <a:lnSpc>
+                <a:spcPct val="105000"/>
+              </a:lnSpc>
+              <a:buNone/>
+            </a:pPr>
+            <a:r>
+              <a:rPr lang="en-US" sz="1450" b="1" dirty="0">
+                <a:solidFill>
+                  <a:srgbClr val="1C2A24"/>
+                </a:solidFill>
+                <a:latin typeface="Calibri" pitchFamily="34" charset="0"/>
+                <a:ea typeface="Calibri" pitchFamily="34" charset="-122"/>
+                <a:cs typeface="Calibri" pitchFamily="34" charset="-120"/>
+              </a:rPr>
+              <a:t>"45" + 5 plante — tant mieux</a:t>
+            </a:r>
+            <a:endParaRPr lang="en-US" sz="1450" dirty="0"/>
+          </a:p>
+          <a:p>
+            <a:pPr indent="0" marL="0">
+              <a:lnSpc>
+                <a:spcPct val="105000"/>
+              </a:lnSpc>
+              <a:buNone/>
+            </a:pPr>
+            <a:r>
+              <a:rPr lang="en-US" sz="1250" dirty="0">
+                <a:solidFill>
+                  <a:srgbClr val="5C6B63"/>
+                </a:solidFill>
+                <a:latin typeface="Calibri" pitchFamily="34" charset="0"/>
+                <a:ea typeface="Calibri" pitchFamily="34" charset="-122"/>
+                <a:cs typeface="Calibri" pitchFamily="34" charset="-120"/>
+              </a:rPr>
               <a:t>On convertit explicitement : int("45") + 5.</a:t>
             </a:r>
             <a:endParaRPr lang="en-US" sz="1450" dirty="0"/>
@@ -4557,7 +4675,7 @@
       </p:sp>
       <p:sp>
         <p:nvSpPr>
-          <p:cNvPr id="16" name="Shape 10"/>
+          <p:cNvPr id="17" name="Shape 10"/>
           <p:cNvSpPr/>
           <p:nvPr/>
         </p:nvSpPr>
@@ -4572,14 +4690,14 @@
             </a:avLst>
           </a:prstGeom>
           <a:solidFill>
-            <a:srgbClr val="10241B"/>
+            <a:srgbClr val="0F2418"/>
           </a:solidFill>
           <a:ln/>
         </p:spPr>
       </p:sp>
       <p:sp>
         <p:nvSpPr>
-          <p:cNvPr id="17" name="Shape 11"/>
+          <p:cNvPr id="18" name="Shape 11"/>
           <p:cNvSpPr/>
           <p:nvPr/>
         </p:nvSpPr>
@@ -4599,7 +4717,7 @@
       </p:sp>
       <p:sp>
         <p:nvSpPr>
-          <p:cNvPr id="18" name="Shape 12"/>
+          <p:cNvPr id="19" name="Shape 12"/>
           <p:cNvSpPr/>
           <p:nvPr/>
         </p:nvSpPr>
@@ -4612,14 +4730,14 @@
             <a:avLst/>
           </a:prstGeom>
           <a:solidFill>
-            <a:srgbClr val="C9A227"/>
+            <a:srgbClr val="C79100"/>
           </a:solidFill>
           <a:ln/>
         </p:spPr>
       </p:sp>
       <p:sp>
         <p:nvSpPr>
-          <p:cNvPr id="19" name="Shape 13"/>
+          <p:cNvPr id="20" name="Shape 13"/>
           <p:cNvSpPr/>
           <p:nvPr/>
         </p:nvSpPr>
@@ -4639,7 +4757,7 @@
       </p:sp>
       <p:sp>
         <p:nvSpPr>
-          <p:cNvPr id="20" name="Text 14"/>
+          <p:cNvPr id="21" name="Text 14"/>
           <p:cNvSpPr/>
           <p:nvPr/>
         </p:nvSpPr>
@@ -4678,7 +4796,7 @@
       </p:sp>
       <p:sp>
         <p:nvSpPr>
-          <p:cNvPr id="21" name="Text 15"/>
+          <p:cNvPr id="22" name="Text 15"/>
           <p:cNvSpPr/>
           <p:nvPr/>
         </p:nvSpPr>
@@ -4786,7 +4904,7 @@
                 <a:ea typeface="Courier New" pitchFamily="34" charset="-122"/>
                 <a:cs typeface="Courier New" pitchFamily="34" charset="-120"/>
               </a:rPr>
-              <a:t>"  ets diallo  "</a:t>
+              <a:t>"  ets djaló  "</a:t>
             </a:r>
             <a:endParaRPr lang="en-US" sz="1250" dirty="0"/>
           </a:p>
@@ -4840,7 +4958,7 @@
                 <a:ea typeface="Courier New" pitchFamily="34" charset="-122"/>
                 <a:cs typeface="Courier New" pitchFamily="34" charset="-120"/>
               </a:rPr>
-              <a:t>        # GNF</a:t>
+              <a:t>        # FCFA</a:t>
             </a:r>
             <a:endParaRPr lang="en-US" sz="1250" dirty="0"/>
           </a:p>
@@ -5149,7 +5267,7 @@
         <p:spPr>
           <a:xfrm>
             <a:off x="548640" y="384048"/>
-            <a:ext cx="10972800" cy="320040"/>
+            <a:ext cx="9601200" cy="320040"/>
           </a:xfrm>
           <a:prstGeom prst="rect">
             <a:avLst/>
@@ -5167,7 +5285,7 @@
             <a:r>
               <a:rPr lang="en-US" sz="1300" b="1" spc="200" kern="0" dirty="0">
                 <a:solidFill>
-                  <a:srgbClr val="C9A227"/>
+                  <a:srgbClr val="C79100"/>
                 </a:solidFill>
                 <a:latin typeface="Calibri" pitchFamily="34" charset="0"/>
                 <a:ea typeface="Calibri" pitchFamily="34" charset="-122"/>
@@ -5188,7 +5306,7 @@
         <p:spPr>
           <a:xfrm>
             <a:off x="548640" y="658368"/>
-            <a:ext cx="11064240" cy="731520"/>
+            <a:ext cx="9966960" cy="731520"/>
           </a:xfrm>
           <a:prstGeom prst="rect">
             <a:avLst/>
@@ -5206,7 +5324,7 @@
             <a:r>
               <a:rPr lang="en-US" sz="3400" b="1" dirty="0">
                 <a:solidFill>
-                  <a:srgbClr val="14563C"/>
+                  <a:srgbClr val="0E7A3D"/>
                 </a:solidFill>
                 <a:latin typeface="Cambria" pitchFamily="34" charset="0"/>
                 <a:ea typeface="Cambria" pitchFamily="34" charset="-122"/>
@@ -5218,29 +5336,9 @@
           </a:p>
         </p:txBody>
       </p:sp>
-      <p:sp>
-        <p:nvSpPr>
-          <p:cNvPr id="4" name="Shape 2"/>
-          <p:cNvSpPr/>
-          <p:nvPr/>
-        </p:nvSpPr>
-        <p:spPr>
-          <a:xfrm>
-            <a:off x="640080" y="1874520"/>
-            <a:ext cx="411480" cy="411480"/>
-          </a:xfrm>
-          <a:prstGeom prst="ellipse">
-            <a:avLst/>
-          </a:prstGeom>
-          <a:solidFill>
-            <a:srgbClr val="1E7A50"/>
-          </a:solidFill>
-          <a:ln/>
-        </p:spPr>
-      </p:sp>
       <p:pic>
         <p:nvPicPr>
-          <p:cNvPr id="5" name="Image 0" descr="icons/check.png">    </p:cNvPr>
+          <p:cNvPr id="4" name="Image 0" descr="logo-dgi.png">    </p:cNvPr>
           <p:cNvPicPr>
             <a:picLocks noChangeAspect="1"/>
           </p:cNvPicPr>
@@ -5254,8 +5352,8 @@
         </p:blipFill>
         <p:spPr>
           <a:xfrm>
-            <a:off x="747065" y="1981505"/>
-            <a:ext cx="197510" cy="197510"/>
+            <a:off x="10744200" y="384048"/>
+            <a:ext cx="1051560" cy="795528"/>
           </a:xfrm>
           <a:prstGeom prst="rect">
             <a:avLst/>
@@ -5264,89 +5362,27 @@
       </p:pic>
       <p:sp>
         <p:nvSpPr>
-          <p:cNvPr id="6" name="Text 3"/>
-          <p:cNvSpPr/>
-          <p:nvPr/>
-        </p:nvSpPr>
-        <p:spPr>
-          <a:xfrm>
-            <a:off x="1234440" y="1801368"/>
-            <a:ext cx="4800600" cy="960120"/>
-          </a:xfrm>
-          <a:prstGeom prst="rect">
-            <a:avLst/>
-          </a:prstGeom>
-          <a:noFill/>
-          <a:ln/>
-        </p:spPr>
-        <p:txBody>
-          <a:bodyPr wrap="square" lIns="0" tIns="0" rIns="0" bIns="0" rtlCol="0" anchor="ctr"/>
-          <a:lstStyle/>
-          <a:p>
-            <a:pPr indent="0" marL="0">
-              <a:lnSpc>
-                <a:spcPct val="105000"/>
-              </a:lnSpc>
-              <a:buNone/>
-            </a:pPr>
-            <a:r>
-              <a:rPr lang="en-US" sz="1450" b="1" dirty="0">
-                <a:solidFill>
-                  <a:srgbClr val="1C2A24"/>
-                </a:solidFill>
-                <a:latin typeface="Calibri" pitchFamily="34" charset="0"/>
-                <a:ea typeface="Calibri" pitchFamily="34" charset="-122"/>
-                <a:cs typeface="Calibri" pitchFamily="34" charset="-120"/>
-              </a:rPr>
-              <a:t>Les saisies sont sales</a:t>
-            </a:r>
-            <a:endParaRPr lang="en-US" sz="1450" dirty="0"/>
-          </a:p>
-          <a:p>
-            <a:pPr indent="0" marL="0">
-              <a:lnSpc>
-                <a:spcPct val="105000"/>
-              </a:lnSpc>
-              <a:buNone/>
-            </a:pPr>
-            <a:r>
-              <a:rPr lang="en-US" sz="1250" dirty="0">
-                <a:solidFill>
-                  <a:srgbClr val="5C6B63"/>
-                </a:solidFill>
-                <a:latin typeface="Calibri" pitchFamily="34" charset="0"/>
-                <a:ea typeface="Calibri" pitchFamily="34" charset="-122"/>
-                <a:cs typeface="Calibri" pitchFamily="34" charset="-120"/>
-              </a:rPr>
-              <a:t>.strip() retire les espaces, .title() remet les majuscules.</a:t>
-            </a:r>
-            <a:endParaRPr lang="en-US" sz="1450" dirty="0"/>
-          </a:p>
-        </p:txBody>
-      </p:sp>
-      <p:sp>
-        <p:nvSpPr>
-          <p:cNvPr id="7" name="Shape 4"/>
-          <p:cNvSpPr/>
-          <p:nvPr/>
-        </p:nvSpPr>
-        <p:spPr>
-          <a:xfrm>
-            <a:off x="640080" y="2926080"/>
+          <p:cNvPr id="5" name="Shape 2"/>
+          <p:cNvSpPr/>
+          <p:nvPr/>
+        </p:nvSpPr>
+        <p:spPr>
+          <a:xfrm>
+            <a:off x="640080" y="1874520"/>
             <a:ext cx="411480" cy="411480"/>
           </a:xfrm>
           <a:prstGeom prst="ellipse">
             <a:avLst/>
           </a:prstGeom>
           <a:solidFill>
-            <a:srgbClr val="1E7A50"/>
+            <a:srgbClr val="2E9E4F"/>
           </a:solidFill>
           <a:ln/>
         </p:spPr>
       </p:sp>
       <p:pic>
         <p:nvPicPr>
-          <p:cNvPr id="8" name="Image 1" descr="icons/check.png">    </p:cNvPr>
+          <p:cNvPr id="6" name="Image 1" descr="icons/check.png">    </p:cNvPr>
           <p:cNvPicPr>
             <a:picLocks noChangeAspect="1"/>
           </p:cNvPicPr>
@@ -5360,7 +5396,7 @@
         </p:blipFill>
         <p:spPr>
           <a:xfrm>
-            <a:off x="747065" y="3033065"/>
+            <a:off x="747065" y="1981505"/>
             <a:ext cx="197510" cy="197510"/>
           </a:xfrm>
           <a:prstGeom prst="rect">
@@ -5370,13 +5406,13 @@
       </p:pic>
       <p:sp>
         <p:nvSpPr>
-          <p:cNvPr id="9" name="Text 5"/>
-          <p:cNvSpPr/>
-          <p:nvPr/>
-        </p:nvSpPr>
-        <p:spPr>
-          <a:xfrm>
-            <a:off x="1234440" y="2852928"/>
+          <p:cNvPr id="7" name="Text 3"/>
+          <p:cNvSpPr/>
+          <p:nvPr/>
+        </p:nvSpPr>
+        <p:spPr>
+          <a:xfrm>
+            <a:off x="1234440" y="1801368"/>
             <a:ext cx="4800600" cy="960120"/>
           </a:xfrm>
           <a:prstGeom prst="rect">
@@ -5404,7 +5440,7 @@
                 <a:ea typeface="Calibri" pitchFamily="34" charset="-122"/>
                 <a:cs typeface="Calibri" pitchFamily="34" charset="-120"/>
               </a:rPr>
-              <a:t>La f-string, réflexe n°1</a:t>
+              <a:t>Les saisies sont sales</a:t>
             </a:r>
             <a:endParaRPr lang="en-US" sz="1450" dirty="0"/>
           </a:p>
@@ -5424,7 +5460,7 @@
                 <a:ea typeface="Calibri" pitchFamily="34" charset="-122"/>
                 <a:cs typeface="Calibri" pitchFamily="34" charset="-120"/>
               </a:rPr>
-              <a:t>f"Contribuable {nif}" — la variable directement dans le texte.</a:t>
+              <a:t>.strip() retire les espaces, .title() remet les majuscules.</a:t>
             </a:r>
             <a:endParaRPr lang="en-US" sz="1450" dirty="0"/>
           </a:p>
@@ -5432,27 +5468,27 @@
       </p:sp>
       <p:sp>
         <p:nvSpPr>
-          <p:cNvPr id="10" name="Shape 6"/>
-          <p:cNvSpPr/>
-          <p:nvPr/>
-        </p:nvSpPr>
-        <p:spPr>
-          <a:xfrm>
-            <a:off x="640080" y="3977640"/>
+          <p:cNvPr id="8" name="Shape 4"/>
+          <p:cNvSpPr/>
+          <p:nvPr/>
+        </p:nvSpPr>
+        <p:spPr>
+          <a:xfrm>
+            <a:off x="640080" y="2926080"/>
             <a:ext cx="411480" cy="411480"/>
           </a:xfrm>
           <a:prstGeom prst="ellipse">
             <a:avLst/>
           </a:prstGeom>
           <a:solidFill>
-            <a:srgbClr val="1E7A50"/>
+            <a:srgbClr val="2E9E4F"/>
           </a:solidFill>
           <a:ln/>
         </p:spPr>
       </p:sp>
       <p:pic>
         <p:nvPicPr>
-          <p:cNvPr id="11" name="Image 2" descr="icons/check.png">    </p:cNvPr>
+          <p:cNvPr id="9" name="Image 2" descr="icons/check.png">    </p:cNvPr>
           <p:cNvPicPr>
             <a:picLocks noChangeAspect="1"/>
           </p:cNvPicPr>
@@ -5466,7 +5502,7 @@
         </p:blipFill>
         <p:spPr>
           <a:xfrm>
-            <a:off x="747065" y="4084625"/>
+            <a:off x="747065" y="3033065"/>
             <a:ext cx="197510" cy="197510"/>
           </a:xfrm>
           <a:prstGeom prst="rect">
@@ -5476,13 +5512,13 @@
       </p:pic>
       <p:sp>
         <p:nvSpPr>
-          <p:cNvPr id="12" name="Text 7"/>
-          <p:cNvSpPr/>
-          <p:nvPr/>
-        </p:nvSpPr>
-        <p:spPr>
-          <a:xfrm>
-            <a:off x="1234440" y="3904488"/>
+          <p:cNvPr id="10" name="Text 5"/>
+          <p:cNvSpPr/>
+          <p:nvPr/>
+        </p:nvSpPr>
+        <p:spPr>
+          <a:xfrm>
+            <a:off x="1234440" y="2852928"/>
             <a:ext cx="4800600" cy="960120"/>
           </a:xfrm>
           <a:prstGeom prst="rect">
@@ -5510,7 +5546,7 @@
                 <a:ea typeface="Calibri" pitchFamily="34" charset="-122"/>
                 <a:cs typeface="Calibri" pitchFamily="34" charset="-120"/>
               </a:rPr>
-              <a:t>Formater les montants</a:t>
+              <a:t>La f-string, réflexe n°1</a:t>
             </a:r>
             <a:endParaRPr lang="en-US" sz="1450" dirty="0"/>
           </a:p>
@@ -5530,7 +5566,7 @@
                 <a:ea typeface="Calibri" pitchFamily="34" charset="-122"/>
                 <a:cs typeface="Calibri" pitchFamily="34" charset="-120"/>
               </a:rPr>
-              <a:t>{ca:,} insère des séparateurs de milliers.</a:t>
+              <a:t>f"Contribuable {nif}" — la variable directement dans le texte.</a:t>
             </a:r>
             <a:endParaRPr lang="en-US" sz="1450" dirty="0"/>
           </a:p>
@@ -5538,27 +5574,27 @@
       </p:sp>
       <p:sp>
         <p:nvSpPr>
-          <p:cNvPr id="13" name="Shape 8"/>
-          <p:cNvSpPr/>
-          <p:nvPr/>
-        </p:nvSpPr>
-        <p:spPr>
-          <a:xfrm>
-            <a:off x="640080" y="5029200"/>
+          <p:cNvPr id="11" name="Shape 6"/>
+          <p:cNvSpPr/>
+          <p:nvPr/>
+        </p:nvSpPr>
+        <p:spPr>
+          <a:xfrm>
+            <a:off x="640080" y="3977640"/>
             <a:ext cx="411480" cy="411480"/>
           </a:xfrm>
           <a:prstGeom prst="ellipse">
             <a:avLst/>
           </a:prstGeom>
           <a:solidFill>
-            <a:srgbClr val="1E7A50"/>
+            <a:srgbClr val="2E9E4F"/>
           </a:solidFill>
           <a:ln/>
         </p:spPr>
       </p:sp>
       <p:pic>
         <p:nvPicPr>
-          <p:cNvPr id="14" name="Image 3" descr="icons/check.png">    </p:cNvPr>
+          <p:cNvPr id="12" name="Image 3" descr="icons/check.png">    </p:cNvPr>
           <p:cNvPicPr>
             <a:picLocks noChangeAspect="1"/>
           </p:cNvPicPr>
@@ -5572,7 +5608,7 @@
         </p:blipFill>
         <p:spPr>
           <a:xfrm>
-            <a:off x="747065" y="5136185"/>
+            <a:off x="747065" y="4084625"/>
             <a:ext cx="197510" cy="197510"/>
           </a:xfrm>
           <a:prstGeom prst="rect">
@@ -5582,13 +5618,13 @@
       </p:pic>
       <p:sp>
         <p:nvSpPr>
-          <p:cNvPr id="15" name="Text 9"/>
-          <p:cNvSpPr/>
-          <p:nvPr/>
-        </p:nvSpPr>
-        <p:spPr>
-          <a:xfrm>
-            <a:off x="1234440" y="4956048"/>
+          <p:cNvPr id="13" name="Text 7"/>
+          <p:cNvSpPr/>
+          <p:nvPr/>
+        </p:nvSpPr>
+        <p:spPr>
+          <a:xfrm>
+            <a:off x="1234440" y="3904488"/>
             <a:ext cx="4800600" cy="960120"/>
           </a:xfrm>
           <a:prstGeom prst="rect">
@@ -5616,7 +5652,7 @@
                 <a:ea typeface="Calibri" pitchFamily="34" charset="-122"/>
                 <a:cs typeface="Calibri" pitchFamily="34" charset="-120"/>
               </a:rPr>
-              <a:t>Tout est méthode</a:t>
+              <a:t>Formater les montants</a:t>
             </a:r>
             <a:endParaRPr lang="en-US" sz="1450" dirty="0"/>
           </a:p>
@@ -5636,6 +5672,112 @@
                 <a:ea typeface="Calibri" pitchFamily="34" charset="-122"/>
                 <a:cs typeface="Calibri" pitchFamily="34" charset="-120"/>
               </a:rPr>
+              <a:t>{ca:,} insère des séparateurs de milliers.</a:t>
+            </a:r>
+            <a:endParaRPr lang="en-US" sz="1450" dirty="0"/>
+          </a:p>
+        </p:txBody>
+      </p:sp>
+      <p:sp>
+        <p:nvSpPr>
+          <p:cNvPr id="14" name="Shape 8"/>
+          <p:cNvSpPr/>
+          <p:nvPr/>
+        </p:nvSpPr>
+        <p:spPr>
+          <a:xfrm>
+            <a:off x="640080" y="5029200"/>
+            <a:ext cx="411480" cy="411480"/>
+          </a:xfrm>
+          <a:prstGeom prst="ellipse">
+            <a:avLst/>
+          </a:prstGeom>
+          <a:solidFill>
+            <a:srgbClr val="2E9E4F"/>
+          </a:solidFill>
+          <a:ln/>
+        </p:spPr>
+      </p:sp>
+      <p:pic>
+        <p:nvPicPr>
+          <p:cNvPr id="15" name="Image 4" descr="icons/check.png">    </p:cNvPr>
+          <p:cNvPicPr>
+            <a:picLocks noChangeAspect="1"/>
+          </p:cNvPicPr>
+          <p:nvPr/>
+        </p:nvPicPr>
+        <p:blipFill>
+          <a:blip r:embed="rId5"/>
+          <a:stretch>
+            <a:fillRect/>
+          </a:stretch>
+        </p:blipFill>
+        <p:spPr>
+          <a:xfrm>
+            <a:off x="747065" y="5136185"/>
+            <a:ext cx="197510" cy="197510"/>
+          </a:xfrm>
+          <a:prstGeom prst="rect">
+            <a:avLst/>
+          </a:prstGeom>
+        </p:spPr>
+      </p:pic>
+      <p:sp>
+        <p:nvSpPr>
+          <p:cNvPr id="16" name="Text 9"/>
+          <p:cNvSpPr/>
+          <p:nvPr/>
+        </p:nvSpPr>
+        <p:spPr>
+          <a:xfrm>
+            <a:off x="1234440" y="4956048"/>
+            <a:ext cx="4800600" cy="960120"/>
+          </a:xfrm>
+          <a:prstGeom prst="rect">
+            <a:avLst/>
+          </a:prstGeom>
+          <a:noFill/>
+          <a:ln/>
+        </p:spPr>
+        <p:txBody>
+          <a:bodyPr wrap="square" lIns="0" tIns="0" rIns="0" bIns="0" rtlCol="0" anchor="ctr"/>
+          <a:lstStyle/>
+          <a:p>
+            <a:pPr indent="0" marL="0">
+              <a:lnSpc>
+                <a:spcPct val="105000"/>
+              </a:lnSpc>
+              <a:buNone/>
+            </a:pPr>
+            <a:r>
+              <a:rPr lang="en-US" sz="1450" b="1" dirty="0">
+                <a:solidFill>
+                  <a:srgbClr val="1C2A24"/>
+                </a:solidFill>
+                <a:latin typeface="Calibri" pitchFamily="34" charset="0"/>
+                <a:ea typeface="Calibri" pitchFamily="34" charset="-122"/>
+                <a:cs typeface="Calibri" pitchFamily="34" charset="-120"/>
+              </a:rPr>
+              <a:t>Tout est méthode</a:t>
+            </a:r>
+            <a:endParaRPr lang="en-US" sz="1450" dirty="0"/>
+          </a:p>
+          <a:p>
+            <a:pPr indent="0" marL="0">
+              <a:lnSpc>
+                <a:spcPct val="105000"/>
+              </a:lnSpc>
+              <a:buNone/>
+            </a:pPr>
+            <a:r>
+              <a:rPr lang="en-US" sz="1250" dirty="0">
+                <a:solidFill>
+                  <a:srgbClr val="5C6B63"/>
+                </a:solidFill>
+                <a:latin typeface="Calibri" pitchFamily="34" charset="0"/>
+                <a:ea typeface="Calibri" pitchFamily="34" charset="-122"/>
+                <a:cs typeface="Calibri" pitchFamily="34" charset="-120"/>
+              </a:rPr>
               <a:t>upper, lower, replace, startswith… dir(str) pour explorer.</a:t>
             </a:r>
             <a:endParaRPr lang="en-US" sz="1450" dirty="0"/>
@@ -5644,7 +5786,7 @@
       </p:sp>
       <p:sp>
         <p:nvSpPr>
-          <p:cNvPr id="16" name="Shape 10"/>
+          <p:cNvPr id="17" name="Shape 10"/>
           <p:cNvSpPr/>
           <p:nvPr/>
         </p:nvSpPr>
@@ -5659,14 +5801,14 @@
             </a:avLst>
           </a:prstGeom>
           <a:solidFill>
-            <a:srgbClr val="10241B"/>
+            <a:srgbClr val="0F2418"/>
           </a:solidFill>
           <a:ln/>
         </p:spPr>
       </p:sp>
       <p:sp>
         <p:nvSpPr>
-          <p:cNvPr id="17" name="Shape 11"/>
+          <p:cNvPr id="18" name="Shape 11"/>
           <p:cNvSpPr/>
           <p:nvPr/>
         </p:nvSpPr>
@@ -5686,7 +5828,7 @@
       </p:sp>
       <p:sp>
         <p:nvSpPr>
-          <p:cNvPr id="18" name="Shape 12"/>
+          <p:cNvPr id="19" name="Shape 12"/>
           <p:cNvSpPr/>
           <p:nvPr/>
         </p:nvSpPr>
@@ -5699,14 +5841,14 @@
             <a:avLst/>
           </a:prstGeom>
           <a:solidFill>
-            <a:srgbClr val="C9A227"/>
+            <a:srgbClr val="C79100"/>
           </a:solidFill>
           <a:ln/>
         </p:spPr>
       </p:sp>
       <p:sp>
         <p:nvSpPr>
-          <p:cNvPr id="19" name="Shape 13"/>
+          <p:cNvPr id="20" name="Shape 13"/>
           <p:cNvSpPr/>
           <p:nvPr/>
         </p:nvSpPr>
@@ -5726,7 +5868,7 @@
       </p:sp>
       <p:sp>
         <p:nvSpPr>
-          <p:cNvPr id="20" name="Text 14"/>
+          <p:cNvPr id="21" name="Text 14"/>
           <p:cNvSpPr/>
           <p:nvPr/>
         </p:nvSpPr>
@@ -5765,7 +5907,7 @@
       </p:sp>
       <p:sp>
         <p:nvSpPr>
-          <p:cNvPr id="21" name="Text 15"/>
+          <p:cNvPr id="22" name="Text 15"/>
           <p:cNvSpPr/>
           <p:nvPr/>
         </p:nvSpPr>
@@ -5816,7 +5958,7 @@
                 <a:ea typeface="Courier New" pitchFamily="34" charset="-122"/>
                 <a:cs typeface="Courier New" pitchFamily="34" charset="-120"/>
               </a:rPr>
-              <a:t>"  ets fatoumata diallo  "</a:t>
+              <a:t>"  ets fatumata djaló  "</a:t>
             </a:r>
             <a:endParaRPr lang="en-US" sz="1250" dirty="0"/>
           </a:p>
@@ -5893,7 +6035,7 @@
                 <a:ea typeface="Courier New" pitchFamily="34" charset="-122"/>
                 <a:cs typeface="Courier New" pitchFamily="34" charset="-120"/>
               </a:rPr>
-              <a:t>Ets Fatoumata Diallo</a:t>
+              <a:t>Ets Fatumata Djaló</a:t>
             </a:r>
             <a:endParaRPr lang="en-US" sz="1250" dirty="0"/>
           </a:p>
@@ -6038,7 +6180,7 @@
                 <a:ea typeface="Courier New" pitchFamily="34" charset="-122"/>
                 <a:cs typeface="Courier New" pitchFamily="34" charset="-120"/>
               </a:rPr>
-              <a:t>"CA : {ca:,} GNF"</a:t>
+              <a:t>"CA : {ca:,} FCFA"</a:t>
             </a:r>
             <a:pPr indent="0" marL="0">
               <a:lnSpc>
@@ -6075,7 +6217,7 @@
                 <a:ea typeface="Courier New" pitchFamily="34" charset="-122"/>
                 <a:cs typeface="Courier New" pitchFamily="34" charset="-120"/>
               </a:rPr>
-              <a:t>CA : 45,000,000 GNF</a:t>
+              <a:t>CA : 45,000,000 FCFA</a:t>
             </a:r>
             <a:endParaRPr lang="en-US" sz="1250" dirty="0"/>
           </a:p>
@@ -6284,7 +6426,7 @@
         <p:spPr>
           <a:xfrm>
             <a:off x="548640" y="384048"/>
-            <a:ext cx="10972800" cy="320040"/>
+            <a:ext cx="9601200" cy="320040"/>
           </a:xfrm>
           <a:prstGeom prst="rect">
             <a:avLst/>
@@ -6302,7 +6444,7 @@
             <a:r>
               <a:rPr lang="en-US" sz="1300" b="1" spc="200" kern="0" dirty="0">
                 <a:solidFill>
-                  <a:srgbClr val="C9A227"/>
+                  <a:srgbClr val="C79100"/>
                 </a:solidFill>
                 <a:latin typeface="Calibri" pitchFamily="34" charset="0"/>
                 <a:ea typeface="Calibri" pitchFamily="34" charset="-122"/>
@@ -6323,7 +6465,7 @@
         <p:spPr>
           <a:xfrm>
             <a:off x="548640" y="658368"/>
-            <a:ext cx="11064240" cy="731520"/>
+            <a:ext cx="9966960" cy="731520"/>
           </a:xfrm>
           <a:prstGeom prst="rect">
             <a:avLst/>
@@ -6341,7 +6483,7 @@
             <a:r>
               <a:rPr lang="en-US" sz="3400" b="1" dirty="0">
                 <a:solidFill>
-                  <a:srgbClr val="14563C"/>
+                  <a:srgbClr val="0E7A3D"/>
                 </a:solidFill>
                 <a:latin typeface="Cambria" pitchFamily="34" charset="0"/>
                 <a:ea typeface="Cambria" pitchFamily="34" charset="-122"/>
@@ -6353,368 +6495,9 @@
           </a:p>
         </p:txBody>
       </p:sp>
-      <p:sp>
-        <p:nvSpPr>
-          <p:cNvPr id="4" name="Shape 2"/>
-          <p:cNvSpPr/>
-          <p:nvPr/>
-        </p:nvSpPr>
-        <p:spPr>
-          <a:xfrm>
-            <a:off x="640080" y="1828800"/>
-            <a:ext cx="1691640" cy="1371600"/>
-          </a:xfrm>
-          <a:prstGeom prst="roundRect">
-            <a:avLst>
-              <a:gd name="adj" fmla="val 6000"/>
-            </a:avLst>
-          </a:prstGeom>
-          <a:solidFill>
-            <a:srgbClr val="1E7A50"/>
-          </a:solidFill>
-          <a:ln/>
-        </p:spPr>
-      </p:sp>
-      <p:sp>
-        <p:nvSpPr>
-          <p:cNvPr id="5" name="Text 3"/>
-          <p:cNvSpPr/>
-          <p:nvPr/>
-        </p:nvSpPr>
-        <p:spPr>
-          <a:xfrm>
-            <a:off x="640080" y="1993392"/>
-            <a:ext cx="1691640" cy="457200"/>
-          </a:xfrm>
-          <a:prstGeom prst="rect">
-            <a:avLst/>
-          </a:prstGeom>
-          <a:noFill/>
-          <a:ln/>
-        </p:spPr>
-        <p:txBody>
-          <a:bodyPr wrap="square" lIns="0" tIns="0" rIns="0" bIns="0" rtlCol="0" anchor="ctr"/>
-          <a:lstStyle/>
-          <a:p>
-            <a:pPr algn="ctr" indent="0" marL="0">
-              <a:buNone/>
-            </a:pPr>
-            <a:r>
-              <a:rPr lang="en-US" sz="1500" b="1" dirty="0">
-                <a:solidFill>
-                  <a:srgbClr val="E8D48A"/>
-                </a:solidFill>
-                <a:latin typeface="Calibri" pitchFamily="34" charset="0"/>
-                <a:ea typeface="Calibri" pitchFamily="34" charset="-122"/>
-                <a:cs typeface="Calibri" pitchFamily="34" charset="-120"/>
-              </a:rPr>
-              <a:t>&lt; 100 M</a:t>
-            </a:r>
-            <a:endParaRPr lang="en-US" sz="1500" dirty="0"/>
-          </a:p>
-        </p:txBody>
-      </p:sp>
-      <p:sp>
-        <p:nvSpPr>
-          <p:cNvPr id="6" name="Text 4"/>
-          <p:cNvSpPr/>
-          <p:nvPr/>
-        </p:nvSpPr>
-        <p:spPr>
-          <a:xfrm>
-            <a:off x="713232" y="2450592"/>
-            <a:ext cx="1554480" cy="640080"/>
-          </a:xfrm>
-          <a:prstGeom prst="rect">
-            <a:avLst/>
-          </a:prstGeom>
-          <a:noFill/>
-          <a:ln/>
-        </p:spPr>
-        <p:txBody>
-          <a:bodyPr wrap="square" lIns="0" tIns="0" rIns="0" bIns="0" rtlCol="0" anchor="ctr"/>
-          <a:lstStyle/>
-          <a:p>
-            <a:pPr algn="ctr" indent="0" marL="0">
-              <a:buNone/>
-            </a:pPr>
-            <a:r>
-              <a:rPr lang="en-US" sz="1250" b="1" dirty="0">
-                <a:solidFill>
-                  <a:srgbClr val="FFFFFF"/>
-                </a:solidFill>
-                <a:latin typeface="Calibri" pitchFamily="34" charset="0"/>
-                <a:ea typeface="Calibri" pitchFamily="34" charset="-122"/>
-                <a:cs typeface="Calibri" pitchFamily="34" charset="-120"/>
-              </a:rPr>
-              <a:t>Forfait</a:t>
-            </a:r>
-            <a:endParaRPr lang="en-US" sz="1250" dirty="0"/>
-          </a:p>
-        </p:txBody>
-      </p:sp>
-      <p:sp>
-        <p:nvSpPr>
-          <p:cNvPr id="7" name="Shape 5"/>
-          <p:cNvSpPr/>
-          <p:nvPr/>
-        </p:nvSpPr>
-        <p:spPr>
-          <a:xfrm>
-            <a:off x="2514600" y="1828800"/>
-            <a:ext cx="1691640" cy="1371600"/>
-          </a:xfrm>
-          <a:prstGeom prst="roundRect">
-            <a:avLst>
-              <a:gd name="adj" fmla="val 6000"/>
-            </a:avLst>
-          </a:prstGeom>
-          <a:solidFill>
-            <a:srgbClr val="14563C"/>
-          </a:solidFill>
-          <a:ln/>
-        </p:spPr>
-      </p:sp>
-      <p:sp>
-        <p:nvSpPr>
-          <p:cNvPr id="8" name="Text 6"/>
-          <p:cNvSpPr/>
-          <p:nvPr/>
-        </p:nvSpPr>
-        <p:spPr>
-          <a:xfrm>
-            <a:off x="2514600" y="1993392"/>
-            <a:ext cx="1691640" cy="457200"/>
-          </a:xfrm>
-          <a:prstGeom prst="rect">
-            <a:avLst/>
-          </a:prstGeom>
-          <a:noFill/>
-          <a:ln/>
-        </p:spPr>
-        <p:txBody>
-          <a:bodyPr wrap="square" lIns="0" tIns="0" rIns="0" bIns="0" rtlCol="0" anchor="ctr"/>
-          <a:lstStyle/>
-          <a:p>
-            <a:pPr algn="ctr" indent="0" marL="0">
-              <a:buNone/>
-            </a:pPr>
-            <a:r>
-              <a:rPr lang="en-US" sz="1500" b="1" dirty="0">
-                <a:solidFill>
-                  <a:srgbClr val="E8D48A"/>
-                </a:solidFill>
-                <a:latin typeface="Calibri" pitchFamily="34" charset="0"/>
-                <a:ea typeface="Calibri" pitchFamily="34" charset="-122"/>
-                <a:cs typeface="Calibri" pitchFamily="34" charset="-120"/>
-              </a:rPr>
-              <a:t>100 – 500 M</a:t>
-            </a:r>
-            <a:endParaRPr lang="en-US" sz="1500" dirty="0"/>
-          </a:p>
-        </p:txBody>
-      </p:sp>
-      <p:sp>
-        <p:nvSpPr>
-          <p:cNvPr id="9" name="Text 7"/>
-          <p:cNvSpPr/>
-          <p:nvPr/>
-        </p:nvSpPr>
-        <p:spPr>
-          <a:xfrm>
-            <a:off x="2587752" y="2450592"/>
-            <a:ext cx="1554480" cy="640080"/>
-          </a:xfrm>
-          <a:prstGeom prst="rect">
-            <a:avLst/>
-          </a:prstGeom>
-          <a:noFill/>
-          <a:ln/>
-        </p:spPr>
-        <p:txBody>
-          <a:bodyPr wrap="square" lIns="0" tIns="0" rIns="0" bIns="0" rtlCol="0" anchor="ctr"/>
-          <a:lstStyle/>
-          <a:p>
-            <a:pPr algn="ctr" indent="0" marL="0">
-              <a:buNone/>
-            </a:pPr>
-            <a:r>
-              <a:rPr lang="en-US" sz="1250" b="1" dirty="0">
-                <a:solidFill>
-                  <a:srgbClr val="FFFFFF"/>
-                </a:solidFill>
-                <a:latin typeface="Calibri" pitchFamily="34" charset="0"/>
-                <a:ea typeface="Calibri" pitchFamily="34" charset="-122"/>
-                <a:cs typeface="Calibri" pitchFamily="34" charset="-120"/>
-              </a:rPr>
-              <a:t>Réel simplifié</a:t>
-            </a:r>
-            <a:endParaRPr lang="en-US" sz="1250" dirty="0"/>
-          </a:p>
-        </p:txBody>
-      </p:sp>
-      <p:sp>
-        <p:nvSpPr>
-          <p:cNvPr id="10" name="Shape 8"/>
-          <p:cNvSpPr/>
-          <p:nvPr/>
-        </p:nvSpPr>
-        <p:spPr>
-          <a:xfrm>
-            <a:off x="4389120" y="1828800"/>
-            <a:ext cx="1691640" cy="1371600"/>
-          </a:xfrm>
-          <a:prstGeom prst="roundRect">
-            <a:avLst>
-              <a:gd name="adj" fmla="val 6000"/>
-            </a:avLst>
-          </a:prstGeom>
-          <a:solidFill>
-            <a:srgbClr val="0D3325"/>
-          </a:solidFill>
-          <a:ln/>
-        </p:spPr>
-      </p:sp>
-      <p:sp>
-        <p:nvSpPr>
-          <p:cNvPr id="11" name="Text 9"/>
-          <p:cNvSpPr/>
-          <p:nvPr/>
-        </p:nvSpPr>
-        <p:spPr>
-          <a:xfrm>
-            <a:off x="4389120" y="1993392"/>
-            <a:ext cx="1691640" cy="457200"/>
-          </a:xfrm>
-          <a:prstGeom prst="rect">
-            <a:avLst/>
-          </a:prstGeom>
-          <a:noFill/>
-          <a:ln/>
-        </p:spPr>
-        <p:txBody>
-          <a:bodyPr wrap="square" lIns="0" tIns="0" rIns="0" bIns="0" rtlCol="0" anchor="ctr"/>
-          <a:lstStyle/>
-          <a:p>
-            <a:pPr algn="ctr" indent="0" marL="0">
-              <a:buNone/>
-            </a:pPr>
-            <a:r>
-              <a:rPr lang="en-US" sz="1500" b="1" dirty="0">
-                <a:solidFill>
-                  <a:srgbClr val="E8D48A"/>
-                </a:solidFill>
-                <a:latin typeface="Calibri" pitchFamily="34" charset="0"/>
-                <a:ea typeface="Calibri" pitchFamily="34" charset="-122"/>
-                <a:cs typeface="Calibri" pitchFamily="34" charset="-120"/>
-              </a:rPr>
-              <a:t>≥ 500 M</a:t>
-            </a:r>
-            <a:endParaRPr lang="en-US" sz="1500" dirty="0"/>
-          </a:p>
-        </p:txBody>
-      </p:sp>
-      <p:sp>
-        <p:nvSpPr>
-          <p:cNvPr id="12" name="Text 10"/>
-          <p:cNvSpPr/>
-          <p:nvPr/>
-        </p:nvSpPr>
-        <p:spPr>
-          <a:xfrm>
-            <a:off x="4462272" y="2450592"/>
-            <a:ext cx="1554480" cy="640080"/>
-          </a:xfrm>
-          <a:prstGeom prst="rect">
-            <a:avLst/>
-          </a:prstGeom>
-          <a:noFill/>
-          <a:ln/>
-        </p:spPr>
-        <p:txBody>
-          <a:bodyPr wrap="square" lIns="0" tIns="0" rIns="0" bIns="0" rtlCol="0" anchor="ctr"/>
-          <a:lstStyle/>
-          <a:p>
-            <a:pPr algn="ctr" indent="0" marL="0">
-              <a:buNone/>
-            </a:pPr>
-            <a:r>
-              <a:rPr lang="en-US" sz="1250" b="1" dirty="0">
-                <a:solidFill>
-                  <a:srgbClr val="FFFFFF"/>
-                </a:solidFill>
-                <a:latin typeface="Calibri" pitchFamily="34" charset="0"/>
-                <a:ea typeface="Calibri" pitchFamily="34" charset="-122"/>
-                <a:cs typeface="Calibri" pitchFamily="34" charset="-120"/>
-              </a:rPr>
-              <a:t>Réel normal</a:t>
-            </a:r>
-            <a:endParaRPr lang="en-US" sz="1250" dirty="0"/>
-          </a:p>
-        </p:txBody>
-      </p:sp>
-      <p:sp>
-        <p:nvSpPr>
-          <p:cNvPr id="13" name="Text 11"/>
-          <p:cNvSpPr/>
-          <p:nvPr/>
-        </p:nvSpPr>
-        <p:spPr>
-          <a:xfrm>
-            <a:off x="640080" y="3337560"/>
-            <a:ext cx="5486400" cy="320040"/>
-          </a:xfrm>
-          <a:prstGeom prst="rect">
-            <a:avLst/>
-          </a:prstGeom>
-          <a:noFill/>
-          <a:ln/>
-        </p:spPr>
-        <p:txBody>
-          <a:bodyPr wrap="square" lIns="0" tIns="0" rIns="0" bIns="0" rtlCol="0" anchor="ctr"/>
-          <a:lstStyle/>
-          <a:p>
-            <a:pPr indent="0" marL="0">
-              <a:buNone/>
-            </a:pPr>
-            <a:r>
-              <a:rPr lang="en-US" sz="1150" i="1" dirty="0">
-                <a:solidFill>
-                  <a:srgbClr val="5C6B63"/>
-                </a:solidFill>
-                <a:latin typeface="Calibri" pitchFamily="34" charset="0"/>
-                <a:ea typeface="Calibri" pitchFamily="34" charset="-122"/>
-                <a:cs typeface="Calibri" pitchFamily="34" charset="-120"/>
-              </a:rPr>
-              <a:t>CA annuel en GNF (règle simplifiée pour la formation)</a:t>
-            </a:r>
-            <a:endParaRPr lang="en-US" sz="1150" dirty="0"/>
-          </a:p>
-        </p:txBody>
-      </p:sp>
-      <p:sp>
-        <p:nvSpPr>
-          <p:cNvPr id="14" name="Shape 12"/>
-          <p:cNvSpPr/>
-          <p:nvPr/>
-        </p:nvSpPr>
-        <p:spPr>
-          <a:xfrm>
-            <a:off x="640080" y="3977640"/>
-            <a:ext cx="411480" cy="411480"/>
-          </a:xfrm>
-          <a:prstGeom prst="ellipse">
-            <a:avLst/>
-          </a:prstGeom>
-          <a:solidFill>
-            <a:srgbClr val="1E7A50"/>
-          </a:solidFill>
-          <a:ln/>
-        </p:spPr>
-      </p:sp>
       <p:pic>
         <p:nvPicPr>
-          <p:cNvPr id="15" name="Image 0" descr="icons/check.png">    </p:cNvPr>
+          <p:cNvPr id="4" name="Image 0" descr="logo-dgi.png">    </p:cNvPr>
           <p:cNvPicPr>
             <a:picLocks noChangeAspect="1"/>
           </p:cNvPicPr>
@@ -6728,8 +6511,8 @@
         </p:blipFill>
         <p:spPr>
           <a:xfrm>
-            <a:off x="747065" y="4084625"/>
-            <a:ext cx="197510" cy="197510"/>
+            <a:off x="10744200" y="384048"/>
+            <a:ext cx="1051560" cy="795528"/>
           </a:xfrm>
           <a:prstGeom prst="rect">
             <a:avLst/>
@@ -6738,14 +6521,36 @@
       </p:pic>
       <p:sp>
         <p:nvSpPr>
-          <p:cNvPr id="16" name="Text 13"/>
-          <p:cNvSpPr/>
-          <p:nvPr/>
-        </p:nvSpPr>
-        <p:spPr>
-          <a:xfrm>
-            <a:off x="1234440" y="3904488"/>
-            <a:ext cx="4800600" cy="914400"/>
+          <p:cNvPr id="5" name="Shape 2"/>
+          <p:cNvSpPr/>
+          <p:nvPr/>
+        </p:nvSpPr>
+        <p:spPr>
+          <a:xfrm>
+            <a:off x="640080" y="1828800"/>
+            <a:ext cx="1691640" cy="1371600"/>
+          </a:xfrm>
+          <a:prstGeom prst="roundRect">
+            <a:avLst>
+              <a:gd name="adj" fmla="val 6000"/>
+            </a:avLst>
+          </a:prstGeom>
+          <a:solidFill>
+            <a:srgbClr val="2E9E4F"/>
+          </a:solidFill>
+          <a:ln/>
+        </p:spPr>
+      </p:sp>
+      <p:sp>
+        <p:nvSpPr>
+          <p:cNvPr id="6" name="Text 3"/>
+          <p:cNvSpPr/>
+          <p:nvPr/>
+        </p:nvSpPr>
+        <p:spPr>
+          <a:xfrm>
+            <a:off x="640080" y="1993392"/>
+            <a:ext cx="1691640" cy="457200"/>
           </a:xfrm>
           <a:prstGeom prst="rect">
             <a:avLst/>
@@ -6757,70 +6562,325 @@
           <a:bodyPr wrap="square" lIns="0" tIns="0" rIns="0" bIns="0" rtlCol="0" anchor="ctr"/>
           <a:lstStyle/>
           <a:p>
-            <a:pPr indent="0" marL="0">
-              <a:lnSpc>
-                <a:spcPct val="105000"/>
-              </a:lnSpc>
-              <a:buNone/>
-            </a:pPr>
-            <a:r>
-              <a:rPr lang="en-US" sz="1450" b="1" dirty="0">
-                <a:solidFill>
-                  <a:srgbClr val="1C2A24"/>
+            <a:pPr algn="ctr" indent="0" marL="0">
+              <a:buNone/>
+            </a:pPr>
+            <a:r>
+              <a:rPr lang="en-US" sz="1500" b="1" dirty="0">
+                <a:solidFill>
+                  <a:srgbClr val="FCD116"/>
                 </a:solidFill>
                 <a:latin typeface="Calibri" pitchFamily="34" charset="0"/>
                 <a:ea typeface="Calibri" pitchFamily="34" charset="-122"/>
                 <a:cs typeface="Calibri" pitchFamily="34" charset="-120"/>
               </a:rPr>
-              <a:t>L’indentation EST la syntaxe</a:t>
-            </a:r>
-            <a:endParaRPr lang="en-US" sz="1450" dirty="0"/>
-          </a:p>
-          <a:p>
-            <a:pPr indent="0" marL="0">
-              <a:lnSpc>
-                <a:spcPct val="105000"/>
-              </a:lnSpc>
-              <a:buNone/>
-            </a:pPr>
-            <a:r>
-              <a:rPr lang="en-US" sz="1250" dirty="0">
-                <a:solidFill>
-                  <a:srgbClr val="5C6B63"/>
+              <a:t>&lt; 100 M</a:t>
+            </a:r>
+            <a:endParaRPr lang="en-US" sz="1500" dirty="0"/>
+          </a:p>
+        </p:txBody>
+      </p:sp>
+      <p:sp>
+        <p:nvSpPr>
+          <p:cNvPr id="7" name="Text 4"/>
+          <p:cNvSpPr/>
+          <p:nvPr/>
+        </p:nvSpPr>
+        <p:spPr>
+          <a:xfrm>
+            <a:off x="713232" y="2450592"/>
+            <a:ext cx="1554480" cy="640080"/>
+          </a:xfrm>
+          <a:prstGeom prst="rect">
+            <a:avLst/>
+          </a:prstGeom>
+          <a:noFill/>
+          <a:ln/>
+        </p:spPr>
+        <p:txBody>
+          <a:bodyPr wrap="square" lIns="0" tIns="0" rIns="0" bIns="0" rtlCol="0" anchor="ctr"/>
+          <a:lstStyle/>
+          <a:p>
+            <a:pPr algn="ctr" indent="0" marL="0">
+              <a:buNone/>
+            </a:pPr>
+            <a:r>
+              <a:rPr lang="en-US" sz="1250" b="1" dirty="0">
+                <a:solidFill>
+                  <a:srgbClr val="FFFFFF"/>
                 </a:solidFill>
                 <a:latin typeface="Calibri" pitchFamily="34" charset="0"/>
                 <a:ea typeface="Calibri" pitchFamily="34" charset="-122"/>
                 <a:cs typeface="Calibri" pitchFamily="34" charset="-120"/>
               </a:rPr>
-              <a:t>4 espaces, toujours — le bloc, c’est le retrait.</a:t>
-            </a:r>
-            <a:endParaRPr lang="en-US" sz="1450" dirty="0"/>
-          </a:p>
-        </p:txBody>
-      </p:sp>
-      <p:sp>
-        <p:nvSpPr>
-          <p:cNvPr id="17" name="Shape 14"/>
-          <p:cNvSpPr/>
-          <p:nvPr/>
-        </p:nvSpPr>
-        <p:spPr>
-          <a:xfrm>
-            <a:off x="640080" y="4983480"/>
+              <a:t>Forfait</a:t>
+            </a:r>
+            <a:endParaRPr lang="en-US" sz="1250" dirty="0"/>
+          </a:p>
+        </p:txBody>
+      </p:sp>
+      <p:sp>
+        <p:nvSpPr>
+          <p:cNvPr id="8" name="Shape 5"/>
+          <p:cNvSpPr/>
+          <p:nvPr/>
+        </p:nvSpPr>
+        <p:spPr>
+          <a:xfrm>
+            <a:off x="2514600" y="1828800"/>
+            <a:ext cx="1691640" cy="1371600"/>
+          </a:xfrm>
+          <a:prstGeom prst="roundRect">
+            <a:avLst>
+              <a:gd name="adj" fmla="val 6000"/>
+            </a:avLst>
+          </a:prstGeom>
+          <a:solidFill>
+            <a:srgbClr val="0E7A3D"/>
+          </a:solidFill>
+          <a:ln/>
+        </p:spPr>
+      </p:sp>
+      <p:sp>
+        <p:nvSpPr>
+          <p:cNvPr id="9" name="Text 6"/>
+          <p:cNvSpPr/>
+          <p:nvPr/>
+        </p:nvSpPr>
+        <p:spPr>
+          <a:xfrm>
+            <a:off x="2514600" y="1993392"/>
+            <a:ext cx="1691640" cy="457200"/>
+          </a:xfrm>
+          <a:prstGeom prst="rect">
+            <a:avLst/>
+          </a:prstGeom>
+          <a:noFill/>
+          <a:ln/>
+        </p:spPr>
+        <p:txBody>
+          <a:bodyPr wrap="square" lIns="0" tIns="0" rIns="0" bIns="0" rtlCol="0" anchor="ctr"/>
+          <a:lstStyle/>
+          <a:p>
+            <a:pPr algn="ctr" indent="0" marL="0">
+              <a:buNone/>
+            </a:pPr>
+            <a:r>
+              <a:rPr lang="en-US" sz="1500" b="1" dirty="0">
+                <a:solidFill>
+                  <a:srgbClr val="FCD116"/>
+                </a:solidFill>
+                <a:latin typeface="Calibri" pitchFamily="34" charset="0"/>
+                <a:ea typeface="Calibri" pitchFamily="34" charset="-122"/>
+                <a:cs typeface="Calibri" pitchFamily="34" charset="-120"/>
+              </a:rPr>
+              <a:t>100 – 500 M</a:t>
+            </a:r>
+            <a:endParaRPr lang="en-US" sz="1500" dirty="0"/>
+          </a:p>
+        </p:txBody>
+      </p:sp>
+      <p:sp>
+        <p:nvSpPr>
+          <p:cNvPr id="10" name="Text 7"/>
+          <p:cNvSpPr/>
+          <p:nvPr/>
+        </p:nvSpPr>
+        <p:spPr>
+          <a:xfrm>
+            <a:off x="2587752" y="2450592"/>
+            <a:ext cx="1554480" cy="640080"/>
+          </a:xfrm>
+          <a:prstGeom prst="rect">
+            <a:avLst/>
+          </a:prstGeom>
+          <a:noFill/>
+          <a:ln/>
+        </p:spPr>
+        <p:txBody>
+          <a:bodyPr wrap="square" lIns="0" tIns="0" rIns="0" bIns="0" rtlCol="0" anchor="ctr"/>
+          <a:lstStyle/>
+          <a:p>
+            <a:pPr algn="ctr" indent="0" marL="0">
+              <a:buNone/>
+            </a:pPr>
+            <a:r>
+              <a:rPr lang="en-US" sz="1250" b="1" dirty="0">
+                <a:solidFill>
+                  <a:srgbClr val="FFFFFF"/>
+                </a:solidFill>
+                <a:latin typeface="Calibri" pitchFamily="34" charset="0"/>
+                <a:ea typeface="Calibri" pitchFamily="34" charset="-122"/>
+                <a:cs typeface="Calibri" pitchFamily="34" charset="-120"/>
+              </a:rPr>
+              <a:t>Réel simplifié</a:t>
+            </a:r>
+            <a:endParaRPr lang="en-US" sz="1250" dirty="0"/>
+          </a:p>
+        </p:txBody>
+      </p:sp>
+      <p:sp>
+        <p:nvSpPr>
+          <p:cNvPr id="11" name="Shape 8"/>
+          <p:cNvSpPr/>
+          <p:nvPr/>
+        </p:nvSpPr>
+        <p:spPr>
+          <a:xfrm>
+            <a:off x="4389120" y="1828800"/>
+            <a:ext cx="1691640" cy="1371600"/>
+          </a:xfrm>
+          <a:prstGeom prst="roundRect">
+            <a:avLst>
+              <a:gd name="adj" fmla="val 6000"/>
+            </a:avLst>
+          </a:prstGeom>
+          <a:solidFill>
+            <a:srgbClr val="0A2E1A"/>
+          </a:solidFill>
+          <a:ln/>
+        </p:spPr>
+      </p:sp>
+      <p:sp>
+        <p:nvSpPr>
+          <p:cNvPr id="12" name="Text 9"/>
+          <p:cNvSpPr/>
+          <p:nvPr/>
+        </p:nvSpPr>
+        <p:spPr>
+          <a:xfrm>
+            <a:off x="4389120" y="1993392"/>
+            <a:ext cx="1691640" cy="457200"/>
+          </a:xfrm>
+          <a:prstGeom prst="rect">
+            <a:avLst/>
+          </a:prstGeom>
+          <a:noFill/>
+          <a:ln/>
+        </p:spPr>
+        <p:txBody>
+          <a:bodyPr wrap="square" lIns="0" tIns="0" rIns="0" bIns="0" rtlCol="0" anchor="ctr"/>
+          <a:lstStyle/>
+          <a:p>
+            <a:pPr algn="ctr" indent="0" marL="0">
+              <a:buNone/>
+            </a:pPr>
+            <a:r>
+              <a:rPr lang="en-US" sz="1500" b="1" dirty="0">
+                <a:solidFill>
+                  <a:srgbClr val="FCD116"/>
+                </a:solidFill>
+                <a:latin typeface="Calibri" pitchFamily="34" charset="0"/>
+                <a:ea typeface="Calibri" pitchFamily="34" charset="-122"/>
+                <a:cs typeface="Calibri" pitchFamily="34" charset="-120"/>
+              </a:rPr>
+              <a:t>≥ 500 M</a:t>
+            </a:r>
+            <a:endParaRPr lang="en-US" sz="1500" dirty="0"/>
+          </a:p>
+        </p:txBody>
+      </p:sp>
+      <p:sp>
+        <p:nvSpPr>
+          <p:cNvPr id="13" name="Text 10"/>
+          <p:cNvSpPr/>
+          <p:nvPr/>
+        </p:nvSpPr>
+        <p:spPr>
+          <a:xfrm>
+            <a:off x="4462272" y="2450592"/>
+            <a:ext cx="1554480" cy="640080"/>
+          </a:xfrm>
+          <a:prstGeom prst="rect">
+            <a:avLst/>
+          </a:prstGeom>
+          <a:noFill/>
+          <a:ln/>
+        </p:spPr>
+        <p:txBody>
+          <a:bodyPr wrap="square" lIns="0" tIns="0" rIns="0" bIns="0" rtlCol="0" anchor="ctr"/>
+          <a:lstStyle/>
+          <a:p>
+            <a:pPr algn="ctr" indent="0" marL="0">
+              <a:buNone/>
+            </a:pPr>
+            <a:r>
+              <a:rPr lang="en-US" sz="1250" b="1" dirty="0">
+                <a:solidFill>
+                  <a:srgbClr val="FFFFFF"/>
+                </a:solidFill>
+                <a:latin typeface="Calibri" pitchFamily="34" charset="0"/>
+                <a:ea typeface="Calibri" pitchFamily="34" charset="-122"/>
+                <a:cs typeface="Calibri" pitchFamily="34" charset="-120"/>
+              </a:rPr>
+              <a:t>Réel normal</a:t>
+            </a:r>
+            <a:endParaRPr lang="en-US" sz="1250" dirty="0"/>
+          </a:p>
+        </p:txBody>
+      </p:sp>
+      <p:sp>
+        <p:nvSpPr>
+          <p:cNvPr id="14" name="Text 11"/>
+          <p:cNvSpPr/>
+          <p:nvPr/>
+        </p:nvSpPr>
+        <p:spPr>
+          <a:xfrm>
+            <a:off x="640080" y="3337560"/>
+            <a:ext cx="5486400" cy="320040"/>
+          </a:xfrm>
+          <a:prstGeom prst="rect">
+            <a:avLst/>
+          </a:prstGeom>
+          <a:noFill/>
+          <a:ln/>
+        </p:spPr>
+        <p:txBody>
+          <a:bodyPr wrap="square" lIns="0" tIns="0" rIns="0" bIns="0" rtlCol="0" anchor="ctr"/>
+          <a:lstStyle/>
+          <a:p>
+            <a:pPr indent="0" marL="0">
+              <a:buNone/>
+            </a:pPr>
+            <a:r>
+              <a:rPr lang="en-US" sz="1150" i="1" dirty="0">
+                <a:solidFill>
+                  <a:srgbClr val="5C6B63"/>
+                </a:solidFill>
+                <a:latin typeface="Calibri" pitchFamily="34" charset="0"/>
+                <a:ea typeface="Calibri" pitchFamily="34" charset="-122"/>
+                <a:cs typeface="Calibri" pitchFamily="34" charset="-120"/>
+              </a:rPr>
+              <a:t>CA annuel en FCFA (règle simplifiée pour la formation)</a:t>
+            </a:r>
+            <a:endParaRPr lang="en-US" sz="1150" dirty="0"/>
+          </a:p>
+        </p:txBody>
+      </p:sp>
+      <p:sp>
+        <p:nvSpPr>
+          <p:cNvPr id="15" name="Shape 12"/>
+          <p:cNvSpPr/>
+          <p:nvPr/>
+        </p:nvSpPr>
+        <p:spPr>
+          <a:xfrm>
+            <a:off x="640080" y="3977640"/>
             <a:ext cx="411480" cy="411480"/>
           </a:xfrm>
           <a:prstGeom prst="ellipse">
             <a:avLst/>
           </a:prstGeom>
           <a:solidFill>
-            <a:srgbClr val="1E7A50"/>
+            <a:srgbClr val="2E9E4F"/>
           </a:solidFill>
           <a:ln/>
         </p:spPr>
       </p:sp>
       <p:pic>
         <p:nvPicPr>
-          <p:cNvPr id="18" name="Image 1" descr="icons/check.png">    </p:cNvPr>
+          <p:cNvPr id="16" name="Image 1" descr="icons/check.png">    </p:cNvPr>
           <p:cNvPicPr>
             <a:picLocks noChangeAspect="1"/>
           </p:cNvPicPr>
@@ -6834,7 +6894,7 @@
         </p:blipFill>
         <p:spPr>
           <a:xfrm>
-            <a:off x="747065" y="5090465"/>
+            <a:off x="747065" y="4084625"/>
             <a:ext cx="197510" cy="197510"/>
           </a:xfrm>
           <a:prstGeom prst="rect">
@@ -6844,13 +6904,13 @@
       </p:pic>
       <p:sp>
         <p:nvSpPr>
-          <p:cNvPr id="19" name="Text 15"/>
-          <p:cNvSpPr/>
-          <p:nvPr/>
-        </p:nvSpPr>
-        <p:spPr>
-          <a:xfrm>
-            <a:off x="1234440" y="4910328"/>
+          <p:cNvPr id="17" name="Text 13"/>
+          <p:cNvSpPr/>
+          <p:nvPr/>
+        </p:nvSpPr>
+        <p:spPr>
+          <a:xfrm>
+            <a:off x="1234440" y="3904488"/>
             <a:ext cx="4800600" cy="914400"/>
           </a:xfrm>
           <a:prstGeom prst="rect">
@@ -6878,7 +6938,7 @@
                 <a:ea typeface="Calibri" pitchFamily="34" charset="-122"/>
                 <a:cs typeface="Calibri" pitchFamily="34" charset="-120"/>
               </a:rPr>
-              <a:t>elif enchaîne les cas</a:t>
+              <a:t>L’indentation EST la syntaxe</a:t>
             </a:r>
             <a:endParaRPr lang="en-US" sz="1450" dirty="0"/>
           </a:p>
@@ -6898,6 +6958,112 @@
                 <a:ea typeface="Calibri" pitchFamily="34" charset="-122"/>
                 <a:cs typeface="Calibri" pitchFamily="34" charset="-120"/>
               </a:rPr>
+              <a:t>4 espaces, toujours — le bloc, c’est le retrait.</a:t>
+            </a:r>
+            <a:endParaRPr lang="en-US" sz="1450" dirty="0"/>
+          </a:p>
+        </p:txBody>
+      </p:sp>
+      <p:sp>
+        <p:nvSpPr>
+          <p:cNvPr id="18" name="Shape 14"/>
+          <p:cNvSpPr/>
+          <p:nvPr/>
+        </p:nvSpPr>
+        <p:spPr>
+          <a:xfrm>
+            <a:off x="640080" y="4983480"/>
+            <a:ext cx="411480" cy="411480"/>
+          </a:xfrm>
+          <a:prstGeom prst="ellipse">
+            <a:avLst/>
+          </a:prstGeom>
+          <a:solidFill>
+            <a:srgbClr val="2E9E4F"/>
+          </a:solidFill>
+          <a:ln/>
+        </p:spPr>
+      </p:sp>
+      <p:pic>
+        <p:nvPicPr>
+          <p:cNvPr id="19" name="Image 2" descr="icons/check.png">    </p:cNvPr>
+          <p:cNvPicPr>
+            <a:picLocks noChangeAspect="1"/>
+          </p:cNvPicPr>
+          <p:nvPr/>
+        </p:nvPicPr>
+        <p:blipFill>
+          <a:blip r:embed="rId3"/>
+          <a:stretch>
+            <a:fillRect/>
+          </a:stretch>
+        </p:blipFill>
+        <p:spPr>
+          <a:xfrm>
+            <a:off x="747065" y="5090465"/>
+            <a:ext cx="197510" cy="197510"/>
+          </a:xfrm>
+          <a:prstGeom prst="rect">
+            <a:avLst/>
+          </a:prstGeom>
+        </p:spPr>
+      </p:pic>
+      <p:sp>
+        <p:nvSpPr>
+          <p:cNvPr id="20" name="Text 15"/>
+          <p:cNvSpPr/>
+          <p:nvPr/>
+        </p:nvSpPr>
+        <p:spPr>
+          <a:xfrm>
+            <a:off x="1234440" y="4910328"/>
+            <a:ext cx="4800600" cy="914400"/>
+          </a:xfrm>
+          <a:prstGeom prst="rect">
+            <a:avLst/>
+          </a:prstGeom>
+          <a:noFill/>
+          <a:ln/>
+        </p:spPr>
+        <p:txBody>
+          <a:bodyPr wrap="square" lIns="0" tIns="0" rIns="0" bIns="0" rtlCol="0" anchor="ctr"/>
+          <a:lstStyle/>
+          <a:p>
+            <a:pPr indent="0" marL="0">
+              <a:lnSpc>
+                <a:spcPct val="105000"/>
+              </a:lnSpc>
+              <a:buNone/>
+            </a:pPr>
+            <a:r>
+              <a:rPr lang="en-US" sz="1450" b="1" dirty="0">
+                <a:solidFill>
+                  <a:srgbClr val="1C2A24"/>
+                </a:solidFill>
+                <a:latin typeface="Calibri" pitchFamily="34" charset="0"/>
+                <a:ea typeface="Calibri" pitchFamily="34" charset="-122"/>
+                <a:cs typeface="Calibri" pitchFamily="34" charset="-120"/>
+              </a:rPr>
+              <a:t>elif enchaîne les cas</a:t>
+            </a:r>
+            <a:endParaRPr lang="en-US" sz="1450" dirty="0"/>
+          </a:p>
+          <a:p>
+            <a:pPr indent="0" marL="0">
+              <a:lnSpc>
+                <a:spcPct val="105000"/>
+              </a:lnSpc>
+              <a:buNone/>
+            </a:pPr>
+            <a:r>
+              <a:rPr lang="en-US" sz="1250" dirty="0">
+                <a:solidFill>
+                  <a:srgbClr val="5C6B63"/>
+                </a:solidFill>
+                <a:latin typeface="Calibri" pitchFamily="34" charset="0"/>
+                <a:ea typeface="Calibri" pitchFamily="34" charset="-122"/>
+                <a:cs typeface="Calibri" pitchFamily="34" charset="-120"/>
+              </a:rPr>
               <a:t>Le premier vrai gagne ; else ramasse le reste.</a:t>
             </a:r>
             <a:endParaRPr lang="en-US" sz="1450" dirty="0"/>
@@ -6906,7 +7072,7 @@
       </p:sp>
       <p:sp>
         <p:nvSpPr>
-          <p:cNvPr id="20" name="Shape 16"/>
+          <p:cNvPr id="21" name="Shape 16"/>
           <p:cNvSpPr/>
           <p:nvPr/>
         </p:nvSpPr>
@@ -6921,14 +7087,14 @@
             </a:avLst>
           </a:prstGeom>
           <a:solidFill>
-            <a:srgbClr val="10241B"/>
+            <a:srgbClr val="0F2418"/>
           </a:solidFill>
           <a:ln/>
         </p:spPr>
       </p:sp>
       <p:sp>
         <p:nvSpPr>
-          <p:cNvPr id="21" name="Shape 17"/>
+          <p:cNvPr id="22" name="Shape 17"/>
           <p:cNvSpPr/>
           <p:nvPr/>
         </p:nvSpPr>
@@ -6948,7 +7114,7 @@
       </p:sp>
       <p:sp>
         <p:nvSpPr>
-          <p:cNvPr id="22" name="Shape 18"/>
+          <p:cNvPr id="23" name="Shape 18"/>
           <p:cNvSpPr/>
           <p:nvPr/>
         </p:nvSpPr>
@@ -6961,14 +7127,14 @@
             <a:avLst/>
           </a:prstGeom>
           <a:solidFill>
-            <a:srgbClr val="C9A227"/>
+            <a:srgbClr val="C79100"/>
           </a:solidFill>
           <a:ln/>
         </p:spPr>
       </p:sp>
       <p:sp>
         <p:nvSpPr>
-          <p:cNvPr id="23" name="Shape 19"/>
+          <p:cNvPr id="24" name="Shape 19"/>
           <p:cNvSpPr/>
           <p:nvPr/>
         </p:nvSpPr>
@@ -6988,7 +7154,7 @@
       </p:sp>
       <p:sp>
         <p:nvSpPr>
-          <p:cNvPr id="24" name="Text 20"/>
+          <p:cNvPr id="25" name="Text 20"/>
           <p:cNvSpPr/>
           <p:nvPr/>
         </p:nvSpPr>
@@ -7027,7 +7193,7 @@
       </p:sp>
       <p:sp>
         <p:nvSpPr>
-          <p:cNvPr id="25" name="Text 21"/>
+          <p:cNvPr id="26" name="Text 21"/>
           <p:cNvSpPr/>
           <p:nvPr/>
         </p:nvSpPr>
@@ -7679,7 +7845,7 @@
         <p:spPr>
           <a:xfrm>
             <a:off x="548640" y="384048"/>
-            <a:ext cx="10972800" cy="320040"/>
+            <a:ext cx="9601200" cy="320040"/>
           </a:xfrm>
           <a:prstGeom prst="rect">
             <a:avLst/>
@@ -7697,7 +7863,7 @@
             <a:r>
               <a:rPr lang="en-US" sz="1300" b="1" spc="200" kern="0" dirty="0">
                 <a:solidFill>
-                  <a:srgbClr val="C9A227"/>
+                  <a:srgbClr val="C79100"/>
                 </a:solidFill>
                 <a:latin typeface="Calibri" pitchFamily="34" charset="0"/>
                 <a:ea typeface="Calibri" pitchFamily="34" charset="-122"/>
@@ -7718,7 +7884,7 @@
         <p:spPr>
           <a:xfrm>
             <a:off x="548640" y="658368"/>
-            <a:ext cx="11064240" cy="731520"/>
+            <a:ext cx="9966960" cy="731520"/>
           </a:xfrm>
           <a:prstGeom prst="rect">
             <a:avLst/>
@@ -7736,7 +7902,7 @@
             <a:r>
               <a:rPr lang="en-US" sz="3400" b="1" dirty="0">
                 <a:solidFill>
-                  <a:srgbClr val="14563C"/>
+                  <a:srgbClr val="0E7A3D"/>
                 </a:solidFill>
                 <a:latin typeface="Cambria" pitchFamily="34" charset="0"/>
                 <a:ea typeface="Cambria" pitchFamily="34" charset="-122"/>
@@ -7748,29 +7914,9 @@
           </a:p>
         </p:txBody>
       </p:sp>
-      <p:sp>
-        <p:nvSpPr>
-          <p:cNvPr id="4" name="Shape 2"/>
-          <p:cNvSpPr/>
-          <p:nvPr/>
-        </p:nvSpPr>
-        <p:spPr>
-          <a:xfrm>
-            <a:off x="640080" y="1874520"/>
-            <a:ext cx="411480" cy="411480"/>
-          </a:xfrm>
-          <a:prstGeom prst="ellipse">
-            <a:avLst/>
-          </a:prstGeom>
-          <a:solidFill>
-            <a:srgbClr val="1E7A50"/>
-          </a:solidFill>
-          <a:ln/>
-        </p:spPr>
-      </p:sp>
       <p:pic>
         <p:nvPicPr>
-          <p:cNvPr id="5" name="Image 0" descr="icons/check.png">    </p:cNvPr>
+          <p:cNvPr id="4" name="Image 0" descr="logo-dgi.png">    </p:cNvPr>
           <p:cNvPicPr>
             <a:picLocks noChangeAspect="1"/>
           </p:cNvPicPr>
@@ -7784,8 +7930,8 @@
         </p:blipFill>
         <p:spPr>
           <a:xfrm>
-            <a:off x="747065" y="1981505"/>
-            <a:ext cx="197510" cy="197510"/>
+            <a:off x="10744200" y="384048"/>
+            <a:ext cx="1051560" cy="795528"/>
           </a:xfrm>
           <a:prstGeom prst="rect">
             <a:avLst/>
@@ -7794,89 +7940,27 @@
       </p:pic>
       <p:sp>
         <p:nvSpPr>
-          <p:cNvPr id="6" name="Text 3"/>
-          <p:cNvSpPr/>
-          <p:nvPr/>
-        </p:nvSpPr>
-        <p:spPr>
-          <a:xfrm>
-            <a:off x="1234440" y="1801368"/>
-            <a:ext cx="4800600" cy="1143000"/>
-          </a:xfrm>
-          <a:prstGeom prst="rect">
-            <a:avLst/>
-          </a:prstGeom>
-          <a:noFill/>
-          <a:ln/>
-        </p:spPr>
-        <p:txBody>
-          <a:bodyPr wrap="square" lIns="0" tIns="0" rIns="0" bIns="0" rtlCol="0" anchor="ctr"/>
-          <a:lstStyle/>
-          <a:p>
-            <a:pPr indent="0" marL="0">
-              <a:lnSpc>
-                <a:spcPct val="105000"/>
-              </a:lnSpc>
-              <a:buNone/>
-            </a:pPr>
-            <a:r>
-              <a:rPr lang="en-US" sz="1450" b="1" dirty="0">
-                <a:solidFill>
-                  <a:srgbClr val="1C2A24"/>
-                </a:solidFill>
-                <a:latin typeface="Calibri" pitchFamily="34" charset="0"/>
-                <a:ea typeface="Calibri" pitchFamily="34" charset="-122"/>
-                <a:cs typeface="Calibri" pitchFamily="34" charset="-120"/>
-              </a:rPr>
-              <a:t>for parcourt une collection</a:t>
-            </a:r>
-            <a:endParaRPr lang="en-US" sz="1450" dirty="0"/>
-          </a:p>
-          <a:p>
-            <a:pPr indent="0" marL="0">
-              <a:lnSpc>
-                <a:spcPct val="105000"/>
-              </a:lnSpc>
-              <a:buNone/>
-            </a:pPr>
-            <a:r>
-              <a:rPr lang="en-US" sz="1250" dirty="0">
-                <a:solidFill>
-                  <a:srgbClr val="5C6B63"/>
-                </a:solidFill>
-                <a:latin typeface="Calibri" pitchFamily="34" charset="0"/>
-                <a:ea typeface="Calibri" pitchFamily="34" charset="-122"/>
-                <a:cs typeface="Calibri" pitchFamily="34" charset="-120"/>
-              </a:rPr>
-              <a:t>Pas d’indice à gérer : for ca in chiffres.</a:t>
-            </a:r>
-            <a:endParaRPr lang="en-US" sz="1450" dirty="0"/>
-          </a:p>
-        </p:txBody>
-      </p:sp>
-      <p:sp>
-        <p:nvSpPr>
-          <p:cNvPr id="7" name="Shape 4"/>
-          <p:cNvSpPr/>
-          <p:nvPr/>
-        </p:nvSpPr>
-        <p:spPr>
-          <a:xfrm>
-            <a:off x="640080" y="3108960"/>
+          <p:cNvPr id="5" name="Shape 2"/>
+          <p:cNvSpPr/>
+          <p:nvPr/>
+        </p:nvSpPr>
+        <p:spPr>
+          <a:xfrm>
+            <a:off x="640080" y="1874520"/>
             <a:ext cx="411480" cy="411480"/>
           </a:xfrm>
           <a:prstGeom prst="ellipse">
             <a:avLst/>
           </a:prstGeom>
           <a:solidFill>
-            <a:srgbClr val="1E7A50"/>
+            <a:srgbClr val="2E9E4F"/>
           </a:solidFill>
           <a:ln/>
         </p:spPr>
       </p:sp>
       <p:pic>
         <p:nvPicPr>
-          <p:cNvPr id="8" name="Image 1" descr="icons/check.png">    </p:cNvPr>
+          <p:cNvPr id="6" name="Image 1" descr="icons/check.png">    </p:cNvPr>
           <p:cNvPicPr>
             <a:picLocks noChangeAspect="1"/>
           </p:cNvPicPr>
@@ -7890,7 +7974,7 @@
         </p:blipFill>
         <p:spPr>
           <a:xfrm>
-            <a:off x="747065" y="3215945"/>
+            <a:off x="747065" y="1981505"/>
             <a:ext cx="197510" cy="197510"/>
           </a:xfrm>
           <a:prstGeom prst="rect">
@@ -7900,13 +7984,13 @@
       </p:pic>
       <p:sp>
         <p:nvSpPr>
-          <p:cNvPr id="9" name="Text 5"/>
-          <p:cNvSpPr/>
-          <p:nvPr/>
-        </p:nvSpPr>
-        <p:spPr>
-          <a:xfrm>
-            <a:off x="1234440" y="3035808"/>
+          <p:cNvPr id="7" name="Text 3"/>
+          <p:cNvSpPr/>
+          <p:nvPr/>
+        </p:nvSpPr>
+        <p:spPr>
+          <a:xfrm>
+            <a:off x="1234440" y="1801368"/>
             <a:ext cx="4800600" cy="1143000"/>
           </a:xfrm>
           <a:prstGeom prst="rect">
@@ -7934,7 +8018,7 @@
                 <a:ea typeface="Calibri" pitchFamily="34" charset="-122"/>
                 <a:cs typeface="Calibri" pitchFamily="34" charset="-120"/>
               </a:rPr>
-              <a:t>while répète jusqu’à condition</a:t>
+              <a:t>for parcourt une collection</a:t>
             </a:r>
             <a:endParaRPr lang="en-US" sz="1450" dirty="0"/>
           </a:p>
@@ -7954,7 +8038,7 @@
                 <a:ea typeface="Calibri" pitchFamily="34" charset="-122"/>
                 <a:cs typeface="Calibri" pitchFamily="34" charset="-120"/>
               </a:rPr>
-              <a:t>Utile quand on ne connaît pas le nombre de tours.</a:t>
+              <a:t>Pas d’indice à gérer : for ca in chiffres.</a:t>
             </a:r>
             <a:endParaRPr lang="en-US" sz="1450" dirty="0"/>
           </a:p>
@@ -7962,27 +8046,27 @@
       </p:sp>
       <p:sp>
         <p:nvSpPr>
-          <p:cNvPr id="10" name="Shape 6"/>
-          <p:cNvSpPr/>
-          <p:nvPr/>
-        </p:nvSpPr>
-        <p:spPr>
-          <a:xfrm>
-            <a:off x="640080" y="4343400"/>
+          <p:cNvPr id="8" name="Shape 4"/>
+          <p:cNvSpPr/>
+          <p:nvPr/>
+        </p:nvSpPr>
+        <p:spPr>
+          <a:xfrm>
+            <a:off x="640080" y="3108960"/>
             <a:ext cx="411480" cy="411480"/>
           </a:xfrm>
           <a:prstGeom prst="ellipse">
             <a:avLst/>
           </a:prstGeom>
           <a:solidFill>
-            <a:srgbClr val="1E7A50"/>
+            <a:srgbClr val="2E9E4F"/>
           </a:solidFill>
           <a:ln/>
         </p:spPr>
       </p:sp>
       <p:pic>
         <p:nvPicPr>
-          <p:cNvPr id="11" name="Image 2" descr="icons/check.png">    </p:cNvPr>
+          <p:cNvPr id="9" name="Image 2" descr="icons/check.png">    </p:cNvPr>
           <p:cNvPicPr>
             <a:picLocks noChangeAspect="1"/>
           </p:cNvPicPr>
@@ -7996,7 +8080,7 @@
         </p:blipFill>
         <p:spPr>
           <a:xfrm>
-            <a:off x="747065" y="4450385"/>
+            <a:off x="747065" y="3215945"/>
             <a:ext cx="197510" cy="197510"/>
           </a:xfrm>
           <a:prstGeom prst="rect">
@@ -8006,13 +8090,13 @@
       </p:pic>
       <p:sp>
         <p:nvSpPr>
-          <p:cNvPr id="12" name="Text 7"/>
-          <p:cNvSpPr/>
-          <p:nvPr/>
-        </p:nvSpPr>
-        <p:spPr>
-          <a:xfrm>
-            <a:off x="1234440" y="4270248"/>
+          <p:cNvPr id="10" name="Text 5"/>
+          <p:cNvSpPr/>
+          <p:nvPr/>
+        </p:nvSpPr>
+        <p:spPr>
+          <a:xfrm>
+            <a:off x="1234440" y="3035808"/>
             <a:ext cx="4800600" cy="1143000"/>
           </a:xfrm>
           <a:prstGeom prst="rect">
@@ -8040,7 +8124,7 @@
                 <a:ea typeface="Calibri" pitchFamily="34" charset="-122"/>
                 <a:cs typeface="Calibri" pitchFamily="34" charset="-120"/>
               </a:rPr>
-              <a:t>La compréhension : filtrer + transformer</a:t>
+              <a:t>while répète jusqu’à condition</a:t>
             </a:r>
             <a:endParaRPr lang="en-US" sz="1450" dirty="0"/>
           </a:p>
@@ -8060,6 +8144,112 @@
                 <a:ea typeface="Calibri" pitchFamily="34" charset="-122"/>
                 <a:cs typeface="Calibri" pitchFamily="34" charset="-120"/>
               </a:rPr>
+              <a:t>Utile quand on ne connaît pas le nombre de tours.</a:t>
+            </a:r>
+            <a:endParaRPr lang="en-US" sz="1450" dirty="0"/>
+          </a:p>
+        </p:txBody>
+      </p:sp>
+      <p:sp>
+        <p:nvSpPr>
+          <p:cNvPr id="11" name="Shape 6"/>
+          <p:cNvSpPr/>
+          <p:nvPr/>
+        </p:nvSpPr>
+        <p:spPr>
+          <a:xfrm>
+            <a:off x="640080" y="4343400"/>
+            <a:ext cx="411480" cy="411480"/>
+          </a:xfrm>
+          <a:prstGeom prst="ellipse">
+            <a:avLst/>
+          </a:prstGeom>
+          <a:solidFill>
+            <a:srgbClr val="2E9E4F"/>
+          </a:solidFill>
+          <a:ln/>
+        </p:spPr>
+      </p:sp>
+      <p:pic>
+        <p:nvPicPr>
+          <p:cNvPr id="12" name="Image 3" descr="icons/check.png">    </p:cNvPr>
+          <p:cNvPicPr>
+            <a:picLocks noChangeAspect="1"/>
+          </p:cNvPicPr>
+          <p:nvPr/>
+        </p:nvPicPr>
+        <p:blipFill>
+          <a:blip r:embed="rId4"/>
+          <a:stretch>
+            <a:fillRect/>
+          </a:stretch>
+        </p:blipFill>
+        <p:spPr>
+          <a:xfrm>
+            <a:off x="747065" y="4450385"/>
+            <a:ext cx="197510" cy="197510"/>
+          </a:xfrm>
+          <a:prstGeom prst="rect">
+            <a:avLst/>
+          </a:prstGeom>
+        </p:spPr>
+      </p:pic>
+      <p:sp>
+        <p:nvSpPr>
+          <p:cNvPr id="13" name="Text 7"/>
+          <p:cNvSpPr/>
+          <p:nvPr/>
+        </p:nvSpPr>
+        <p:spPr>
+          <a:xfrm>
+            <a:off x="1234440" y="4270248"/>
+            <a:ext cx="4800600" cy="1143000"/>
+          </a:xfrm>
+          <a:prstGeom prst="rect">
+            <a:avLst/>
+          </a:prstGeom>
+          <a:noFill/>
+          <a:ln/>
+        </p:spPr>
+        <p:txBody>
+          <a:bodyPr wrap="square" lIns="0" tIns="0" rIns="0" bIns="0" rtlCol="0" anchor="ctr"/>
+          <a:lstStyle/>
+          <a:p>
+            <a:pPr indent="0" marL="0">
+              <a:lnSpc>
+                <a:spcPct val="105000"/>
+              </a:lnSpc>
+              <a:buNone/>
+            </a:pPr>
+            <a:r>
+              <a:rPr lang="en-US" sz="1450" b="1" dirty="0">
+                <a:solidFill>
+                  <a:srgbClr val="1C2A24"/>
+                </a:solidFill>
+                <a:latin typeface="Calibri" pitchFamily="34" charset="0"/>
+                <a:ea typeface="Calibri" pitchFamily="34" charset="-122"/>
+                <a:cs typeface="Calibri" pitchFamily="34" charset="-120"/>
+              </a:rPr>
+              <a:t>La compréhension : filtrer + transformer</a:t>
+            </a:r>
+            <a:endParaRPr lang="en-US" sz="1450" dirty="0"/>
+          </a:p>
+          <a:p>
+            <a:pPr indent="0" marL="0">
+              <a:lnSpc>
+                <a:spcPct val="105000"/>
+              </a:lnSpc>
+              <a:buNone/>
+            </a:pPr>
+            <a:r>
+              <a:rPr lang="en-US" sz="1250" dirty="0">
+                <a:solidFill>
+                  <a:srgbClr val="5C6B63"/>
+                </a:solidFill>
+                <a:latin typeface="Calibri" pitchFamily="34" charset="0"/>
+                <a:ea typeface="Calibri" pitchFamily="34" charset="-122"/>
+                <a:cs typeface="Calibri" pitchFamily="34" charset="-120"/>
+              </a:rPr>
               <a:t>Une ligne remplace quatre — à consommer avec lisibilité.</a:t>
             </a:r>
             <a:endParaRPr lang="en-US" sz="1450" dirty="0"/>
@@ -8068,7 +8258,7 @@
       </p:sp>
       <p:sp>
         <p:nvSpPr>
-          <p:cNvPr id="13" name="Shape 8"/>
+          <p:cNvPr id="14" name="Shape 8"/>
           <p:cNvSpPr/>
           <p:nvPr/>
         </p:nvSpPr>
@@ -8083,14 +8273,14 @@
             </a:avLst>
           </a:prstGeom>
           <a:solidFill>
-            <a:srgbClr val="10241B"/>
+            <a:srgbClr val="0F2418"/>
           </a:solidFill>
           <a:ln/>
         </p:spPr>
       </p:sp>
       <p:sp>
         <p:nvSpPr>
-          <p:cNvPr id="14" name="Shape 9"/>
+          <p:cNvPr id="15" name="Shape 9"/>
           <p:cNvSpPr/>
           <p:nvPr/>
         </p:nvSpPr>
@@ -8110,7 +8300,7 @@
       </p:sp>
       <p:sp>
         <p:nvSpPr>
-          <p:cNvPr id="15" name="Shape 10"/>
+          <p:cNvPr id="16" name="Shape 10"/>
           <p:cNvSpPr/>
           <p:nvPr/>
         </p:nvSpPr>
@@ -8123,14 +8313,14 @@
             <a:avLst/>
           </a:prstGeom>
           <a:solidFill>
-            <a:srgbClr val="C9A227"/>
+            <a:srgbClr val="C79100"/>
           </a:solidFill>
           <a:ln/>
         </p:spPr>
       </p:sp>
       <p:sp>
         <p:nvSpPr>
-          <p:cNvPr id="16" name="Shape 11"/>
+          <p:cNvPr id="17" name="Shape 11"/>
           <p:cNvSpPr/>
           <p:nvPr/>
         </p:nvSpPr>
@@ -8150,7 +8340,7 @@
       </p:sp>
       <p:sp>
         <p:nvSpPr>
-          <p:cNvPr id="17" name="Text 12"/>
+          <p:cNvPr id="18" name="Text 12"/>
           <p:cNvSpPr/>
           <p:nvPr/>
         </p:nvSpPr>
@@ -8189,7 +8379,7 @@
       </p:sp>
       <p:sp>
         <p:nvSpPr>
-          <p:cNvPr id="18" name="Text 13"/>
+          <p:cNvPr id="19" name="Text 13"/>
           <p:cNvSpPr/>
           <p:nvPr/>
         </p:nvSpPr>
@@ -8895,7 +9085,7 @@
         <p:spPr>
           <a:xfrm>
             <a:off x="548640" y="384048"/>
-            <a:ext cx="10972800" cy="320040"/>
+            <a:ext cx="9601200" cy="320040"/>
           </a:xfrm>
           <a:prstGeom prst="rect">
             <a:avLst/>
@@ -8913,7 +9103,7 @@
             <a:r>
               <a:rPr lang="en-US" sz="1300" b="1" spc="200" kern="0" dirty="0">
                 <a:solidFill>
-                  <a:srgbClr val="C9A227"/>
+                  <a:srgbClr val="C79100"/>
                 </a:solidFill>
                 <a:latin typeface="Calibri" pitchFamily="34" charset="0"/>
                 <a:ea typeface="Calibri" pitchFamily="34" charset="-122"/>
@@ -8934,7 +9124,7 @@
         <p:spPr>
           <a:xfrm>
             <a:off x="548640" y="658368"/>
-            <a:ext cx="11064240" cy="731520"/>
+            <a:ext cx="9966960" cy="731520"/>
           </a:xfrm>
           <a:prstGeom prst="rect">
             <a:avLst/>
@@ -8952,7 +9142,7 @@
             <a:r>
               <a:rPr lang="en-US" sz="3400" b="1" dirty="0">
                 <a:solidFill>
-                  <a:srgbClr val="14563C"/>
+                  <a:srgbClr val="0E7A3D"/>
                 </a:solidFill>
                 <a:latin typeface="Cambria" pitchFamily="34" charset="0"/>
                 <a:ea typeface="Cambria" pitchFamily="34" charset="-122"/>
@@ -8964,611 +9154,9 @@
           </a:p>
         </p:txBody>
       </p:sp>
-      <p:sp>
-        <p:nvSpPr>
-          <p:cNvPr id="4" name="Shape 2"/>
-          <p:cNvSpPr/>
-          <p:nvPr/>
-        </p:nvSpPr>
-        <p:spPr>
-          <a:xfrm>
-            <a:off x="640080" y="1783080"/>
-            <a:ext cx="457200" cy="457200"/>
-          </a:xfrm>
-          <a:prstGeom prst="ellipse">
-            <a:avLst/>
-          </a:prstGeom>
-          <a:solidFill>
-            <a:srgbClr val="14563C"/>
-          </a:solidFill>
-          <a:ln/>
-        </p:spPr>
-      </p:sp>
-      <p:sp>
-        <p:nvSpPr>
-          <p:cNvPr id="5" name="Text 3"/>
-          <p:cNvSpPr/>
-          <p:nvPr/>
-        </p:nvSpPr>
-        <p:spPr>
-          <a:xfrm>
-            <a:off x="640080" y="1783080"/>
-            <a:ext cx="457200" cy="457200"/>
-          </a:xfrm>
-          <a:prstGeom prst="rect">
-            <a:avLst/>
-          </a:prstGeom>
-          <a:noFill/>
-          <a:ln/>
-        </p:spPr>
-        <p:txBody>
-          <a:bodyPr wrap="square" lIns="0" tIns="0" rIns="0" bIns="0" rtlCol="0" anchor="ctr"/>
-          <a:lstStyle/>
-          <a:p>
-            <a:pPr algn="ctr" indent="0" marL="0">
-              <a:buNone/>
-            </a:pPr>
-            <a:r>
-              <a:rPr lang="en-US" sz="1400" b="1" dirty="0">
-                <a:solidFill>
-                  <a:srgbClr val="FFFFFF"/>
-                </a:solidFill>
-                <a:latin typeface="Calibri" pitchFamily="34" charset="0"/>
-                <a:ea typeface="Calibri" pitchFamily="34" charset="-122"/>
-                <a:cs typeface="Calibri" pitchFamily="34" charset="-120"/>
-              </a:rPr>
-              <a:t>1</a:t>
-            </a:r>
-            <a:endParaRPr lang="en-US" sz="1400" dirty="0"/>
-          </a:p>
-        </p:txBody>
-      </p:sp>
-      <p:sp>
-        <p:nvSpPr>
-          <p:cNvPr id="6" name="Text 4"/>
-          <p:cNvSpPr/>
-          <p:nvPr/>
-        </p:nvSpPr>
-        <p:spPr>
-          <a:xfrm>
-            <a:off x="1234440" y="1764792"/>
-            <a:ext cx="6309360" cy="548640"/>
-          </a:xfrm>
-          <a:prstGeom prst="rect">
-            <a:avLst/>
-          </a:prstGeom>
-          <a:noFill/>
-          <a:ln/>
-        </p:spPr>
-        <p:txBody>
-          <a:bodyPr wrap="square" lIns="0" tIns="0" rIns="0" bIns="0" rtlCol="0" anchor="ctr"/>
-          <a:lstStyle/>
-          <a:p>
-            <a:pPr indent="0" marL="0">
-              <a:buNone/>
-            </a:pPr>
-            <a:r>
-              <a:rPr lang="en-US" sz="1400" b="1" dirty="0">
-                <a:solidFill>
-                  <a:srgbClr val="1C2A24"/>
-                </a:solidFill>
-                <a:latin typeface="Calibri" pitchFamily="34" charset="0"/>
-                <a:ea typeface="Calibri" pitchFamily="34" charset="-122"/>
-                <a:cs typeface="Calibri" pitchFamily="34" charset="-120"/>
-              </a:rPr>
-              <a:t>Installer et vérifier</a:t>
-            </a:r>
-            <a:pPr indent="0" marL="0">
-              <a:buNone/>
-            </a:pPr>
-            <a:r>
-              <a:rPr lang="en-US" sz="1400" dirty="0">
-                <a:solidFill>
-                  <a:srgbClr val="5C6B63"/>
-                </a:solidFill>
-                <a:latin typeface="Calibri" pitchFamily="34" charset="0"/>
-                <a:ea typeface="Calibri" pitchFamily="34" charset="-122"/>
-                <a:cs typeface="Calibri" pitchFamily="34" charset="-120"/>
-              </a:rPr>
-              <a:t>  —  INSTALLATION.md, puis uv run python main.py</a:t>
-            </a:r>
-            <a:endParaRPr lang="en-US" sz="1400" dirty="0"/>
-          </a:p>
-        </p:txBody>
-      </p:sp>
-      <p:sp>
-        <p:nvSpPr>
-          <p:cNvPr id="7" name="Shape 5"/>
-          <p:cNvSpPr/>
-          <p:nvPr/>
-        </p:nvSpPr>
-        <p:spPr>
-          <a:xfrm>
-            <a:off x="640080" y="2532888"/>
-            <a:ext cx="457200" cy="457200"/>
-          </a:xfrm>
-          <a:prstGeom prst="ellipse">
-            <a:avLst/>
-          </a:prstGeom>
-          <a:solidFill>
-            <a:srgbClr val="14563C"/>
-          </a:solidFill>
-          <a:ln/>
-        </p:spPr>
-      </p:sp>
-      <p:sp>
-        <p:nvSpPr>
-          <p:cNvPr id="8" name="Text 6"/>
-          <p:cNvSpPr/>
-          <p:nvPr/>
-        </p:nvSpPr>
-        <p:spPr>
-          <a:xfrm>
-            <a:off x="640080" y="2532888"/>
-            <a:ext cx="457200" cy="457200"/>
-          </a:xfrm>
-          <a:prstGeom prst="rect">
-            <a:avLst/>
-          </a:prstGeom>
-          <a:noFill/>
-          <a:ln/>
-        </p:spPr>
-        <p:txBody>
-          <a:bodyPr wrap="square" lIns="0" tIns="0" rIns="0" bIns="0" rtlCol="0" anchor="ctr"/>
-          <a:lstStyle/>
-          <a:p>
-            <a:pPr algn="ctr" indent="0" marL="0">
-              <a:buNone/>
-            </a:pPr>
-            <a:r>
-              <a:rPr lang="en-US" sz="1400" b="1" dirty="0">
-                <a:solidFill>
-                  <a:srgbClr val="FFFFFF"/>
-                </a:solidFill>
-                <a:latin typeface="Calibri" pitchFamily="34" charset="0"/>
-                <a:ea typeface="Calibri" pitchFamily="34" charset="-122"/>
-                <a:cs typeface="Calibri" pitchFamily="34" charset="-120"/>
-              </a:rPr>
-              <a:t>2</a:t>
-            </a:r>
-            <a:endParaRPr lang="en-US" sz="1400" dirty="0"/>
-          </a:p>
-        </p:txBody>
-      </p:sp>
-      <p:sp>
-        <p:nvSpPr>
-          <p:cNvPr id="9" name="Text 7"/>
-          <p:cNvSpPr/>
-          <p:nvPr/>
-        </p:nvSpPr>
-        <p:spPr>
-          <a:xfrm>
-            <a:off x="1234440" y="2514600"/>
-            <a:ext cx="6309360" cy="548640"/>
-          </a:xfrm>
-          <a:prstGeom prst="rect">
-            <a:avLst/>
-          </a:prstGeom>
-          <a:noFill/>
-          <a:ln/>
-        </p:spPr>
-        <p:txBody>
-          <a:bodyPr wrap="square" lIns="0" tIns="0" rIns="0" bIns="0" rtlCol="0" anchor="ctr"/>
-          <a:lstStyle/>
-          <a:p>
-            <a:pPr indent="0" marL="0">
-              <a:buNone/>
-            </a:pPr>
-            <a:r>
-              <a:rPr lang="en-US" sz="1400" b="1" dirty="0">
-                <a:solidFill>
-                  <a:srgbClr val="1C2A24"/>
-                </a:solidFill>
-                <a:latin typeface="Calibri" pitchFamily="34" charset="0"/>
-                <a:ea typeface="Calibri" pitchFamily="34" charset="-122"/>
-                <a:cs typeface="Calibri" pitchFamily="34" charset="-120"/>
-              </a:rPr>
-              <a:t>Engendrer les données</a:t>
-            </a:r>
-            <a:pPr indent="0" marL="0">
-              <a:buNone/>
-            </a:pPr>
-            <a:r>
-              <a:rPr lang="en-US" sz="1400" dirty="0">
-                <a:solidFill>
-                  <a:srgbClr val="5C6B63"/>
-                </a:solidFill>
-                <a:latin typeface="Calibri" pitchFamily="34" charset="0"/>
-                <a:ea typeface="Calibri" pitchFamily="34" charset="-122"/>
-                <a:cs typeface="Calibri" pitchFamily="34" charset="-120"/>
-              </a:rPr>
-              <a:t>  —  generate_data.py --auto — regardez les CSV produits</a:t>
-            </a:r>
-            <a:endParaRPr lang="en-US" sz="1400" dirty="0"/>
-          </a:p>
-        </p:txBody>
-      </p:sp>
-      <p:sp>
-        <p:nvSpPr>
-          <p:cNvPr id="10" name="Shape 8"/>
-          <p:cNvSpPr/>
-          <p:nvPr/>
-        </p:nvSpPr>
-        <p:spPr>
-          <a:xfrm>
-            <a:off x="640080" y="3282696"/>
-            <a:ext cx="457200" cy="457200"/>
-          </a:xfrm>
-          <a:prstGeom prst="ellipse">
-            <a:avLst/>
-          </a:prstGeom>
-          <a:solidFill>
-            <a:srgbClr val="14563C"/>
-          </a:solidFill>
-          <a:ln/>
-        </p:spPr>
-      </p:sp>
-      <p:sp>
-        <p:nvSpPr>
-          <p:cNvPr id="11" name="Text 9"/>
-          <p:cNvSpPr/>
-          <p:nvPr/>
-        </p:nvSpPr>
-        <p:spPr>
-          <a:xfrm>
-            <a:off x="640080" y="3282696"/>
-            <a:ext cx="457200" cy="457200"/>
-          </a:xfrm>
-          <a:prstGeom prst="rect">
-            <a:avLst/>
-          </a:prstGeom>
-          <a:noFill/>
-          <a:ln/>
-        </p:spPr>
-        <p:txBody>
-          <a:bodyPr wrap="square" lIns="0" tIns="0" rIns="0" bIns="0" rtlCol="0" anchor="ctr"/>
-          <a:lstStyle/>
-          <a:p>
-            <a:pPr algn="ctr" indent="0" marL="0">
-              <a:buNone/>
-            </a:pPr>
-            <a:r>
-              <a:rPr lang="en-US" sz="1400" b="1" dirty="0">
-                <a:solidFill>
-                  <a:srgbClr val="FFFFFF"/>
-                </a:solidFill>
-                <a:latin typeface="Calibri" pitchFamily="34" charset="0"/>
-                <a:ea typeface="Calibri" pitchFamily="34" charset="-122"/>
-                <a:cs typeface="Calibri" pitchFamily="34" charset="-120"/>
-              </a:rPr>
-              <a:t>3</a:t>
-            </a:r>
-            <a:endParaRPr lang="en-US" sz="1400" dirty="0"/>
-          </a:p>
-        </p:txBody>
-      </p:sp>
-      <p:sp>
-        <p:nvSpPr>
-          <p:cNvPr id="12" name="Text 10"/>
-          <p:cNvSpPr/>
-          <p:nvPr/>
-        </p:nvSpPr>
-        <p:spPr>
-          <a:xfrm>
-            <a:off x="1234440" y="3264408"/>
-            <a:ext cx="6309360" cy="548640"/>
-          </a:xfrm>
-          <a:prstGeom prst="rect">
-            <a:avLst/>
-          </a:prstGeom>
-          <a:noFill/>
-          <a:ln/>
-        </p:spPr>
-        <p:txBody>
-          <a:bodyPr wrap="square" lIns="0" tIns="0" rIns="0" bIns="0" rtlCol="0" anchor="ctr"/>
-          <a:lstStyle/>
-          <a:p>
-            <a:pPr indent="0" marL="0">
-              <a:buNone/>
-            </a:pPr>
-            <a:r>
-              <a:rPr lang="en-US" sz="1400" b="1" dirty="0">
-                <a:solidFill>
-                  <a:srgbClr val="1C2A24"/>
-                </a:solidFill>
-                <a:latin typeface="Calibri" pitchFamily="34" charset="0"/>
-                <a:ea typeface="Calibri" pitchFamily="34" charset="-122"/>
-                <a:cs typeface="Calibri" pitchFamily="34" charset="-120"/>
-              </a:rPr>
-              <a:t>tp_premiers_pas.py</a:t>
-            </a:r>
-            <a:pPr indent="0" marL="0">
-              <a:buNone/>
-            </a:pPr>
-            <a:r>
-              <a:rPr lang="en-US" sz="1400" dirty="0">
-                <a:solidFill>
-                  <a:srgbClr val="5C6B63"/>
-                </a:solidFill>
-                <a:latin typeface="Calibri" pitchFamily="34" charset="0"/>
-                <a:ea typeface="Calibri" pitchFamily="34" charset="-122"/>
-                <a:cs typeface="Calibri" pitchFamily="34" charset="-120"/>
-              </a:rPr>
-              <a:t>  —  la fiche contribuable, proprement formatée</a:t>
-            </a:r>
-            <a:endParaRPr lang="en-US" sz="1400" dirty="0"/>
-          </a:p>
-        </p:txBody>
-      </p:sp>
-      <p:sp>
-        <p:nvSpPr>
-          <p:cNvPr id="13" name="Shape 11"/>
-          <p:cNvSpPr/>
-          <p:nvPr/>
-        </p:nvSpPr>
-        <p:spPr>
-          <a:xfrm>
-            <a:off x="640080" y="4032504"/>
-            <a:ext cx="457200" cy="457200"/>
-          </a:xfrm>
-          <a:prstGeom prst="ellipse">
-            <a:avLst/>
-          </a:prstGeom>
-          <a:solidFill>
-            <a:srgbClr val="14563C"/>
-          </a:solidFill>
-          <a:ln/>
-        </p:spPr>
-      </p:sp>
-      <p:sp>
-        <p:nvSpPr>
-          <p:cNvPr id="14" name="Text 12"/>
-          <p:cNvSpPr/>
-          <p:nvPr/>
-        </p:nvSpPr>
-        <p:spPr>
-          <a:xfrm>
-            <a:off x="640080" y="4032504"/>
-            <a:ext cx="457200" cy="457200"/>
-          </a:xfrm>
-          <a:prstGeom prst="rect">
-            <a:avLst/>
-          </a:prstGeom>
-          <a:noFill/>
-          <a:ln/>
-        </p:spPr>
-        <p:txBody>
-          <a:bodyPr wrap="square" lIns="0" tIns="0" rIns="0" bIns="0" rtlCol="0" anchor="ctr"/>
-          <a:lstStyle/>
-          <a:p>
-            <a:pPr algn="ctr" indent="0" marL="0">
-              <a:buNone/>
-            </a:pPr>
-            <a:r>
-              <a:rPr lang="en-US" sz="1400" b="1" dirty="0">
-                <a:solidFill>
-                  <a:srgbClr val="FFFFFF"/>
-                </a:solidFill>
-                <a:latin typeface="Calibri" pitchFamily="34" charset="0"/>
-                <a:ea typeface="Calibri" pitchFamily="34" charset="-122"/>
-                <a:cs typeface="Calibri" pitchFamily="34" charset="-120"/>
-              </a:rPr>
-              <a:t>4</a:t>
-            </a:r>
-            <a:endParaRPr lang="en-US" sz="1400" dirty="0"/>
-          </a:p>
-        </p:txBody>
-      </p:sp>
-      <p:sp>
-        <p:nvSpPr>
-          <p:cNvPr id="15" name="Text 13"/>
-          <p:cNvSpPr/>
-          <p:nvPr/>
-        </p:nvSpPr>
-        <p:spPr>
-          <a:xfrm>
-            <a:off x="1234440" y="4014216"/>
-            <a:ext cx="6309360" cy="548640"/>
-          </a:xfrm>
-          <a:prstGeom prst="rect">
-            <a:avLst/>
-          </a:prstGeom>
-          <a:noFill/>
-          <a:ln/>
-        </p:spPr>
-        <p:txBody>
-          <a:bodyPr wrap="square" lIns="0" tIns="0" rIns="0" bIns="0" rtlCol="0" anchor="ctr"/>
-          <a:lstStyle/>
-          <a:p>
-            <a:pPr indent="0" marL="0">
-              <a:buNone/>
-            </a:pPr>
-            <a:r>
-              <a:rPr lang="en-US" sz="1400" b="1" dirty="0">
-                <a:solidFill>
-                  <a:srgbClr val="1C2A24"/>
-                </a:solidFill>
-                <a:latin typeface="Calibri" pitchFamily="34" charset="0"/>
-                <a:ea typeface="Calibri" pitchFamily="34" charset="-122"/>
-                <a:cs typeface="Calibri" pitchFamily="34" charset="-120"/>
-              </a:rPr>
-              <a:t>tp_bareme.py</a:t>
-            </a:r>
-            <a:pPr indent="0" marL="0">
-              <a:buNone/>
-            </a:pPr>
-            <a:r>
-              <a:rPr lang="en-US" sz="1400" dirty="0">
-                <a:solidFill>
-                  <a:srgbClr val="5C6B63"/>
-                </a:solidFill>
-                <a:latin typeface="Calibri" pitchFamily="34" charset="0"/>
-                <a:ea typeface="Calibri" pitchFamily="34" charset="-122"/>
-                <a:cs typeface="Calibri" pitchFamily="34" charset="-120"/>
-              </a:rPr>
-              <a:t>  —  le régime d’imposition + comptage des CA invalides</a:t>
-            </a:r>
-            <a:endParaRPr lang="en-US" sz="1400" dirty="0"/>
-          </a:p>
-        </p:txBody>
-      </p:sp>
-      <p:sp>
-        <p:nvSpPr>
-          <p:cNvPr id="16" name="Shape 14"/>
-          <p:cNvSpPr/>
-          <p:nvPr/>
-        </p:nvSpPr>
-        <p:spPr>
-          <a:xfrm>
-            <a:off x="640080" y="4782312"/>
-            <a:ext cx="457200" cy="457200"/>
-          </a:xfrm>
-          <a:prstGeom prst="ellipse">
-            <a:avLst/>
-          </a:prstGeom>
-          <a:solidFill>
-            <a:srgbClr val="14563C"/>
-          </a:solidFill>
-          <a:ln/>
-        </p:spPr>
-      </p:sp>
-      <p:sp>
-        <p:nvSpPr>
-          <p:cNvPr id="17" name="Text 15"/>
-          <p:cNvSpPr/>
-          <p:nvPr/>
-        </p:nvSpPr>
-        <p:spPr>
-          <a:xfrm>
-            <a:off x="640080" y="4782312"/>
-            <a:ext cx="457200" cy="457200"/>
-          </a:xfrm>
-          <a:prstGeom prst="rect">
-            <a:avLst/>
-          </a:prstGeom>
-          <a:noFill/>
-          <a:ln/>
-        </p:spPr>
-        <p:txBody>
-          <a:bodyPr wrap="square" lIns="0" tIns="0" rIns="0" bIns="0" rtlCol="0" anchor="ctr"/>
-          <a:lstStyle/>
-          <a:p>
-            <a:pPr algn="ctr" indent="0" marL="0">
-              <a:buNone/>
-            </a:pPr>
-            <a:r>
-              <a:rPr lang="en-US" sz="1400" b="1" dirty="0">
-                <a:solidFill>
-                  <a:srgbClr val="FFFFFF"/>
-                </a:solidFill>
-                <a:latin typeface="Calibri" pitchFamily="34" charset="0"/>
-                <a:ea typeface="Calibri" pitchFamily="34" charset="-122"/>
-                <a:cs typeface="Calibri" pitchFamily="34" charset="-120"/>
-              </a:rPr>
-              <a:t>5</a:t>
-            </a:r>
-            <a:endParaRPr lang="en-US" sz="1400" dirty="0"/>
-          </a:p>
-        </p:txBody>
-      </p:sp>
-      <p:sp>
-        <p:nvSpPr>
-          <p:cNvPr id="18" name="Text 16"/>
-          <p:cNvSpPr/>
-          <p:nvPr/>
-        </p:nvSpPr>
-        <p:spPr>
-          <a:xfrm>
-            <a:off x="1234440" y="4764024"/>
-            <a:ext cx="6309360" cy="548640"/>
-          </a:xfrm>
-          <a:prstGeom prst="rect">
-            <a:avLst/>
-          </a:prstGeom>
-          <a:noFill/>
-          <a:ln/>
-        </p:spPr>
-        <p:txBody>
-          <a:bodyPr wrap="square" lIns="0" tIns="0" rIns="0" bIns="0" rtlCol="0" anchor="ctr"/>
-          <a:lstStyle/>
-          <a:p>
-            <a:pPr indent="0" marL="0">
-              <a:buNone/>
-            </a:pPr>
-            <a:r>
-              <a:rPr lang="en-US" sz="1400" b="1" dirty="0">
-                <a:solidFill>
-                  <a:srgbClr val="1C2A24"/>
-                </a:solidFill>
-                <a:latin typeface="Calibri" pitchFamily="34" charset="0"/>
-                <a:ea typeface="Calibri" pitchFamily="34" charset="-122"/>
-                <a:cs typeface="Calibri" pitchFamily="34" charset="-120"/>
-              </a:rPr>
-              <a:t>Pour les rapides</a:t>
-            </a:r>
-            <a:pPr indent="0" marL="0">
-              <a:buNone/>
-            </a:pPr>
-            <a:r>
-              <a:rPr lang="en-US" sz="1400" dirty="0">
-                <a:solidFill>
-                  <a:srgbClr val="5C6B63"/>
-                </a:solidFill>
-                <a:latin typeface="Calibri" pitchFamily="34" charset="0"/>
-                <a:ea typeface="Calibri" pitchFamily="34" charset="-122"/>
-                <a:cs typeface="Calibri" pitchFamily="34" charset="-120"/>
-              </a:rPr>
-              <a:t>  —  la boucle while « en combien d’années au réel normal ? »</a:t>
-            </a:r>
-            <a:endParaRPr lang="en-US" sz="1400" dirty="0"/>
-          </a:p>
-        </p:txBody>
-      </p:sp>
-      <p:sp>
-        <p:nvSpPr>
-          <p:cNvPr id="19" name="Shape 17"/>
-          <p:cNvSpPr/>
-          <p:nvPr/>
-        </p:nvSpPr>
-        <p:spPr>
-          <a:xfrm>
-            <a:off x="7863840" y="1737360"/>
-            <a:ext cx="3749040" cy="3017520"/>
-          </a:xfrm>
-          <a:prstGeom prst="roundRect">
-            <a:avLst>
-              <a:gd name="adj" fmla="val 3030"/>
-            </a:avLst>
-          </a:prstGeom>
-          <a:solidFill>
-            <a:srgbClr val="EEF4F0"/>
-          </a:solidFill>
-          <a:ln/>
-        </p:spPr>
-      </p:sp>
-      <p:sp>
-        <p:nvSpPr>
-          <p:cNvPr id="20" name="Shape 18"/>
-          <p:cNvSpPr/>
-          <p:nvPr/>
-        </p:nvSpPr>
-        <p:spPr>
-          <a:xfrm>
-            <a:off x="8138160" y="1965960"/>
-            <a:ext cx="457200" cy="457200"/>
-          </a:xfrm>
-          <a:prstGeom prst="ellipse">
-            <a:avLst/>
-          </a:prstGeom>
-          <a:solidFill>
-            <a:srgbClr val="C9A227"/>
-          </a:solidFill>
-          <a:ln/>
-        </p:spPr>
-      </p:sp>
       <p:pic>
         <p:nvPicPr>
-          <p:cNvPr id="21" name="Image 0" descr="icons/folder.png">    </p:cNvPr>
+          <p:cNvPr id="4" name="Image 0" descr="logo-dgi.png">    </p:cNvPr>
           <p:cNvPicPr>
             <a:picLocks noChangeAspect="1"/>
           </p:cNvPicPr>
@@ -9582,8 +9170,8 @@
         </p:blipFill>
         <p:spPr>
           <a:xfrm>
-            <a:off x="8257032" y="2084832"/>
-            <a:ext cx="219456" cy="219456"/>
+            <a:off x="10744200" y="384048"/>
+            <a:ext cx="1051560" cy="795528"/>
           </a:xfrm>
           <a:prstGeom prst="rect">
             <a:avLst/>
@@ -9592,14 +9180,34 @@
       </p:pic>
       <p:sp>
         <p:nvSpPr>
-          <p:cNvPr id="22" name="Text 19"/>
-          <p:cNvSpPr/>
-          <p:nvPr/>
-        </p:nvSpPr>
-        <p:spPr>
-          <a:xfrm>
-            <a:off x="8732520" y="2011680"/>
-            <a:ext cx="2743200" cy="365760"/>
+          <p:cNvPr id="5" name="Shape 2"/>
+          <p:cNvSpPr/>
+          <p:nvPr/>
+        </p:nvSpPr>
+        <p:spPr>
+          <a:xfrm>
+            <a:off x="640080" y="1783080"/>
+            <a:ext cx="457200" cy="457200"/>
+          </a:xfrm>
+          <a:prstGeom prst="ellipse">
+            <a:avLst/>
+          </a:prstGeom>
+          <a:solidFill>
+            <a:srgbClr val="0E7A3D"/>
+          </a:solidFill>
+          <a:ln/>
+        </p:spPr>
+      </p:sp>
+      <p:sp>
+        <p:nvSpPr>
+          <p:cNvPr id="6" name="Text 3"/>
+          <p:cNvSpPr/>
+          <p:nvPr/>
+        </p:nvSpPr>
+        <p:spPr>
+          <a:xfrm>
+            <a:off x="640080" y="1783080"/>
+            <a:ext cx="457200" cy="457200"/>
           </a:xfrm>
           <a:prstGeom prst="rect">
             <a:avLst/>
@@ -9611,19 +9219,19 @@
           <a:bodyPr wrap="square" lIns="0" tIns="0" rIns="0" bIns="0" rtlCol="0" anchor="ctr"/>
           <a:lstStyle/>
           <a:p>
-            <a:pPr indent="0" marL="0">
+            <a:pPr algn="ctr" indent="0" marL="0">
               <a:buNone/>
             </a:pPr>
             <a:r>
               <a:rPr lang="en-US" sz="1400" b="1" dirty="0">
                 <a:solidFill>
-                  <a:srgbClr val="14563C"/>
+                  <a:srgbClr val="FFFFFF"/>
                 </a:solidFill>
                 <a:latin typeface="Calibri" pitchFamily="34" charset="0"/>
                 <a:ea typeface="Calibri" pitchFamily="34" charset="-122"/>
                 <a:cs typeface="Calibri" pitchFamily="34" charset="-120"/>
               </a:rPr>
-              <a:t>Fichiers du jour</a:t>
+              <a:t>1</a:t>
             </a:r>
             <a:endParaRPr lang="en-US" sz="1400" dirty="0"/>
           </a:p>
@@ -9631,14 +9239,14 @@
       </p:sp>
       <p:sp>
         <p:nvSpPr>
-          <p:cNvPr id="23" name="Text 20"/>
-          <p:cNvSpPr/>
-          <p:nvPr/>
-        </p:nvSpPr>
-        <p:spPr>
-          <a:xfrm>
-            <a:off x="8138160" y="2606040"/>
-            <a:ext cx="3291840" cy="2011680"/>
+          <p:cNvPr id="7" name="Text 4"/>
+          <p:cNvSpPr/>
+          <p:nvPr/>
+        </p:nvSpPr>
+        <p:spPr>
+          <a:xfrm>
+            <a:off x="1234440" y="1764792"/>
+            <a:ext cx="6309360" cy="548640"/>
           </a:xfrm>
           <a:prstGeom prst="rect">
             <a:avLst/>
@@ -9647,155 +9255,534 @@
           <a:ln/>
         </p:spPr>
         <p:txBody>
-          <a:bodyPr wrap="square" lIns="0" tIns="0" rIns="0" bIns="0" rtlCol="0" anchor="t"/>
-          <a:lstStyle/>
-          <a:p>
-            <a:pPr indent="0" marL="0">
-              <a:lnSpc>
-                <a:spcPct val="135000"/>
-              </a:lnSpc>
-              <a:buNone/>
-            </a:pPr>
-            <a:r>
-              <a:rPr lang="en-US" sz="1150" dirty="0">
+          <a:bodyPr wrap="square" lIns="0" tIns="0" rIns="0" bIns="0" rtlCol="0" anchor="ctr"/>
+          <a:lstStyle/>
+          <a:p>
+            <a:pPr indent="0" marL="0">
+              <a:buNone/>
+            </a:pPr>
+            <a:r>
+              <a:rPr lang="en-US" sz="1400" b="1" dirty="0">
                 <a:solidFill>
                   <a:srgbClr val="1C2A24"/>
                 </a:solidFill>
-                <a:latin typeface="Courier New" pitchFamily="34" charset="0"/>
-                <a:ea typeface="Courier New" pitchFamily="34" charset="-122"/>
-                <a:cs typeface="Courier New" pitchFamily="34" charset="-120"/>
-              </a:rPr>
-              <a:t>01-premiers-pas/</a:t>
-            </a:r>
-            <a:endParaRPr lang="en-US" sz="1150" dirty="0"/>
-          </a:p>
-          <a:p>
-            <a:pPr indent="0" marL="0">
-              <a:lnSpc>
-                <a:spcPct val="135000"/>
-              </a:lnSpc>
-              <a:buNone/>
-            </a:pPr>
-            <a:r>
-              <a:rPr lang="en-US" sz="1150" dirty="0">
+                <a:latin typeface="Calibri" pitchFamily="34" charset="0"/>
+                <a:ea typeface="Calibri" pitchFamily="34" charset="-122"/>
+                <a:cs typeface="Calibri" pitchFamily="34" charset="-120"/>
+              </a:rPr>
+              <a:t>Installer et vérifier</a:t>
+            </a:r>
+            <a:pPr indent="0" marL="0">
+              <a:buNone/>
+            </a:pPr>
+            <a:r>
+              <a:rPr lang="en-US" sz="1400" dirty="0">
+                <a:solidFill>
+                  <a:srgbClr val="5C6B63"/>
+                </a:solidFill>
+                <a:latin typeface="Calibri" pitchFamily="34" charset="0"/>
+                <a:ea typeface="Calibri" pitchFamily="34" charset="-122"/>
+                <a:cs typeface="Calibri" pitchFamily="34" charset="-120"/>
+              </a:rPr>
+              <a:t>  —  INSTALLATION.md, puis uv run python main.py</a:t>
+            </a:r>
+            <a:endParaRPr lang="en-US" sz="1400" dirty="0"/>
+          </a:p>
+        </p:txBody>
+      </p:sp>
+      <p:sp>
+        <p:nvSpPr>
+          <p:cNvPr id="8" name="Shape 5"/>
+          <p:cNvSpPr/>
+          <p:nvPr/>
+        </p:nvSpPr>
+        <p:spPr>
+          <a:xfrm>
+            <a:off x="640080" y="2532888"/>
+            <a:ext cx="457200" cy="457200"/>
+          </a:xfrm>
+          <a:prstGeom prst="ellipse">
+            <a:avLst/>
+          </a:prstGeom>
+          <a:solidFill>
+            <a:srgbClr val="0E7A3D"/>
+          </a:solidFill>
+          <a:ln/>
+        </p:spPr>
+      </p:sp>
+      <p:sp>
+        <p:nvSpPr>
+          <p:cNvPr id="9" name="Text 6"/>
+          <p:cNvSpPr/>
+          <p:nvPr/>
+        </p:nvSpPr>
+        <p:spPr>
+          <a:xfrm>
+            <a:off x="640080" y="2532888"/>
+            <a:ext cx="457200" cy="457200"/>
+          </a:xfrm>
+          <a:prstGeom prst="rect">
+            <a:avLst/>
+          </a:prstGeom>
+          <a:noFill/>
+          <a:ln/>
+        </p:spPr>
+        <p:txBody>
+          <a:bodyPr wrap="square" lIns="0" tIns="0" rIns="0" bIns="0" rtlCol="0" anchor="ctr"/>
+          <a:lstStyle/>
+          <a:p>
+            <a:pPr algn="ctr" indent="0" marL="0">
+              <a:buNone/>
+            </a:pPr>
+            <a:r>
+              <a:rPr lang="en-US" sz="1400" b="1" dirty="0">
+                <a:solidFill>
+                  <a:srgbClr val="FFFFFF"/>
+                </a:solidFill>
+                <a:latin typeface="Calibri" pitchFamily="34" charset="0"/>
+                <a:ea typeface="Calibri" pitchFamily="34" charset="-122"/>
+                <a:cs typeface="Calibri" pitchFamily="34" charset="-120"/>
+              </a:rPr>
+              <a:t>2</a:t>
+            </a:r>
+            <a:endParaRPr lang="en-US" sz="1400" dirty="0"/>
+          </a:p>
+        </p:txBody>
+      </p:sp>
+      <p:sp>
+        <p:nvSpPr>
+          <p:cNvPr id="10" name="Text 7"/>
+          <p:cNvSpPr/>
+          <p:nvPr/>
+        </p:nvSpPr>
+        <p:spPr>
+          <a:xfrm>
+            <a:off x="1234440" y="2514600"/>
+            <a:ext cx="6309360" cy="548640"/>
+          </a:xfrm>
+          <a:prstGeom prst="rect">
+            <a:avLst/>
+          </a:prstGeom>
+          <a:noFill/>
+          <a:ln/>
+        </p:spPr>
+        <p:txBody>
+          <a:bodyPr wrap="square" lIns="0" tIns="0" rIns="0" bIns="0" rtlCol="0" anchor="ctr"/>
+          <a:lstStyle/>
+          <a:p>
+            <a:pPr indent="0" marL="0">
+              <a:buNone/>
+            </a:pPr>
+            <a:r>
+              <a:rPr lang="en-US" sz="1400" b="1" dirty="0">
                 <a:solidFill>
                   <a:srgbClr val="1C2A24"/>
                 </a:solidFill>
-                <a:latin typeface="Courier New" pitchFamily="34" charset="0"/>
-                <a:ea typeface="Courier New" pitchFamily="34" charset="-122"/>
-                <a:cs typeface="Courier New" pitchFamily="34" charset="-120"/>
-              </a:rPr>
-              <a:t>  tp_premiers_pas.py</a:t>
-            </a:r>
-            <a:endParaRPr lang="en-US" sz="1150" dirty="0"/>
-          </a:p>
-          <a:p>
-            <a:pPr indent="0" marL="0">
-              <a:lnSpc>
-                <a:spcPct val="135000"/>
-              </a:lnSpc>
-              <a:buNone/>
-            </a:pPr>
-            <a:r>
-              <a:rPr lang="en-US" sz="1150" dirty="0">
+                <a:latin typeface="Calibri" pitchFamily="34" charset="0"/>
+                <a:ea typeface="Calibri" pitchFamily="34" charset="-122"/>
+                <a:cs typeface="Calibri" pitchFamily="34" charset="-120"/>
+              </a:rPr>
+              <a:t>Engendrer les données</a:t>
+            </a:r>
+            <a:pPr indent="0" marL="0">
+              <a:buNone/>
+            </a:pPr>
+            <a:r>
+              <a:rPr lang="en-US" sz="1400" dirty="0">
+                <a:solidFill>
+                  <a:srgbClr val="5C6B63"/>
+                </a:solidFill>
+                <a:latin typeface="Calibri" pitchFamily="34" charset="0"/>
+                <a:ea typeface="Calibri" pitchFamily="34" charset="-122"/>
+                <a:cs typeface="Calibri" pitchFamily="34" charset="-120"/>
+              </a:rPr>
+              <a:t>  —  generate_data.py --auto — regardez les CSV produits</a:t>
+            </a:r>
+            <a:endParaRPr lang="en-US" sz="1400" dirty="0"/>
+          </a:p>
+        </p:txBody>
+      </p:sp>
+      <p:sp>
+        <p:nvSpPr>
+          <p:cNvPr id="11" name="Shape 8"/>
+          <p:cNvSpPr/>
+          <p:nvPr/>
+        </p:nvSpPr>
+        <p:spPr>
+          <a:xfrm>
+            <a:off x="640080" y="3282696"/>
+            <a:ext cx="457200" cy="457200"/>
+          </a:xfrm>
+          <a:prstGeom prst="ellipse">
+            <a:avLst/>
+          </a:prstGeom>
+          <a:solidFill>
+            <a:srgbClr val="0E7A3D"/>
+          </a:solidFill>
+          <a:ln/>
+        </p:spPr>
+      </p:sp>
+      <p:sp>
+        <p:nvSpPr>
+          <p:cNvPr id="12" name="Text 9"/>
+          <p:cNvSpPr/>
+          <p:nvPr/>
+        </p:nvSpPr>
+        <p:spPr>
+          <a:xfrm>
+            <a:off x="640080" y="3282696"/>
+            <a:ext cx="457200" cy="457200"/>
+          </a:xfrm>
+          <a:prstGeom prst="rect">
+            <a:avLst/>
+          </a:prstGeom>
+          <a:noFill/>
+          <a:ln/>
+        </p:spPr>
+        <p:txBody>
+          <a:bodyPr wrap="square" lIns="0" tIns="0" rIns="0" bIns="0" rtlCol="0" anchor="ctr"/>
+          <a:lstStyle/>
+          <a:p>
+            <a:pPr algn="ctr" indent="0" marL="0">
+              <a:buNone/>
+            </a:pPr>
+            <a:r>
+              <a:rPr lang="en-US" sz="1400" b="1" dirty="0">
+                <a:solidFill>
+                  <a:srgbClr val="FFFFFF"/>
+                </a:solidFill>
+                <a:latin typeface="Calibri" pitchFamily="34" charset="0"/>
+                <a:ea typeface="Calibri" pitchFamily="34" charset="-122"/>
+                <a:cs typeface="Calibri" pitchFamily="34" charset="-120"/>
+              </a:rPr>
+              <a:t>3</a:t>
+            </a:r>
+            <a:endParaRPr lang="en-US" sz="1400" dirty="0"/>
+          </a:p>
+        </p:txBody>
+      </p:sp>
+      <p:sp>
+        <p:nvSpPr>
+          <p:cNvPr id="13" name="Text 10"/>
+          <p:cNvSpPr/>
+          <p:nvPr/>
+        </p:nvSpPr>
+        <p:spPr>
+          <a:xfrm>
+            <a:off x="1234440" y="3264408"/>
+            <a:ext cx="6309360" cy="548640"/>
+          </a:xfrm>
+          <a:prstGeom prst="rect">
+            <a:avLst/>
+          </a:prstGeom>
+          <a:noFill/>
+          <a:ln/>
+        </p:spPr>
+        <p:txBody>
+          <a:bodyPr wrap="square" lIns="0" tIns="0" rIns="0" bIns="0" rtlCol="0" anchor="ctr"/>
+          <a:lstStyle/>
+          <a:p>
+            <a:pPr indent="0" marL="0">
+              <a:buNone/>
+            </a:pPr>
+            <a:r>
+              <a:rPr lang="en-US" sz="1400" b="1" dirty="0">
                 <a:solidFill>
                   <a:srgbClr val="1C2A24"/>
                 </a:solidFill>
-                <a:latin typeface="Courier New" pitchFamily="34" charset="0"/>
-                <a:ea typeface="Courier New" pitchFamily="34" charset="-122"/>
-                <a:cs typeface="Courier New" pitchFamily="34" charset="-120"/>
-              </a:rPr>
-              <a:t>02-controle-de-flux/</a:t>
-            </a:r>
-            <a:endParaRPr lang="en-US" sz="1150" dirty="0"/>
-          </a:p>
-          <a:p>
-            <a:pPr indent="0" marL="0">
-              <a:lnSpc>
-                <a:spcPct val="135000"/>
-              </a:lnSpc>
-              <a:buNone/>
-            </a:pPr>
-            <a:r>
-              <a:rPr lang="en-US" sz="1150" dirty="0">
+                <a:latin typeface="Calibri" pitchFamily="34" charset="0"/>
+                <a:ea typeface="Calibri" pitchFamily="34" charset="-122"/>
+                <a:cs typeface="Calibri" pitchFamily="34" charset="-120"/>
+              </a:rPr>
+              <a:t>tp_premiers_pas.py</a:t>
+            </a:r>
+            <a:pPr indent="0" marL="0">
+              <a:buNone/>
+            </a:pPr>
+            <a:r>
+              <a:rPr lang="en-US" sz="1400" dirty="0">
+                <a:solidFill>
+                  <a:srgbClr val="5C6B63"/>
+                </a:solidFill>
+                <a:latin typeface="Calibri" pitchFamily="34" charset="0"/>
+                <a:ea typeface="Calibri" pitchFamily="34" charset="-122"/>
+                <a:cs typeface="Calibri" pitchFamily="34" charset="-120"/>
+              </a:rPr>
+              <a:t>  —  la fiche contribuable, proprement formatée</a:t>
+            </a:r>
+            <a:endParaRPr lang="en-US" sz="1400" dirty="0"/>
+          </a:p>
+        </p:txBody>
+      </p:sp>
+      <p:sp>
+        <p:nvSpPr>
+          <p:cNvPr id="14" name="Shape 11"/>
+          <p:cNvSpPr/>
+          <p:nvPr/>
+        </p:nvSpPr>
+        <p:spPr>
+          <a:xfrm>
+            <a:off x="640080" y="4032504"/>
+            <a:ext cx="457200" cy="457200"/>
+          </a:xfrm>
+          <a:prstGeom prst="ellipse">
+            <a:avLst/>
+          </a:prstGeom>
+          <a:solidFill>
+            <a:srgbClr val="0E7A3D"/>
+          </a:solidFill>
+          <a:ln/>
+        </p:spPr>
+      </p:sp>
+      <p:sp>
+        <p:nvSpPr>
+          <p:cNvPr id="15" name="Text 12"/>
+          <p:cNvSpPr/>
+          <p:nvPr/>
+        </p:nvSpPr>
+        <p:spPr>
+          <a:xfrm>
+            <a:off x="640080" y="4032504"/>
+            <a:ext cx="457200" cy="457200"/>
+          </a:xfrm>
+          <a:prstGeom prst="rect">
+            <a:avLst/>
+          </a:prstGeom>
+          <a:noFill/>
+          <a:ln/>
+        </p:spPr>
+        <p:txBody>
+          <a:bodyPr wrap="square" lIns="0" tIns="0" rIns="0" bIns="0" rtlCol="0" anchor="ctr"/>
+          <a:lstStyle/>
+          <a:p>
+            <a:pPr algn="ctr" indent="0" marL="0">
+              <a:buNone/>
+            </a:pPr>
+            <a:r>
+              <a:rPr lang="en-US" sz="1400" b="1" dirty="0">
+                <a:solidFill>
+                  <a:srgbClr val="FFFFFF"/>
+                </a:solidFill>
+                <a:latin typeface="Calibri" pitchFamily="34" charset="0"/>
+                <a:ea typeface="Calibri" pitchFamily="34" charset="-122"/>
+                <a:cs typeface="Calibri" pitchFamily="34" charset="-120"/>
+              </a:rPr>
+              <a:t>4</a:t>
+            </a:r>
+            <a:endParaRPr lang="en-US" sz="1400" dirty="0"/>
+          </a:p>
+        </p:txBody>
+      </p:sp>
+      <p:sp>
+        <p:nvSpPr>
+          <p:cNvPr id="16" name="Text 13"/>
+          <p:cNvSpPr/>
+          <p:nvPr/>
+        </p:nvSpPr>
+        <p:spPr>
+          <a:xfrm>
+            <a:off x="1234440" y="4014216"/>
+            <a:ext cx="6309360" cy="548640"/>
+          </a:xfrm>
+          <a:prstGeom prst="rect">
+            <a:avLst/>
+          </a:prstGeom>
+          <a:noFill/>
+          <a:ln/>
+        </p:spPr>
+        <p:txBody>
+          <a:bodyPr wrap="square" lIns="0" tIns="0" rIns="0" bIns="0" rtlCol="0" anchor="ctr"/>
+          <a:lstStyle/>
+          <a:p>
+            <a:pPr indent="0" marL="0">
+              <a:buNone/>
+            </a:pPr>
+            <a:r>
+              <a:rPr lang="en-US" sz="1400" b="1" dirty="0">
                 <a:solidFill>
                   <a:srgbClr val="1C2A24"/>
                 </a:solidFill>
-                <a:latin typeface="Courier New" pitchFamily="34" charset="0"/>
-                <a:ea typeface="Courier New" pitchFamily="34" charset="-122"/>
-                <a:cs typeface="Courier New" pitchFamily="34" charset="-120"/>
-              </a:rPr>
-              <a:t>  tp_bareme.py</a:t>
-            </a:r>
-            <a:endParaRPr lang="en-US" sz="1150" dirty="0"/>
-          </a:p>
-          <a:p>
-            <a:pPr indent="0" marL="0">
-              <a:lnSpc>
-                <a:spcPct val="135000"/>
-              </a:lnSpc>
-              <a:buNone/>
-            </a:pPr>
-            <a:r>
-              <a:rPr lang="en-US" sz="1150" dirty="0">
+                <a:latin typeface="Calibri" pitchFamily="34" charset="0"/>
+                <a:ea typeface="Calibri" pitchFamily="34" charset="-122"/>
+                <a:cs typeface="Calibri" pitchFamily="34" charset="-120"/>
+              </a:rPr>
+              <a:t>tp_bareme.py</a:t>
+            </a:r>
+            <a:pPr indent="0" marL="0">
+              <a:buNone/>
+            </a:pPr>
+            <a:r>
+              <a:rPr lang="en-US" sz="1400" dirty="0">
+                <a:solidFill>
+                  <a:srgbClr val="5C6B63"/>
+                </a:solidFill>
+                <a:latin typeface="Calibri" pitchFamily="34" charset="0"/>
+                <a:ea typeface="Calibri" pitchFamily="34" charset="-122"/>
+                <a:cs typeface="Calibri" pitchFamily="34" charset="-120"/>
+              </a:rPr>
+              <a:t>  —  le régime d’imposition + comptage des CA invalides</a:t>
+            </a:r>
+            <a:endParaRPr lang="en-US" sz="1400" dirty="0"/>
+          </a:p>
+        </p:txBody>
+      </p:sp>
+      <p:sp>
+        <p:nvSpPr>
+          <p:cNvPr id="17" name="Shape 14"/>
+          <p:cNvSpPr/>
+          <p:nvPr/>
+        </p:nvSpPr>
+        <p:spPr>
+          <a:xfrm>
+            <a:off x="640080" y="4782312"/>
+            <a:ext cx="457200" cy="457200"/>
+          </a:xfrm>
+          <a:prstGeom prst="ellipse">
+            <a:avLst/>
+          </a:prstGeom>
+          <a:solidFill>
+            <a:srgbClr val="0E7A3D"/>
+          </a:solidFill>
+          <a:ln/>
+        </p:spPr>
+      </p:sp>
+      <p:sp>
+        <p:nvSpPr>
+          <p:cNvPr id="18" name="Text 15"/>
+          <p:cNvSpPr/>
+          <p:nvPr/>
+        </p:nvSpPr>
+        <p:spPr>
+          <a:xfrm>
+            <a:off x="640080" y="4782312"/>
+            <a:ext cx="457200" cy="457200"/>
+          </a:xfrm>
+          <a:prstGeom prst="rect">
+            <a:avLst/>
+          </a:prstGeom>
+          <a:noFill/>
+          <a:ln/>
+        </p:spPr>
+        <p:txBody>
+          <a:bodyPr wrap="square" lIns="0" tIns="0" rIns="0" bIns="0" rtlCol="0" anchor="ctr"/>
+          <a:lstStyle/>
+          <a:p>
+            <a:pPr algn="ctr" indent="0" marL="0">
+              <a:buNone/>
+            </a:pPr>
+            <a:r>
+              <a:rPr lang="en-US" sz="1400" b="1" dirty="0">
+                <a:solidFill>
+                  <a:srgbClr val="FFFFFF"/>
+                </a:solidFill>
+                <a:latin typeface="Calibri" pitchFamily="34" charset="0"/>
+                <a:ea typeface="Calibri" pitchFamily="34" charset="-122"/>
+                <a:cs typeface="Calibri" pitchFamily="34" charset="-120"/>
+              </a:rPr>
+              <a:t>5</a:t>
+            </a:r>
+            <a:endParaRPr lang="en-US" sz="1400" dirty="0"/>
+          </a:p>
+        </p:txBody>
+      </p:sp>
+      <p:sp>
+        <p:nvSpPr>
+          <p:cNvPr id="19" name="Text 16"/>
+          <p:cNvSpPr/>
+          <p:nvPr/>
+        </p:nvSpPr>
+        <p:spPr>
+          <a:xfrm>
+            <a:off x="1234440" y="4764024"/>
+            <a:ext cx="6309360" cy="548640"/>
+          </a:xfrm>
+          <a:prstGeom prst="rect">
+            <a:avLst/>
+          </a:prstGeom>
+          <a:noFill/>
+          <a:ln/>
+        </p:spPr>
+        <p:txBody>
+          <a:bodyPr wrap="square" lIns="0" tIns="0" rIns="0" bIns="0" rtlCol="0" anchor="ctr"/>
+          <a:lstStyle/>
+          <a:p>
+            <a:pPr indent="0" marL="0">
+              <a:buNone/>
+            </a:pPr>
+            <a:r>
+              <a:rPr lang="en-US" sz="1400" b="1" dirty="0">
                 <a:solidFill>
                   <a:srgbClr val="1C2A24"/>
                 </a:solidFill>
-                <a:latin typeface="Courier New" pitchFamily="34" charset="0"/>
-                <a:ea typeface="Courier New" pitchFamily="34" charset="-122"/>
-                <a:cs typeface="Courier New" pitchFamily="34" charset="-120"/>
-              </a:rPr>
-              <a:t>00-data/sortie/*.csv</a:t>
-            </a:r>
-            <a:endParaRPr lang="en-US" sz="1150" dirty="0"/>
-          </a:p>
-        </p:txBody>
-      </p:sp>
-      <p:sp>
-        <p:nvSpPr>
-          <p:cNvPr id="24" name="Shape 21"/>
-          <p:cNvSpPr/>
-          <p:nvPr/>
-        </p:nvSpPr>
-        <p:spPr>
-          <a:xfrm>
-            <a:off x="7863840" y="4983480"/>
-            <a:ext cx="3749040" cy="1234440"/>
+                <a:latin typeface="Calibri" pitchFamily="34" charset="0"/>
+                <a:ea typeface="Calibri" pitchFamily="34" charset="-122"/>
+                <a:cs typeface="Calibri" pitchFamily="34" charset="-120"/>
+              </a:rPr>
+              <a:t>Pour les rapides</a:t>
+            </a:r>
+            <a:pPr indent="0" marL="0">
+              <a:buNone/>
+            </a:pPr>
+            <a:r>
+              <a:rPr lang="en-US" sz="1400" dirty="0">
+                <a:solidFill>
+                  <a:srgbClr val="5C6B63"/>
+                </a:solidFill>
+                <a:latin typeface="Calibri" pitchFamily="34" charset="0"/>
+                <a:ea typeface="Calibri" pitchFamily="34" charset="-122"/>
+                <a:cs typeface="Calibri" pitchFamily="34" charset="-120"/>
+              </a:rPr>
+              <a:t>  —  la boucle while « en combien d’années au réel normal ? »</a:t>
+            </a:r>
+            <a:endParaRPr lang="en-US" sz="1400" dirty="0"/>
+          </a:p>
+        </p:txBody>
+      </p:sp>
+      <p:sp>
+        <p:nvSpPr>
+          <p:cNvPr id="20" name="Shape 17"/>
+          <p:cNvSpPr/>
+          <p:nvPr/>
+        </p:nvSpPr>
+        <p:spPr>
+          <a:xfrm>
+            <a:off x="7863840" y="1737360"/>
+            <a:ext cx="3749040" cy="3017520"/>
           </a:xfrm>
           <a:prstGeom prst="roundRect">
             <a:avLst>
-              <a:gd name="adj" fmla="val 7407"/>
+              <a:gd name="adj" fmla="val 3030"/>
             </a:avLst>
           </a:prstGeom>
           <a:solidFill>
-            <a:srgbClr val="0D3325"/>
+            <a:srgbClr val="EEF5EF"/>
           </a:solidFill>
           <a:ln/>
         </p:spPr>
       </p:sp>
       <p:sp>
         <p:nvSpPr>
-          <p:cNvPr id="25" name="Shape 22"/>
-          <p:cNvSpPr/>
-          <p:nvPr/>
-        </p:nvSpPr>
-        <p:spPr>
-          <a:xfrm>
-            <a:off x="8138160" y="5212080"/>
+          <p:cNvPr id="21" name="Shape 18"/>
+          <p:cNvSpPr/>
+          <p:nvPr/>
+        </p:nvSpPr>
+        <p:spPr>
+          <a:xfrm>
+            <a:off x="8138160" y="1965960"/>
             <a:ext cx="457200" cy="457200"/>
           </a:xfrm>
           <a:prstGeom prst="ellipse">
             <a:avLst/>
           </a:prstGeom>
           <a:solidFill>
-            <a:srgbClr val="C9A227"/>
+            <a:srgbClr val="C79100"/>
           </a:solidFill>
           <a:ln/>
         </p:spPr>
       </p:sp>
       <p:pic>
         <p:nvPicPr>
-          <p:cNvPr id="26" name="Image 1" descr="icons/bulb.png">    </p:cNvPr>
+          <p:cNvPr id="22" name="Image 1" descr="icons/folder.png">    </p:cNvPr>
           <p:cNvPicPr>
             <a:picLocks noChangeAspect="1"/>
           </p:cNvPicPr>
@@ -9809,6 +9796,233 @@
         </p:blipFill>
         <p:spPr>
           <a:xfrm>
+            <a:off x="8257032" y="2084832"/>
+            <a:ext cx="219456" cy="219456"/>
+          </a:xfrm>
+          <a:prstGeom prst="rect">
+            <a:avLst/>
+          </a:prstGeom>
+        </p:spPr>
+      </p:pic>
+      <p:sp>
+        <p:nvSpPr>
+          <p:cNvPr id="23" name="Text 19"/>
+          <p:cNvSpPr/>
+          <p:nvPr/>
+        </p:nvSpPr>
+        <p:spPr>
+          <a:xfrm>
+            <a:off x="8732520" y="2011680"/>
+            <a:ext cx="2743200" cy="365760"/>
+          </a:xfrm>
+          <a:prstGeom prst="rect">
+            <a:avLst/>
+          </a:prstGeom>
+          <a:noFill/>
+          <a:ln/>
+        </p:spPr>
+        <p:txBody>
+          <a:bodyPr wrap="square" lIns="0" tIns="0" rIns="0" bIns="0" rtlCol="0" anchor="ctr"/>
+          <a:lstStyle/>
+          <a:p>
+            <a:pPr indent="0" marL="0">
+              <a:buNone/>
+            </a:pPr>
+            <a:r>
+              <a:rPr lang="en-US" sz="1400" b="1" dirty="0">
+                <a:solidFill>
+                  <a:srgbClr val="0E7A3D"/>
+                </a:solidFill>
+                <a:latin typeface="Calibri" pitchFamily="34" charset="0"/>
+                <a:ea typeface="Calibri" pitchFamily="34" charset="-122"/>
+                <a:cs typeface="Calibri" pitchFamily="34" charset="-120"/>
+              </a:rPr>
+              <a:t>Fichiers du jour</a:t>
+            </a:r>
+            <a:endParaRPr lang="en-US" sz="1400" dirty="0"/>
+          </a:p>
+        </p:txBody>
+      </p:sp>
+      <p:sp>
+        <p:nvSpPr>
+          <p:cNvPr id="24" name="Text 20"/>
+          <p:cNvSpPr/>
+          <p:nvPr/>
+        </p:nvSpPr>
+        <p:spPr>
+          <a:xfrm>
+            <a:off x="8138160" y="2606040"/>
+            <a:ext cx="3291840" cy="2011680"/>
+          </a:xfrm>
+          <a:prstGeom prst="rect">
+            <a:avLst/>
+          </a:prstGeom>
+          <a:noFill/>
+          <a:ln/>
+        </p:spPr>
+        <p:txBody>
+          <a:bodyPr wrap="square" lIns="0" tIns="0" rIns="0" bIns="0" rtlCol="0" anchor="t"/>
+          <a:lstStyle/>
+          <a:p>
+            <a:pPr indent="0" marL="0">
+              <a:lnSpc>
+                <a:spcPct val="135000"/>
+              </a:lnSpc>
+              <a:buNone/>
+            </a:pPr>
+            <a:r>
+              <a:rPr lang="en-US" sz="1150" dirty="0">
+                <a:solidFill>
+                  <a:srgbClr val="1C2A24"/>
+                </a:solidFill>
+                <a:latin typeface="Courier New" pitchFamily="34" charset="0"/>
+                <a:ea typeface="Courier New" pitchFamily="34" charset="-122"/>
+                <a:cs typeface="Courier New" pitchFamily="34" charset="-120"/>
+              </a:rPr>
+              <a:t>01-premiers-pas/</a:t>
+            </a:r>
+            <a:endParaRPr lang="en-US" sz="1150" dirty="0"/>
+          </a:p>
+          <a:p>
+            <a:pPr indent="0" marL="0">
+              <a:lnSpc>
+                <a:spcPct val="135000"/>
+              </a:lnSpc>
+              <a:buNone/>
+            </a:pPr>
+            <a:r>
+              <a:rPr lang="en-US" sz="1150" dirty="0">
+                <a:solidFill>
+                  <a:srgbClr val="1C2A24"/>
+                </a:solidFill>
+                <a:latin typeface="Courier New" pitchFamily="34" charset="0"/>
+                <a:ea typeface="Courier New" pitchFamily="34" charset="-122"/>
+                <a:cs typeface="Courier New" pitchFamily="34" charset="-120"/>
+              </a:rPr>
+              <a:t>  tp_premiers_pas.py</a:t>
+            </a:r>
+            <a:endParaRPr lang="en-US" sz="1150" dirty="0"/>
+          </a:p>
+          <a:p>
+            <a:pPr indent="0" marL="0">
+              <a:lnSpc>
+                <a:spcPct val="135000"/>
+              </a:lnSpc>
+              <a:buNone/>
+            </a:pPr>
+            <a:r>
+              <a:rPr lang="en-US" sz="1150" dirty="0">
+                <a:solidFill>
+                  <a:srgbClr val="1C2A24"/>
+                </a:solidFill>
+                <a:latin typeface="Courier New" pitchFamily="34" charset="0"/>
+                <a:ea typeface="Courier New" pitchFamily="34" charset="-122"/>
+                <a:cs typeface="Courier New" pitchFamily="34" charset="-120"/>
+              </a:rPr>
+              <a:t>02-controle-de-flux/</a:t>
+            </a:r>
+            <a:endParaRPr lang="en-US" sz="1150" dirty="0"/>
+          </a:p>
+          <a:p>
+            <a:pPr indent="0" marL="0">
+              <a:lnSpc>
+                <a:spcPct val="135000"/>
+              </a:lnSpc>
+              <a:buNone/>
+            </a:pPr>
+            <a:r>
+              <a:rPr lang="en-US" sz="1150" dirty="0">
+                <a:solidFill>
+                  <a:srgbClr val="1C2A24"/>
+                </a:solidFill>
+                <a:latin typeface="Courier New" pitchFamily="34" charset="0"/>
+                <a:ea typeface="Courier New" pitchFamily="34" charset="-122"/>
+                <a:cs typeface="Courier New" pitchFamily="34" charset="-120"/>
+              </a:rPr>
+              <a:t>  tp_bareme.py</a:t>
+            </a:r>
+            <a:endParaRPr lang="en-US" sz="1150" dirty="0"/>
+          </a:p>
+          <a:p>
+            <a:pPr indent="0" marL="0">
+              <a:lnSpc>
+                <a:spcPct val="135000"/>
+              </a:lnSpc>
+              <a:buNone/>
+            </a:pPr>
+            <a:r>
+              <a:rPr lang="en-US" sz="1150" dirty="0">
+                <a:solidFill>
+                  <a:srgbClr val="1C2A24"/>
+                </a:solidFill>
+                <a:latin typeface="Courier New" pitchFamily="34" charset="0"/>
+                <a:ea typeface="Courier New" pitchFamily="34" charset="-122"/>
+                <a:cs typeface="Courier New" pitchFamily="34" charset="-120"/>
+              </a:rPr>
+              <a:t>00-data/sortie/*.csv</a:t>
+            </a:r>
+            <a:endParaRPr lang="en-US" sz="1150" dirty="0"/>
+          </a:p>
+        </p:txBody>
+      </p:sp>
+      <p:sp>
+        <p:nvSpPr>
+          <p:cNvPr id="25" name="Shape 21"/>
+          <p:cNvSpPr/>
+          <p:nvPr/>
+        </p:nvSpPr>
+        <p:spPr>
+          <a:xfrm>
+            <a:off x="7863840" y="4983480"/>
+            <a:ext cx="3749040" cy="1234440"/>
+          </a:xfrm>
+          <a:prstGeom prst="roundRect">
+            <a:avLst>
+              <a:gd name="adj" fmla="val 7407"/>
+            </a:avLst>
+          </a:prstGeom>
+          <a:solidFill>
+            <a:srgbClr val="0A2E1A"/>
+          </a:solidFill>
+          <a:ln/>
+        </p:spPr>
+      </p:sp>
+      <p:sp>
+        <p:nvSpPr>
+          <p:cNvPr id="26" name="Shape 22"/>
+          <p:cNvSpPr/>
+          <p:nvPr/>
+        </p:nvSpPr>
+        <p:spPr>
+          <a:xfrm>
+            <a:off x="8138160" y="5212080"/>
+            <a:ext cx="457200" cy="457200"/>
+          </a:xfrm>
+          <a:prstGeom prst="ellipse">
+            <a:avLst/>
+          </a:prstGeom>
+          <a:solidFill>
+            <a:srgbClr val="C79100"/>
+          </a:solidFill>
+          <a:ln/>
+        </p:spPr>
+      </p:sp>
+      <p:pic>
+        <p:nvPicPr>
+          <p:cNvPr id="27" name="Image 2" descr="icons/bulb.png">    </p:cNvPr>
+          <p:cNvPicPr>
+            <a:picLocks noChangeAspect="1"/>
+          </p:cNvPicPr>
+          <p:nvPr/>
+        </p:nvPicPr>
+        <p:blipFill>
+          <a:blip r:embed="rId3"/>
+          <a:stretch>
+            <a:fillRect/>
+          </a:stretch>
+        </p:blipFill>
+        <p:spPr>
+          <a:xfrm>
             <a:off x="8257032" y="5330952"/>
             <a:ext cx="219456" cy="219456"/>
           </a:xfrm>
@@ -9819,7 +10033,7 @@
       </p:pic>
       <p:sp>
         <p:nvSpPr>
-          <p:cNvPr id="27" name="Text 23"/>
+          <p:cNvPr id="28" name="Text 23"/>
           <p:cNvSpPr/>
           <p:nvPr/>
         </p:nvSpPr>
@@ -9873,7 +10087,7 @@
     <p:bg>
       <p:bgPr>
         <a:solidFill>
-          <a:srgbClr val="0D3325"/>
+          <a:srgbClr val="0A2E1A"/>
         </a:solidFill>
       </p:bgPr>
     </p:bg>
@@ -9906,14 +10120,36 @@
             <a:avLst/>
           </a:prstGeom>
           <a:solidFill>
-            <a:srgbClr val="14563C"/>
+            <a:srgbClr val="0E7A3D"/>
           </a:solidFill>
           <a:ln/>
         </p:spPr>
       </p:sp>
       <p:sp>
         <p:nvSpPr>
-          <p:cNvPr id="3" name="Text 1"/>
+          <p:cNvPr id="3" name="Shape 1"/>
+          <p:cNvSpPr/>
+          <p:nvPr/>
+        </p:nvSpPr>
+        <p:spPr>
+          <a:xfrm>
+            <a:off x="11430000" y="5394960"/>
+            <a:ext cx="2011680" cy="2011680"/>
+          </a:xfrm>
+          <a:prstGeom prst="ellipse">
+            <a:avLst/>
+          </a:prstGeom>
+          <a:solidFill>
+            <a:srgbClr val="CE1126">
+              <a:alpha val="60000"/>
+            </a:srgbClr>
+          </a:solidFill>
+          <a:ln/>
+        </p:spPr>
+      </p:sp>
+      <p:sp>
+        <p:nvSpPr>
+          <p:cNvPr id="4" name="Text 2"/>
           <p:cNvSpPr/>
           <p:nvPr/>
         </p:nvSpPr>
@@ -9938,7 +10174,7 @@
             <a:r>
               <a:rPr lang="en-US" sz="1300" b="1" spc="200" kern="0" dirty="0">
                 <a:solidFill>
-                  <a:srgbClr val="C9A227"/>
+                  <a:srgbClr val="C79100"/>
                 </a:solidFill>
                 <a:latin typeface="Calibri" pitchFamily="34" charset="0"/>
                 <a:ea typeface="Calibri" pitchFamily="34" charset="-122"/>
@@ -9952,7 +10188,7 @@
       </p:sp>
       <p:sp>
         <p:nvSpPr>
-          <p:cNvPr id="4" name="Text 2"/>
+          <p:cNvPr id="5" name="Text 3"/>
           <p:cNvSpPr/>
           <p:nvPr/>
         </p:nvSpPr>
@@ -9991,7 +10227,7 @@
       </p:sp>
       <p:sp>
         <p:nvSpPr>
-          <p:cNvPr id="5" name="Shape 3"/>
+          <p:cNvPr id="6" name="Shape 4"/>
           <p:cNvSpPr/>
           <p:nvPr/>
         </p:nvSpPr>
@@ -10004,14 +10240,14 @@
             <a:avLst/>
           </a:prstGeom>
           <a:solidFill>
-            <a:srgbClr val="1E7A50"/>
+            <a:srgbClr val="2E9E4F"/>
           </a:solidFill>
           <a:ln/>
         </p:spPr>
       </p:sp>
       <p:pic>
         <p:nvPicPr>
-          <p:cNvPr id="6" name="Image 0" descr="icons/check.png">    </p:cNvPr>
+          <p:cNvPr id="7" name="Image 0" descr="icons/check.png">    </p:cNvPr>
           <p:cNvPicPr>
             <a:picLocks noChangeAspect="1"/>
           </p:cNvPicPr>
@@ -10035,7 +10271,7 @@
       </p:pic>
       <p:sp>
         <p:nvSpPr>
-          <p:cNvPr id="7" name="Text 4"/>
+          <p:cNvPr id="8" name="Text 5"/>
           <p:cNvSpPr/>
           <p:nvPr/>
         </p:nvSpPr>
@@ -10088,7 +10324,7 @@
       </p:sp>
       <p:sp>
         <p:nvSpPr>
-          <p:cNvPr id="8" name="Shape 5"/>
+          <p:cNvPr id="9" name="Shape 6"/>
           <p:cNvSpPr/>
           <p:nvPr/>
         </p:nvSpPr>
@@ -10101,14 +10337,14 @@
             <a:avLst/>
           </a:prstGeom>
           <a:solidFill>
-            <a:srgbClr val="1E7A50"/>
+            <a:srgbClr val="2E9E4F"/>
           </a:solidFill>
           <a:ln/>
         </p:spPr>
       </p:sp>
       <p:pic>
         <p:nvPicPr>
-          <p:cNvPr id="9" name="Image 1" descr="icons/check.png">    </p:cNvPr>
+          <p:cNvPr id="10" name="Image 1" descr="icons/check.png">    </p:cNvPr>
           <p:cNvPicPr>
             <a:picLocks noChangeAspect="1"/>
           </p:cNvPicPr>
@@ -10132,7 +10368,7 @@
       </p:pic>
       <p:sp>
         <p:nvSpPr>
-          <p:cNvPr id="10" name="Text 6"/>
+          <p:cNvPr id="11" name="Text 7"/>
           <p:cNvSpPr/>
           <p:nvPr/>
         </p:nvSpPr>
@@ -10185,7 +10421,7 @@
       </p:sp>
       <p:sp>
         <p:nvSpPr>
-          <p:cNvPr id="11" name="Shape 7"/>
+          <p:cNvPr id="12" name="Shape 8"/>
           <p:cNvSpPr/>
           <p:nvPr/>
         </p:nvSpPr>
@@ -10198,14 +10434,14 @@
             <a:avLst/>
           </a:prstGeom>
           <a:solidFill>
-            <a:srgbClr val="1E7A50"/>
+            <a:srgbClr val="2E9E4F"/>
           </a:solidFill>
           <a:ln/>
         </p:spPr>
       </p:sp>
       <p:pic>
         <p:nvPicPr>
-          <p:cNvPr id="12" name="Image 2" descr="icons/check.png">    </p:cNvPr>
+          <p:cNvPr id="13" name="Image 2" descr="icons/check.png">    </p:cNvPr>
           <p:cNvPicPr>
             <a:picLocks noChangeAspect="1"/>
           </p:cNvPicPr>
@@ -10229,7 +10465,7 @@
       </p:pic>
       <p:sp>
         <p:nvSpPr>
-          <p:cNvPr id="13" name="Text 8"/>
+          <p:cNvPr id="14" name="Text 9"/>
           <p:cNvSpPr/>
           <p:nvPr/>
         </p:nvSpPr>
@@ -10282,7 +10518,7 @@
       </p:sp>
       <p:sp>
         <p:nvSpPr>
-          <p:cNvPr id="14" name="Shape 9"/>
+          <p:cNvPr id="15" name="Shape 10"/>
           <p:cNvSpPr/>
           <p:nvPr/>
         </p:nvSpPr>
@@ -10295,14 +10531,14 @@
             <a:avLst/>
           </a:prstGeom>
           <a:solidFill>
-            <a:srgbClr val="1E7A50"/>
+            <a:srgbClr val="2E9E4F"/>
           </a:solidFill>
           <a:ln/>
         </p:spPr>
       </p:sp>
       <p:pic>
         <p:nvPicPr>
-          <p:cNvPr id="15" name="Image 3" descr="icons/check.png">    </p:cNvPr>
+          <p:cNvPr id="16" name="Image 3" descr="icons/check.png">    </p:cNvPr>
           <p:cNvPicPr>
             <a:picLocks noChangeAspect="1"/>
           </p:cNvPicPr>
@@ -10326,7 +10562,7 @@
       </p:pic>
       <p:sp>
         <p:nvSpPr>
-          <p:cNvPr id="16" name="Text 10"/>
+          <p:cNvPr id="17" name="Text 11"/>
           <p:cNvSpPr/>
           <p:nvPr/>
         </p:nvSpPr>
@@ -10379,7 +10615,7 @@
       </p:sp>
       <p:sp>
         <p:nvSpPr>
-          <p:cNvPr id="17" name="Shape 11"/>
+          <p:cNvPr id="18" name="Shape 12"/>
           <p:cNvSpPr/>
           <p:nvPr/>
         </p:nvSpPr>
@@ -10392,14 +10628,14 @@
             <a:avLst/>
           </a:prstGeom>
           <a:solidFill>
-            <a:srgbClr val="1E7A50"/>
+            <a:srgbClr val="2E9E4F"/>
           </a:solidFill>
           <a:ln/>
         </p:spPr>
       </p:sp>
       <p:pic>
         <p:nvPicPr>
-          <p:cNvPr id="18" name="Image 4" descr="icons/check.png">    </p:cNvPr>
+          <p:cNvPr id="19" name="Image 4" descr="icons/check.png">    </p:cNvPr>
           <p:cNvPicPr>
             <a:picLocks noChangeAspect="1"/>
           </p:cNvPicPr>
@@ -10423,7 +10659,7 @@
       </p:pic>
       <p:sp>
         <p:nvSpPr>
-          <p:cNvPr id="19" name="Text 12"/>
+          <p:cNvPr id="20" name="Text 13"/>
           <p:cNvSpPr/>
           <p:nvPr/>
         </p:nvSpPr>
@@ -10476,7 +10712,7 @@
       </p:sp>
       <p:sp>
         <p:nvSpPr>
-          <p:cNvPr id="20" name="Shape 13"/>
+          <p:cNvPr id="21" name="Shape 14"/>
           <p:cNvSpPr/>
           <p:nvPr/>
         </p:nvSpPr>
@@ -10491,14 +10727,14 @@
             </a:avLst>
           </a:prstGeom>
           <a:solidFill>
-            <a:srgbClr val="14563C"/>
+            <a:srgbClr val="0E7A3D"/>
           </a:solidFill>
           <a:ln/>
         </p:spPr>
       </p:sp>
       <p:sp>
         <p:nvSpPr>
-          <p:cNvPr id="21" name="Shape 14"/>
+          <p:cNvPr id="22" name="Shape 15"/>
           <p:cNvSpPr/>
           <p:nvPr/>
         </p:nvSpPr>
@@ -10511,14 +10747,14 @@
             <a:avLst/>
           </a:prstGeom>
           <a:solidFill>
-            <a:srgbClr val="C9A227"/>
+            <a:srgbClr val="C79100"/>
           </a:solidFill>
           <a:ln/>
         </p:spPr>
       </p:sp>
       <p:pic>
         <p:nvPicPr>
-          <p:cNvPr id="22" name="Image 5" descr="icons/rocket.png">    </p:cNvPr>
+          <p:cNvPr id="23" name="Image 5" descr="icons/rocket.png">    </p:cNvPr>
           <p:cNvPicPr>
             <a:picLocks noChangeAspect="1"/>
           </p:cNvPicPr>
@@ -10542,7 +10778,7 @@
       </p:pic>
       <p:sp>
         <p:nvSpPr>
-          <p:cNvPr id="23" name="Text 15"/>
+          <p:cNvPr id="24" name="Text 16"/>
           <p:cNvSpPr/>
           <p:nvPr/>
         </p:nvSpPr>
@@ -10581,7 +10817,7 @@
       </p:sp>
       <p:sp>
         <p:nvSpPr>
-          <p:cNvPr id="24" name="Text 16"/>
+          <p:cNvPr id="25" name="Text 17"/>
           <p:cNvSpPr/>
           <p:nvPr/>
         </p:nvSpPr>

--- a/slides/sources/J1-fondamentaux.pptx
+++ b/slides/sources/J1-fondamentaux.pptx
@@ -1569,7 +1569,7 @@
     <p:bg>
       <p:bgPr>
         <a:solidFill>
-          <a:srgbClr val="0A2E1A"/>
+          <a:srgbClr val="FFFFFF"/>
         </a:solidFill>
       </p:bgPr>
     </p:bg>
@@ -1595,14 +1595,14 @@
         </p:nvSpPr>
         <p:spPr>
           <a:xfrm>
-            <a:off x="9692640" y="-1463040"/>
-            <a:ext cx="4206240" cy="4206240"/>
+            <a:off x="10149840" y="4846320"/>
+            <a:ext cx="3291840" cy="3291840"/>
           </a:xfrm>
           <a:prstGeom prst="ellipse">
             <a:avLst/>
           </a:prstGeom>
           <a:solidFill>
-            <a:srgbClr val="0E7A3D"/>
+            <a:srgbClr val="EEF5EF"/>
           </a:solidFill>
           <a:ln/>
         </p:spPr>
@@ -1615,67 +1615,21 @@
         </p:nvSpPr>
         <p:spPr>
           <a:xfrm>
-            <a:off x="10698480" y="4480560"/>
-            <a:ext cx="3108960" cy="3108960"/>
+            <a:off x="-1188720" y="-1371600"/>
+            <a:ext cx="2743200" cy="2743200"/>
           </a:xfrm>
           <a:prstGeom prst="ellipse">
             <a:avLst/>
           </a:prstGeom>
           <a:solidFill>
-            <a:srgbClr val="FCD116">
-              <a:alpha val="55000"/>
-            </a:srgbClr>
-          </a:solidFill>
-          <a:ln/>
-        </p:spPr>
-      </p:sp>
-      <p:sp>
-        <p:nvSpPr>
-          <p:cNvPr id="4" name="Shape 2"/>
-          <p:cNvSpPr/>
-          <p:nvPr/>
-        </p:nvSpPr>
-        <p:spPr>
-          <a:xfrm>
-            <a:off x="-1097280" y="5120640"/>
-            <a:ext cx="2743200" cy="2743200"/>
-          </a:xfrm>
-          <a:prstGeom prst="ellipse">
-            <a:avLst/>
-          </a:prstGeom>
-          <a:solidFill>
-            <a:srgbClr val="CE1126">
-              <a:alpha val="65000"/>
-            </a:srgbClr>
-          </a:solidFill>
-          <a:ln/>
-        </p:spPr>
-      </p:sp>
-      <p:sp>
-        <p:nvSpPr>
-          <p:cNvPr id="5" name="Shape 3"/>
-          <p:cNvSpPr/>
-          <p:nvPr/>
-        </p:nvSpPr>
-        <p:spPr>
-          <a:xfrm>
-            <a:off x="9464040" y="502920"/>
-            <a:ext cx="2148840" cy="1828800"/>
-          </a:xfrm>
-          <a:prstGeom prst="roundRect">
-            <a:avLst>
-              <a:gd name="adj" fmla="val 6000"/>
-            </a:avLst>
-          </a:prstGeom>
-          <a:solidFill>
-            <a:srgbClr val="FFFFFF"/>
+            <a:srgbClr val="EEF5EF"/>
           </a:solidFill>
           <a:ln/>
         </p:spPr>
       </p:sp>
       <p:pic>
         <p:nvPicPr>
-          <p:cNvPr id="6" name="Image 0" descr="logo-dgi.png">    </p:cNvPr>
+          <p:cNvPr id="4" name="Image 0" descr="logo-ministere.png">    </p:cNvPr>
           <p:cNvPicPr>
             <a:picLocks noChangeAspect="1"/>
           </p:cNvPicPr>
@@ -1689,23 +1643,47 @@
         </p:blipFill>
         <p:spPr>
           <a:xfrm>
-            <a:off x="9646920" y="740664"/>
-            <a:ext cx="1783080" cy="1353312"/>
+            <a:off x="640080" y="457200"/>
+            <a:ext cx="4206240" cy="822960"/>
           </a:xfrm>
           <a:prstGeom prst="rect">
             <a:avLst/>
           </a:prstGeom>
         </p:spPr>
       </p:pic>
-      <p:sp>
-        <p:nvSpPr>
-          <p:cNvPr id="7" name="Text 4"/>
-          <p:cNvSpPr/>
-          <p:nvPr/>
-        </p:nvSpPr>
-        <p:spPr>
-          <a:xfrm>
-            <a:off x="640080" y="777240"/>
+      <p:pic>
+        <p:nvPicPr>
+          <p:cNvPr id="5" name="Image 1" descr="logo-dgci.png">    </p:cNvPr>
+          <p:cNvPicPr>
+            <a:picLocks noChangeAspect="1"/>
+          </p:cNvPicPr>
+          <p:nvPr/>
+        </p:nvPicPr>
+        <p:blipFill>
+          <a:blip r:embed="rId2"/>
+          <a:stretch>
+            <a:fillRect/>
+          </a:stretch>
+        </p:blipFill>
+        <p:spPr>
+          <a:xfrm>
+            <a:off x="9144000" y="475488"/>
+            <a:ext cx="2468880" cy="758952"/>
+          </a:xfrm>
+          <a:prstGeom prst="rect">
+            <a:avLst/>
+          </a:prstGeom>
+        </p:spPr>
+      </p:pic>
+      <p:sp>
+        <p:nvSpPr>
+          <p:cNvPr id="6" name="Text 2"/>
+          <p:cNvSpPr/>
+          <p:nvPr/>
+        </p:nvSpPr>
+        <p:spPr>
+          <a:xfrm>
+            <a:off x="640080" y="1874520"/>
             <a:ext cx="7315200" cy="365760"/>
           </a:xfrm>
           <a:prstGeom prst="rect">
@@ -1724,7 +1702,7 @@
             <a:r>
               <a:rPr lang="en-US" sz="1500" b="1" spc="300" kern="0" dirty="0">
                 <a:solidFill>
-                  <a:srgbClr val="FCD116"/>
+                  <a:srgbClr val="C79100"/>
                 </a:solidFill>
                 <a:latin typeface="Calibri" pitchFamily="34" charset="0"/>
                 <a:ea typeface="Calibri" pitchFamily="34" charset="-122"/>
@@ -1738,13 +1716,13 @@
       </p:sp>
       <p:sp>
         <p:nvSpPr>
-          <p:cNvPr id="8" name="Text 5"/>
-          <p:cNvSpPr/>
-          <p:nvPr/>
-        </p:nvSpPr>
-        <p:spPr>
-          <a:xfrm>
-            <a:off x="640080" y="1417320"/>
+          <p:cNvPr id="7" name="Text 3"/>
+          <p:cNvSpPr/>
+          <p:nvPr/>
+        </p:nvSpPr>
+        <p:spPr>
+          <a:xfrm>
+            <a:off x="640080" y="2286000"/>
             <a:ext cx="8686800" cy="1371600"/>
           </a:xfrm>
           <a:prstGeom prst="rect">
@@ -1761,9 +1739,9 @@
               <a:buNone/>
             </a:pPr>
             <a:r>
-              <a:rPr lang="en-US" sz="8400" b="1" dirty="0">
-                <a:solidFill>
-                  <a:srgbClr val="FFFFFF"/>
+              <a:rPr lang="en-US" sz="8000" b="1" dirty="0">
+                <a:solidFill>
+                  <a:srgbClr val="0E7A3D"/>
                 </a:solidFill>
                 <a:latin typeface="Cambria" pitchFamily="34" charset="0"/>
                 <a:ea typeface="Cambria" pitchFamily="34" charset="-122"/>
@@ -1771,20 +1749,20 @@
               </a:rPr>
               <a:t>J1</a:t>
             </a:r>
-            <a:endParaRPr lang="en-US" sz="8400" dirty="0"/>
-          </a:p>
-        </p:txBody>
-      </p:sp>
-      <p:sp>
-        <p:nvSpPr>
-          <p:cNvPr id="9" name="Text 6"/>
-          <p:cNvSpPr/>
-          <p:nvPr/>
-        </p:nvSpPr>
-        <p:spPr>
-          <a:xfrm>
-            <a:off x="640080" y="2880360"/>
-            <a:ext cx="9418320" cy="914400"/>
+            <a:endParaRPr lang="en-US" sz="8000" dirty="0"/>
+          </a:p>
+        </p:txBody>
+      </p:sp>
+      <p:sp>
+        <p:nvSpPr>
+          <p:cNvPr id="8" name="Text 4"/>
+          <p:cNvSpPr/>
+          <p:nvPr/>
+        </p:nvSpPr>
+        <p:spPr>
+          <a:xfrm>
+            <a:off x="640080" y="3657600"/>
+            <a:ext cx="10058400" cy="914400"/>
           </a:xfrm>
           <a:prstGeom prst="rect">
             <a:avLst/>
@@ -1800,9 +1778,9 @@
               <a:buNone/>
             </a:pPr>
             <a:r>
-              <a:rPr lang="en-US" sz="3500" b="1" dirty="0">
-                <a:solidFill>
-                  <a:srgbClr val="FCD116"/>
+              <a:rPr lang="en-US" sz="3400" b="1" dirty="0">
+                <a:solidFill>
+                  <a:srgbClr val="1C2A24"/>
                 </a:solidFill>
                 <a:latin typeface="Cambria" pitchFamily="34" charset="0"/>
                 <a:ea typeface="Cambria" pitchFamily="34" charset="-122"/>
@@ -1810,20 +1788,20 @@
               </a:rPr>
               <a:t>Fondamentaux du langage</a:t>
             </a:r>
-            <a:endParaRPr lang="en-US" sz="3500" dirty="0"/>
-          </a:p>
-        </p:txBody>
-      </p:sp>
-      <p:sp>
-        <p:nvSpPr>
-          <p:cNvPr id="10" name="Text 7"/>
-          <p:cNvSpPr/>
-          <p:nvPr/>
-        </p:nvSpPr>
-        <p:spPr>
-          <a:xfrm>
-            <a:off x="640080" y="3794760"/>
-            <a:ext cx="8778240" cy="822960"/>
+            <a:endParaRPr lang="en-US" sz="3400" dirty="0"/>
+          </a:p>
+        </p:txBody>
+      </p:sp>
+      <p:sp>
+        <p:nvSpPr>
+          <p:cNvPr id="9" name="Text 5"/>
+          <p:cNvSpPr/>
+          <p:nvPr/>
+        </p:nvSpPr>
+        <p:spPr>
+          <a:xfrm>
+            <a:off x="640080" y="4526280"/>
+            <a:ext cx="9326880" cy="822960"/>
           </a:xfrm>
           <a:prstGeom prst="rect">
             <a:avLst/>
@@ -1842,9 +1820,9 @@
               <a:buNone/>
             </a:pPr>
             <a:r>
-              <a:rPr lang="en-US" sz="1600" dirty="0">
-                <a:solidFill>
-                  <a:srgbClr val="CADFD2"/>
+              <a:rPr lang="en-US" sz="1550" dirty="0">
+                <a:solidFill>
+                  <a:srgbClr val="5C6B63"/>
                 </a:solidFill>
                 <a:latin typeface="Calibri" pitchFamily="34" charset="0"/>
                 <a:ea typeface="Calibri" pitchFamily="34" charset="-122"/>
@@ -1852,7 +1830,7 @@
               </a:rPr>
               <a:t>Prendre en main l’environnement, manipuler les types de base,</a:t>
             </a:r>
-            <a:endParaRPr lang="en-US" sz="1600" dirty="0"/>
+            <a:endParaRPr lang="en-US" sz="1550" dirty="0"/>
           </a:p>
           <a:p>
             <a:pPr indent="0" marL="0">
@@ -1862,9 +1840,9 @@
               <a:buNone/>
             </a:pPr>
             <a:r>
-              <a:rPr lang="en-US" sz="1600" dirty="0">
-                <a:solidFill>
-                  <a:srgbClr val="CADFD2"/>
+              <a:rPr lang="en-US" sz="1550" dirty="0">
+                <a:solidFill>
+                  <a:srgbClr val="5C6B63"/>
                 </a:solidFill>
                 <a:latin typeface="Calibri" pitchFamily="34" charset="0"/>
                 <a:ea typeface="Calibri" pitchFamily="34" charset="-122"/>
@@ -1872,19 +1850,19 @@
               </a:rPr>
               <a:t>écrire ses premières conditions et boucles.</a:t>
             </a:r>
-            <a:endParaRPr lang="en-US" sz="1600" dirty="0"/>
-          </a:p>
-        </p:txBody>
-      </p:sp>
-      <p:sp>
-        <p:nvSpPr>
-          <p:cNvPr id="11" name="Shape 8"/>
-          <p:cNvSpPr/>
-          <p:nvPr/>
-        </p:nvSpPr>
-        <p:spPr>
-          <a:xfrm>
-            <a:off x="640080" y="5120640"/>
+            <a:endParaRPr lang="en-US" sz="1550" dirty="0"/>
+          </a:p>
+        </p:txBody>
+      </p:sp>
+      <p:sp>
+        <p:nvSpPr>
+          <p:cNvPr id="10" name="Shape 6"/>
+          <p:cNvSpPr/>
+          <p:nvPr/>
+        </p:nvSpPr>
+        <p:spPr>
+          <a:xfrm>
+            <a:off x="640080" y="5440680"/>
             <a:ext cx="1824228" cy="475488"/>
           </a:xfrm>
           <a:prstGeom prst="roundRect">
@@ -1900,13 +1878,13 @@
       </p:sp>
       <p:sp>
         <p:nvSpPr>
-          <p:cNvPr id="12" name="Text 9"/>
-          <p:cNvSpPr/>
-          <p:nvPr/>
-        </p:nvSpPr>
-        <p:spPr>
-          <a:xfrm>
-            <a:off x="640080" y="5120640"/>
+          <p:cNvPr id="11" name="Text 7"/>
+          <p:cNvSpPr/>
+          <p:nvPr/>
+        </p:nvSpPr>
+        <p:spPr>
+          <a:xfrm>
+            <a:off x="640080" y="5440680"/>
             <a:ext cx="1824228" cy="475488"/>
           </a:xfrm>
           <a:prstGeom prst="rect">
@@ -1939,13 +1917,13 @@
       </p:sp>
       <p:sp>
         <p:nvSpPr>
-          <p:cNvPr id="13" name="Shape 10"/>
-          <p:cNvSpPr/>
-          <p:nvPr/>
-        </p:nvSpPr>
-        <p:spPr>
-          <a:xfrm>
-            <a:off x="2692908" y="5120640"/>
+          <p:cNvPr id="12" name="Shape 8"/>
+          <p:cNvSpPr/>
+          <p:nvPr/>
+        </p:nvSpPr>
+        <p:spPr>
+          <a:xfrm>
+            <a:off x="2692908" y="5440680"/>
             <a:ext cx="2208276" cy="475488"/>
           </a:xfrm>
           <a:prstGeom prst="roundRect">
@@ -1961,13 +1939,13 @@
       </p:sp>
       <p:sp>
         <p:nvSpPr>
-          <p:cNvPr id="14" name="Text 11"/>
-          <p:cNvSpPr/>
-          <p:nvPr/>
-        </p:nvSpPr>
-        <p:spPr>
-          <a:xfrm>
-            <a:off x="2692908" y="5120640"/>
+          <p:cNvPr id="13" name="Text 9"/>
+          <p:cNvSpPr/>
+          <p:nvPr/>
+        </p:nvSpPr>
+        <p:spPr>
+          <a:xfrm>
+            <a:off x="2692908" y="5440680"/>
             <a:ext cx="2208276" cy="475488"/>
           </a:xfrm>
           <a:prstGeom prst="rect">
@@ -2000,14 +1978,14 @@
       </p:sp>
       <p:sp>
         <p:nvSpPr>
-          <p:cNvPr id="15" name="Text 12"/>
-          <p:cNvSpPr/>
-          <p:nvPr/>
-        </p:nvSpPr>
-        <p:spPr>
-          <a:xfrm>
-            <a:off x="640080" y="6172200"/>
-            <a:ext cx="10058400" cy="320040"/>
+          <p:cNvPr id="14" name="Text 10"/>
+          <p:cNvSpPr/>
+          <p:nvPr/>
+        </p:nvSpPr>
+        <p:spPr>
+          <a:xfrm>
+            <a:off x="640080" y="6263640"/>
+            <a:ext cx="10972800" cy="320040"/>
           </a:xfrm>
           <a:prstGeom prst="rect">
             <a:avLst/>
@@ -2023,17 +2001,17 @@
               <a:buNone/>
             </a:pPr>
             <a:r>
-              <a:rPr lang="en-US" sz="1200" dirty="0">
-                <a:solidFill>
-                  <a:srgbClr val="8FAF9F"/>
+              <a:rPr lang="en-US" sz="1150" dirty="0">
+                <a:solidFill>
+                  <a:srgbClr val="5C6B63"/>
                 </a:solidFill>
                 <a:latin typeface="Calibri" pitchFamily="34" charset="0"/>
                 <a:ea typeface="Calibri" pitchFamily="34" charset="-122"/>
                 <a:cs typeface="Calibri" pitchFamily="34" charset="-120"/>
               </a:rPr>
-              <a:t>DGI — Direction Générale des Impôts · Guinée-Bissau · données pédagogiques fictives</a:t>
-            </a:r>
-            <a:endParaRPr lang="en-US" sz="1200" dirty="0"/>
+              <a:t>DGCI — Direção Geral das Contribuições e Impostos · Guinée-Bissau · données pédagogiques fictives</a:t>
+            </a:r>
+            <a:endParaRPr lang="en-US" sz="1150" dirty="0"/>
           </a:p>
         </p:txBody>
       </p:sp>
@@ -2149,7 +2127,7 @@
       </p:sp>
       <p:pic>
         <p:nvPicPr>
-          <p:cNvPr id="4" name="Image 0" descr="logo-dgi.png">    </p:cNvPr>
+          <p:cNvPr id="4" name="Image 0" descr="logo-dgci.png">    </p:cNvPr>
           <p:cNvPicPr>
             <a:picLocks noChangeAspect="1"/>
           </p:cNvPicPr>
@@ -2163,8 +2141,8 @@
         </p:blipFill>
         <p:spPr>
           <a:xfrm>
-            <a:off x="10744200" y="384048"/>
-            <a:ext cx="1051560" cy="795528"/>
+            <a:off x="10287000" y="475488"/>
+            <a:ext cx="1481328" cy="457200"/>
           </a:xfrm>
           <a:prstGeom prst="rect">
             <a:avLst/>
@@ -3361,7 +3339,7 @@
       </p:sp>
       <p:pic>
         <p:nvPicPr>
-          <p:cNvPr id="4" name="Image 0" descr="logo-dgi.png">    </p:cNvPr>
+          <p:cNvPr id="4" name="Image 0" descr="logo-dgci.png">    </p:cNvPr>
           <p:cNvPicPr>
             <a:picLocks noChangeAspect="1"/>
           </p:cNvPicPr>
@@ -3375,8 +3353,8 @@
         </p:blipFill>
         <p:spPr>
           <a:xfrm>
-            <a:off x="10744200" y="384048"/>
-            <a:ext cx="1051560" cy="795528"/>
+            <a:off x="10287000" y="475488"/>
+            <a:ext cx="1481328" cy="457200"/>
           </a:xfrm>
           <a:prstGeom prst="rect">
             <a:avLst/>
@@ -4227,7 +4205,7 @@
       </p:sp>
       <p:pic>
         <p:nvPicPr>
-          <p:cNvPr id="4" name="Image 0" descr="logo-dgi.png">    </p:cNvPr>
+          <p:cNvPr id="4" name="Image 0" descr="logo-dgci.png">    </p:cNvPr>
           <p:cNvPicPr>
             <a:picLocks noChangeAspect="1"/>
           </p:cNvPicPr>
@@ -4241,8 +4219,8 @@
         </p:blipFill>
         <p:spPr>
           <a:xfrm>
-            <a:off x="10744200" y="384048"/>
-            <a:ext cx="1051560" cy="795528"/>
+            <a:off x="10287000" y="475488"/>
+            <a:ext cx="1481328" cy="457200"/>
           </a:xfrm>
           <a:prstGeom prst="rect">
             <a:avLst/>
@@ -5338,7 +5316,7 @@
       </p:sp>
       <p:pic>
         <p:nvPicPr>
-          <p:cNvPr id="4" name="Image 0" descr="logo-dgi.png">    </p:cNvPr>
+          <p:cNvPr id="4" name="Image 0" descr="logo-dgci.png">    </p:cNvPr>
           <p:cNvPicPr>
             <a:picLocks noChangeAspect="1"/>
           </p:cNvPicPr>
@@ -5352,8 +5330,8 @@
         </p:blipFill>
         <p:spPr>
           <a:xfrm>
-            <a:off x="10744200" y="384048"/>
-            <a:ext cx="1051560" cy="795528"/>
+            <a:off x="10287000" y="475488"/>
+            <a:ext cx="1481328" cy="457200"/>
           </a:xfrm>
           <a:prstGeom prst="rect">
             <a:avLst/>
@@ -6497,7 +6475,7 @@
       </p:sp>
       <p:pic>
         <p:nvPicPr>
-          <p:cNvPr id="4" name="Image 0" descr="logo-dgi.png">    </p:cNvPr>
+          <p:cNvPr id="4" name="Image 0" descr="logo-dgci.png">    </p:cNvPr>
           <p:cNvPicPr>
             <a:picLocks noChangeAspect="1"/>
           </p:cNvPicPr>
@@ -6511,8 +6489,8 @@
         </p:blipFill>
         <p:spPr>
           <a:xfrm>
-            <a:off x="10744200" y="384048"/>
-            <a:ext cx="1051560" cy="795528"/>
+            <a:off x="10287000" y="475488"/>
+            <a:ext cx="1481328" cy="457200"/>
           </a:xfrm>
           <a:prstGeom prst="rect">
             <a:avLst/>
@@ -7916,7 +7894,7 @@
       </p:sp>
       <p:pic>
         <p:nvPicPr>
-          <p:cNvPr id="4" name="Image 0" descr="logo-dgi.png">    </p:cNvPr>
+          <p:cNvPr id="4" name="Image 0" descr="logo-dgci.png">    </p:cNvPr>
           <p:cNvPicPr>
             <a:picLocks noChangeAspect="1"/>
           </p:cNvPicPr>
@@ -7930,8 +7908,8 @@
         </p:blipFill>
         <p:spPr>
           <a:xfrm>
-            <a:off x="10744200" y="384048"/>
-            <a:ext cx="1051560" cy="795528"/>
+            <a:off x="10287000" y="475488"/>
+            <a:ext cx="1481328" cy="457200"/>
           </a:xfrm>
           <a:prstGeom prst="rect">
             <a:avLst/>
@@ -9156,7 +9134,7 @@
       </p:sp>
       <p:pic>
         <p:nvPicPr>
-          <p:cNvPr id="4" name="Image 0" descr="logo-dgi.png">    </p:cNvPr>
+          <p:cNvPr id="4" name="Image 0" descr="logo-dgci.png">    </p:cNvPr>
           <p:cNvPicPr>
             <a:picLocks noChangeAspect="1"/>
           </p:cNvPicPr>
@@ -9170,8 +9148,8 @@
         </p:blipFill>
         <p:spPr>
           <a:xfrm>
-            <a:off x="10744200" y="384048"/>
-            <a:ext cx="1051560" cy="795528"/>
+            <a:off x="10287000" y="475488"/>
+            <a:ext cx="1481328" cy="457200"/>
           </a:xfrm>
           <a:prstGeom prst="rect">
             <a:avLst/>
